--- a/Data-Science-Project.pptx
+++ b/Data-Science-Project.pptx
@@ -5,10 +5,10 @@
     <p:sldMasterId id="2147483666" r:id="rId4"/>
   </p:sldMasterIdLst>
   <p:notesMasterIdLst>
-    <p:notesMasterId r:id="rId17"/>
+    <p:notesMasterId r:id="rId19"/>
   </p:notesMasterIdLst>
   <p:handoutMasterIdLst>
-    <p:handoutMasterId r:id="rId18"/>
+    <p:handoutMasterId r:id="rId20"/>
   </p:handoutMasterIdLst>
   <p:sldIdLst>
     <p:sldId id="314" r:id="rId5"/>
@@ -20,9 +20,11 @@
     <p:sldId id="329" r:id="rId11"/>
     <p:sldId id="319" r:id="rId12"/>
     <p:sldId id="320" r:id="rId13"/>
-    <p:sldId id="326" r:id="rId14"/>
-    <p:sldId id="321" r:id="rId15"/>
-    <p:sldId id="309" r:id="rId16"/>
+    <p:sldId id="330" r:id="rId14"/>
+    <p:sldId id="331" r:id="rId15"/>
+    <p:sldId id="326" r:id="rId16"/>
+    <p:sldId id="321" r:id="rId17"/>
+    <p:sldId id="309" r:id="rId18"/>
   </p:sldIdLst>
   <p:sldSz cx="12192000" cy="6858000"/>
   <p:notesSz cx="6858000" cy="9144000"/>
@@ -785,6 +787,222 @@
         <p:cNvPr id="1" name="">
           <a:extLst>
             <a:ext uri="{FF2B5EF4-FFF2-40B4-BE49-F238E27FC236}">
+              <a16:creationId xmlns:a16="http://schemas.microsoft.com/office/drawing/2014/main" id="{CFE4B313-700F-284D-B28E-B582D1BA1CFF}"/>
+            </a:ext>
+          </a:extLst>
+        </p:cNvPr>
+        <p:cNvGrpSpPr/>
+        <p:nvPr/>
+      </p:nvGrpSpPr>
+      <p:grpSpPr>
+        <a:xfrm>
+          <a:off x="0" y="0"/>
+          <a:ext cx="0" cy="0"/>
+          <a:chOff x="0" y="0"/>
+          <a:chExt cx="0" cy="0"/>
+        </a:xfrm>
+      </p:grpSpPr>
+      <p:sp>
+        <p:nvSpPr>
+          <p:cNvPr id="2" name="Slide Image Placeholder 1">
+            <a:extLst>
+              <a:ext uri="{FF2B5EF4-FFF2-40B4-BE49-F238E27FC236}">
+                <a16:creationId xmlns:a16="http://schemas.microsoft.com/office/drawing/2014/main" id="{99403502-EA9B-0687-250C-69F01FA3626C}"/>
+              </a:ext>
+            </a:extLst>
+          </p:cNvPr>
+          <p:cNvSpPr>
+            <a:spLocks noGrp="1" noRot="1" noChangeAspect="1"/>
+          </p:cNvSpPr>
+          <p:nvPr>
+            <p:ph type="sldImg"/>
+          </p:nvPr>
+        </p:nvSpPr>
+        <p:spPr/>
+      </p:sp>
+      <p:sp>
+        <p:nvSpPr>
+          <p:cNvPr id="3" name="Notes Placeholder 2">
+            <a:extLst>
+              <a:ext uri="{FF2B5EF4-FFF2-40B4-BE49-F238E27FC236}">
+                <a16:creationId xmlns:a16="http://schemas.microsoft.com/office/drawing/2014/main" id="{0B049245-0387-A67F-0E59-CBDB498188BE}"/>
+              </a:ext>
+            </a:extLst>
+          </p:cNvPr>
+          <p:cNvSpPr>
+            <a:spLocks noGrp="1"/>
+          </p:cNvSpPr>
+          <p:nvPr>
+            <p:ph type="body" idx="1"/>
+          </p:nvPr>
+        </p:nvSpPr>
+        <p:spPr/>
+        <p:txBody>
+          <a:bodyPr/>
+          <a:lstStyle/>
+          <a:p>
+            <a:endParaRPr lang="en-US" dirty="0"/>
+          </a:p>
+        </p:txBody>
+      </p:sp>
+      <p:sp>
+        <p:nvSpPr>
+          <p:cNvPr id="4" name="Slide Number Placeholder 3">
+            <a:extLst>
+              <a:ext uri="{FF2B5EF4-FFF2-40B4-BE49-F238E27FC236}">
+                <a16:creationId xmlns:a16="http://schemas.microsoft.com/office/drawing/2014/main" id="{E1AC6B10-122B-1EFC-3B3E-75EE258408BB}"/>
+              </a:ext>
+            </a:extLst>
+          </p:cNvPr>
+          <p:cNvSpPr>
+            <a:spLocks noGrp="1"/>
+          </p:cNvSpPr>
+          <p:nvPr>
+            <p:ph type="sldNum" sz="quarter" idx="5"/>
+          </p:nvPr>
+        </p:nvSpPr>
+        <p:spPr/>
+        <p:txBody>
+          <a:bodyPr/>
+          <a:lstStyle/>
+          <a:p>
+            <a:fld id="{D4B9A9E5-4F7F-4A7D-9DE1-899232329269}" type="slidenum">
+              <a:rPr lang="en-US" smtClean="0"/>
+              <a:t>10</a:t>
+            </a:fld>
+            <a:endParaRPr lang="en-US" dirty="0"/>
+          </a:p>
+        </p:txBody>
+      </p:sp>
+    </p:spTree>
+    <p:extLst>
+      <p:ext uri="{BB962C8B-B14F-4D97-AF65-F5344CB8AC3E}">
+        <p14:creationId xmlns:p14="http://schemas.microsoft.com/office/powerpoint/2010/main" val="3679127454"/>
+      </p:ext>
+    </p:extLst>
+  </p:cSld>
+  <p:clrMapOvr>
+    <a:masterClrMapping/>
+  </p:clrMapOvr>
+</p:notes>
+</file>
+
+<file path=ppt/notesSlides/notesSlide11.xml><?xml version="1.0" encoding="utf-8"?>
+<p:notes xmlns:a="http://schemas.openxmlformats.org/drawingml/2006/main" xmlns:r="http://schemas.openxmlformats.org/officeDocument/2006/relationships" xmlns:p="http://schemas.openxmlformats.org/presentationml/2006/main">
+  <p:cSld>
+    <p:spTree>
+      <p:nvGrpSpPr>
+        <p:cNvPr id="1" name="">
+          <a:extLst>
+            <a:ext uri="{FF2B5EF4-FFF2-40B4-BE49-F238E27FC236}">
+              <a16:creationId xmlns:a16="http://schemas.microsoft.com/office/drawing/2014/main" id="{80199012-7FB2-04F7-37D9-E52E45F344A2}"/>
+            </a:ext>
+          </a:extLst>
+        </p:cNvPr>
+        <p:cNvGrpSpPr/>
+        <p:nvPr/>
+      </p:nvGrpSpPr>
+      <p:grpSpPr>
+        <a:xfrm>
+          <a:off x="0" y="0"/>
+          <a:ext cx="0" cy="0"/>
+          <a:chOff x="0" y="0"/>
+          <a:chExt cx="0" cy="0"/>
+        </a:xfrm>
+      </p:grpSpPr>
+      <p:sp>
+        <p:nvSpPr>
+          <p:cNvPr id="2" name="Slide Image Placeholder 1">
+            <a:extLst>
+              <a:ext uri="{FF2B5EF4-FFF2-40B4-BE49-F238E27FC236}">
+                <a16:creationId xmlns:a16="http://schemas.microsoft.com/office/drawing/2014/main" id="{44D72639-A5B8-3B7E-5DA7-F6CB813B697E}"/>
+              </a:ext>
+            </a:extLst>
+          </p:cNvPr>
+          <p:cNvSpPr>
+            <a:spLocks noGrp="1" noRot="1" noChangeAspect="1"/>
+          </p:cNvSpPr>
+          <p:nvPr>
+            <p:ph type="sldImg"/>
+          </p:nvPr>
+        </p:nvSpPr>
+        <p:spPr/>
+      </p:sp>
+      <p:sp>
+        <p:nvSpPr>
+          <p:cNvPr id="3" name="Notes Placeholder 2">
+            <a:extLst>
+              <a:ext uri="{FF2B5EF4-FFF2-40B4-BE49-F238E27FC236}">
+                <a16:creationId xmlns:a16="http://schemas.microsoft.com/office/drawing/2014/main" id="{10D15DF4-D00A-D7D3-37D5-225632A76892}"/>
+              </a:ext>
+            </a:extLst>
+          </p:cNvPr>
+          <p:cNvSpPr>
+            <a:spLocks noGrp="1"/>
+          </p:cNvSpPr>
+          <p:nvPr>
+            <p:ph type="body" idx="1"/>
+          </p:nvPr>
+        </p:nvSpPr>
+        <p:spPr/>
+        <p:txBody>
+          <a:bodyPr/>
+          <a:lstStyle/>
+          <a:p>
+            <a:endParaRPr lang="en-US" dirty="0"/>
+          </a:p>
+        </p:txBody>
+      </p:sp>
+      <p:sp>
+        <p:nvSpPr>
+          <p:cNvPr id="4" name="Slide Number Placeholder 3">
+            <a:extLst>
+              <a:ext uri="{FF2B5EF4-FFF2-40B4-BE49-F238E27FC236}">
+                <a16:creationId xmlns:a16="http://schemas.microsoft.com/office/drawing/2014/main" id="{D0B18E62-5578-4432-0AF1-156ACC6A8562}"/>
+              </a:ext>
+            </a:extLst>
+          </p:cNvPr>
+          <p:cNvSpPr>
+            <a:spLocks noGrp="1"/>
+          </p:cNvSpPr>
+          <p:nvPr>
+            <p:ph type="sldNum" sz="quarter" idx="5"/>
+          </p:nvPr>
+        </p:nvSpPr>
+        <p:spPr/>
+        <p:txBody>
+          <a:bodyPr/>
+          <a:lstStyle/>
+          <a:p>
+            <a:fld id="{D4B9A9E5-4F7F-4A7D-9DE1-899232329269}" type="slidenum">
+              <a:rPr lang="en-US" smtClean="0"/>
+              <a:t>11</a:t>
+            </a:fld>
+            <a:endParaRPr lang="en-US" dirty="0"/>
+          </a:p>
+        </p:txBody>
+      </p:sp>
+    </p:spTree>
+    <p:extLst>
+      <p:ext uri="{BB962C8B-B14F-4D97-AF65-F5344CB8AC3E}">
+        <p14:creationId xmlns:p14="http://schemas.microsoft.com/office/powerpoint/2010/main" val="1616726996"/>
+      </p:ext>
+    </p:extLst>
+  </p:cSld>
+  <p:clrMapOvr>
+    <a:masterClrMapping/>
+  </p:clrMapOvr>
+</p:notes>
+</file>
+
+<file path=ppt/notesSlides/notesSlide12.xml><?xml version="1.0" encoding="utf-8"?>
+<p:notes xmlns:a="http://schemas.openxmlformats.org/drawingml/2006/main" xmlns:r="http://schemas.openxmlformats.org/officeDocument/2006/relationships" xmlns:p="http://schemas.openxmlformats.org/presentationml/2006/main">
+  <p:cSld>
+    <p:spTree>
+      <p:nvGrpSpPr>
+        <p:cNvPr id="1" name="">
+          <a:extLst>
+            <a:ext uri="{FF2B5EF4-FFF2-40B4-BE49-F238E27FC236}">
               <a16:creationId xmlns:a16="http://schemas.microsoft.com/office/drawing/2014/main" id="{74F13457-FE94-579A-530E-AA67F085B1E0}"/>
             </a:ext>
           </a:extLst>
@@ -866,7 +1084,7 @@
           <a:p>
             <a:fld id="{D4B9A9E5-4F7F-4A7D-9DE1-899232329269}" type="slidenum">
               <a:rPr lang="en-US" smtClean="0"/>
-              <a:t>10</a:t>
+              <a:t>12</a:t>
             </a:fld>
             <a:endParaRPr lang="en-US" dirty="0"/>
           </a:p>
@@ -885,7 +1103,7 @@
 </p:notes>
 </file>
 
-<file path=ppt/notesSlides/notesSlide11.xml><?xml version="1.0" encoding="utf-8"?>
+<file path=ppt/notesSlides/notesSlide13.xml><?xml version="1.0" encoding="utf-8"?>
 <p:notes xmlns:a="http://schemas.openxmlformats.org/drawingml/2006/main" xmlns:r="http://schemas.openxmlformats.org/officeDocument/2006/relationships" xmlns:p="http://schemas.openxmlformats.org/presentationml/2006/main">
   <p:cSld>
     <p:spTree>
@@ -950,7 +1168,7 @@
           <a:p>
             <a:fld id="{D4B9A9E5-4F7F-4A7D-9DE1-899232329269}" type="slidenum">
               <a:rPr lang="en-US" smtClean="0"/>
-              <a:t>11</a:t>
+              <a:t>13</a:t>
             </a:fld>
             <a:endParaRPr lang="en-US" dirty="0"/>
           </a:p>
@@ -969,7 +1187,7 @@
 </p:notes>
 </file>
 
-<file path=ppt/notesSlides/notesSlide12.xml><?xml version="1.0" encoding="utf-8"?>
+<file path=ppt/notesSlides/notesSlide14.xml><?xml version="1.0" encoding="utf-8"?>
 <p:notes xmlns:a="http://schemas.openxmlformats.org/drawingml/2006/main" xmlns:r="http://schemas.openxmlformats.org/officeDocument/2006/relationships" xmlns:p="http://schemas.openxmlformats.org/presentationml/2006/main">
   <p:cSld>
     <p:spTree>
@@ -1034,7 +1252,7 @@
           <a:p>
             <a:fld id="{D4B9A9E5-4F7F-4A7D-9DE1-899232329269}" type="slidenum">
               <a:rPr lang="en-US" smtClean="0"/>
-              <a:t>12</a:t>
+              <a:t>14</a:t>
             </a:fld>
             <a:endParaRPr lang="en-US" dirty="0"/>
           </a:p>
@@ -6710,6 +6928,366 @@
         <p:cNvPr id="1" name="">
           <a:extLst>
             <a:ext uri="{FF2B5EF4-FFF2-40B4-BE49-F238E27FC236}">
+              <a16:creationId xmlns:a16="http://schemas.microsoft.com/office/drawing/2014/main" id="{D53EDEF1-B0B2-8A89-DEDA-0B5A5BE6A9CD}"/>
+            </a:ext>
+          </a:extLst>
+        </p:cNvPr>
+        <p:cNvGrpSpPr/>
+        <p:nvPr/>
+      </p:nvGrpSpPr>
+      <p:grpSpPr>
+        <a:xfrm>
+          <a:off x="0" y="0"/>
+          <a:ext cx="0" cy="0"/>
+          <a:chOff x="0" y="0"/>
+          <a:chExt cx="0" cy="0"/>
+        </a:xfrm>
+      </p:grpSpPr>
+      <p:sp>
+        <p:nvSpPr>
+          <p:cNvPr id="2" name="Title 1">
+            <a:extLst>
+              <a:ext uri="{FF2B5EF4-FFF2-40B4-BE49-F238E27FC236}">
+                <a16:creationId xmlns:a16="http://schemas.microsoft.com/office/drawing/2014/main" id="{EC67642B-5BBF-2618-EB96-E3FFB1C0F860}"/>
+              </a:ext>
+            </a:extLst>
+          </p:cNvPr>
+          <p:cNvSpPr>
+            <a:spLocks noGrp="1"/>
+          </p:cNvSpPr>
+          <p:nvPr>
+            <p:ph type="title"/>
+          </p:nvPr>
+        </p:nvSpPr>
+        <p:spPr>
+          <a:xfrm>
+            <a:off x="914399" y="365125"/>
+            <a:ext cx="10363201" cy="1629601"/>
+          </a:xfrm>
+        </p:spPr>
+        <p:txBody>
+          <a:bodyPr/>
+          <a:lstStyle/>
+          <a:p>
+            <a:r>
+              <a:rPr lang="en-US" dirty="0"/>
+              <a:t>Movies - Measurement criteria </a:t>
+            </a:r>
+          </a:p>
+        </p:txBody>
+      </p:sp>
+      <p:sp>
+        <p:nvSpPr>
+          <p:cNvPr id="5" name="Slide Number Placeholder 4">
+            <a:extLst>
+              <a:ext uri="{FF2B5EF4-FFF2-40B4-BE49-F238E27FC236}">
+                <a16:creationId xmlns:a16="http://schemas.microsoft.com/office/drawing/2014/main" id="{DEF7E6A2-B2C9-55AB-E7D0-56110A8BD939}"/>
+              </a:ext>
+            </a:extLst>
+          </p:cNvPr>
+          <p:cNvSpPr>
+            <a:spLocks noGrp="1"/>
+          </p:cNvSpPr>
+          <p:nvPr>
+            <p:ph type="sldNum" sz="quarter" idx="4"/>
+          </p:nvPr>
+        </p:nvSpPr>
+        <p:spPr>
+          <a:xfrm>
+            <a:off x="914400" y="6246254"/>
+            <a:ext cx="631065" cy="296214"/>
+          </a:xfrm>
+        </p:spPr>
+        <p:txBody>
+          <a:bodyPr/>
+          <a:lstStyle/>
+          <a:p>
+            <a:fld id="{B5CEABB6-07DC-46E8-9B57-56EC44A396E5}" type="slidenum">
+              <a:rPr lang="en-US" smtClean="0"/>
+              <a:pPr/>
+              <a:t>10</a:t>
+            </a:fld>
+            <a:endParaRPr lang="en-US" dirty="0"/>
+          </a:p>
+        </p:txBody>
+      </p:sp>
+      <p:sp>
+        <p:nvSpPr>
+          <p:cNvPr id="9" name="Content Placeholder 8">
+            <a:extLst>
+              <a:ext uri="{FF2B5EF4-FFF2-40B4-BE49-F238E27FC236}">
+                <a16:creationId xmlns:a16="http://schemas.microsoft.com/office/drawing/2014/main" id="{2806F918-9F3D-65E9-5302-A6EF42332DC4}"/>
+              </a:ext>
+            </a:extLst>
+          </p:cNvPr>
+          <p:cNvSpPr>
+            <a:spLocks noGrp="1"/>
+          </p:cNvSpPr>
+          <p:nvPr>
+            <p:ph sz="quarter" idx="11"/>
+          </p:nvPr>
+        </p:nvSpPr>
+        <p:spPr>
+          <a:xfrm>
+            <a:off x="914399" y="2022250"/>
+            <a:ext cx="10363201" cy="3747180"/>
+          </a:xfrm>
+        </p:spPr>
+        <p:txBody>
+          <a:bodyPr>
+            <a:normAutofit/>
+          </a:bodyPr>
+          <a:lstStyle/>
+          <a:p>
+            <a:pPr lvl="0"/>
+            <a:r>
+              <a:rPr lang="de-DE" dirty="0"/>
+              <a:t>User Ratings</a:t>
+            </a:r>
+            <a:endParaRPr lang="en-DE" dirty="0"/>
+          </a:p>
+          <a:p>
+            <a:pPr lvl="0"/>
+            <a:r>
+              <a:rPr lang="de-DE" dirty="0"/>
+              <a:t>Release timing</a:t>
+            </a:r>
+            <a:endParaRPr lang="en-DE" dirty="0"/>
+          </a:p>
+          <a:p>
+            <a:pPr lvl="0"/>
+            <a:r>
+              <a:rPr lang="de-DE" dirty="0"/>
+              <a:t>Wikimedia views</a:t>
+            </a:r>
+            <a:endParaRPr lang="en-DE" dirty="0"/>
+          </a:p>
+          <a:p>
+            <a:pPr lvl="0"/>
+            <a:r>
+              <a:rPr lang="de-DE" dirty="0"/>
+              <a:t>Budget</a:t>
+            </a:r>
+            <a:endParaRPr lang="en-DE" dirty="0"/>
+          </a:p>
+          <a:p>
+            <a:pPr lvl="0"/>
+            <a:r>
+              <a:rPr lang="de-DE" dirty="0"/>
+              <a:t>Profit</a:t>
+            </a:r>
+            <a:endParaRPr lang="en-DE" dirty="0"/>
+          </a:p>
+          <a:p>
+            <a:pPr lvl="0"/>
+            <a:r>
+              <a:rPr lang="de-DE" dirty="0"/>
+              <a:t>Youtube view counts</a:t>
+            </a:r>
+            <a:endParaRPr lang="en-DE" dirty="0"/>
+          </a:p>
+          <a:p>
+            <a:pPr lvl="0"/>
+            <a:r>
+              <a:rPr lang="de-DE" dirty="0"/>
+              <a:t>Google search request amounts</a:t>
+            </a:r>
+            <a:endParaRPr lang="en-DE" dirty="0"/>
+          </a:p>
+        </p:txBody>
+      </p:sp>
+    </p:spTree>
+    <p:extLst>
+      <p:ext uri="{BB962C8B-B14F-4D97-AF65-F5344CB8AC3E}">
+        <p14:creationId xmlns:p14="http://schemas.microsoft.com/office/powerpoint/2010/main" val="3318088986"/>
+      </p:ext>
+    </p:extLst>
+  </p:cSld>
+  <p:clrMapOvr>
+    <a:masterClrMapping/>
+  </p:clrMapOvr>
+</p:sld>
+</file>
+
+<file path=ppt/slides/slide11.xml><?xml version="1.0" encoding="utf-8"?>
+<p:sld xmlns:a="http://schemas.openxmlformats.org/drawingml/2006/main" xmlns:r="http://schemas.openxmlformats.org/officeDocument/2006/relationships" xmlns:p="http://schemas.openxmlformats.org/presentationml/2006/main">
+  <p:cSld>
+    <p:spTree>
+      <p:nvGrpSpPr>
+        <p:cNvPr id="1" name="">
+          <a:extLst>
+            <a:ext uri="{FF2B5EF4-FFF2-40B4-BE49-F238E27FC236}">
+              <a16:creationId xmlns:a16="http://schemas.microsoft.com/office/drawing/2014/main" id="{E5684A1D-560C-C239-8F10-F247DDB2361A}"/>
+            </a:ext>
+          </a:extLst>
+        </p:cNvPr>
+        <p:cNvGrpSpPr/>
+        <p:nvPr/>
+      </p:nvGrpSpPr>
+      <p:grpSpPr>
+        <a:xfrm>
+          <a:off x="0" y="0"/>
+          <a:ext cx="0" cy="0"/>
+          <a:chOff x="0" y="0"/>
+          <a:chExt cx="0" cy="0"/>
+        </a:xfrm>
+      </p:grpSpPr>
+      <p:sp>
+        <p:nvSpPr>
+          <p:cNvPr id="2" name="Title 1">
+            <a:extLst>
+              <a:ext uri="{FF2B5EF4-FFF2-40B4-BE49-F238E27FC236}">
+                <a16:creationId xmlns:a16="http://schemas.microsoft.com/office/drawing/2014/main" id="{FA92A690-BC3C-6848-8977-92451B9F3280}"/>
+              </a:ext>
+            </a:extLst>
+          </p:cNvPr>
+          <p:cNvSpPr>
+            <a:spLocks noGrp="1"/>
+          </p:cNvSpPr>
+          <p:nvPr>
+            <p:ph type="title"/>
+          </p:nvPr>
+        </p:nvSpPr>
+        <p:spPr>
+          <a:xfrm>
+            <a:off x="914399" y="365125"/>
+            <a:ext cx="10363201" cy="1629601"/>
+          </a:xfrm>
+        </p:spPr>
+        <p:txBody>
+          <a:bodyPr/>
+          <a:lstStyle/>
+          <a:p>
+            <a:r>
+              <a:rPr lang="en-US" dirty="0"/>
+              <a:t>Movies -API</a:t>
+            </a:r>
+            <a:r>
+              <a:rPr lang="en-US" sz="2400" b="1" dirty="0"/>
+              <a:t>s</a:t>
+            </a:r>
+          </a:p>
+        </p:txBody>
+      </p:sp>
+      <p:sp>
+        <p:nvSpPr>
+          <p:cNvPr id="5" name="Slide Number Placeholder 4">
+            <a:extLst>
+              <a:ext uri="{FF2B5EF4-FFF2-40B4-BE49-F238E27FC236}">
+                <a16:creationId xmlns:a16="http://schemas.microsoft.com/office/drawing/2014/main" id="{B01ACBE2-0C1D-1832-B350-ADA804DBB3B0}"/>
+              </a:ext>
+            </a:extLst>
+          </p:cNvPr>
+          <p:cNvSpPr>
+            <a:spLocks noGrp="1"/>
+          </p:cNvSpPr>
+          <p:nvPr>
+            <p:ph type="sldNum" sz="quarter" idx="4"/>
+          </p:nvPr>
+        </p:nvSpPr>
+        <p:spPr>
+          <a:xfrm>
+            <a:off x="914400" y="6246254"/>
+            <a:ext cx="631065" cy="296214"/>
+          </a:xfrm>
+        </p:spPr>
+        <p:txBody>
+          <a:bodyPr/>
+          <a:lstStyle/>
+          <a:p>
+            <a:fld id="{B5CEABB6-07DC-46E8-9B57-56EC44A396E5}" type="slidenum">
+              <a:rPr lang="en-US" smtClean="0"/>
+              <a:pPr/>
+              <a:t>11</a:t>
+            </a:fld>
+            <a:endParaRPr lang="en-US" dirty="0"/>
+          </a:p>
+        </p:txBody>
+      </p:sp>
+      <p:sp>
+        <p:nvSpPr>
+          <p:cNvPr id="9" name="Content Placeholder 8">
+            <a:extLst>
+              <a:ext uri="{FF2B5EF4-FFF2-40B4-BE49-F238E27FC236}">
+                <a16:creationId xmlns:a16="http://schemas.microsoft.com/office/drawing/2014/main" id="{11777FC7-8F96-5BF0-C016-124249732B97}"/>
+              </a:ext>
+            </a:extLst>
+          </p:cNvPr>
+          <p:cNvSpPr>
+            <a:spLocks noGrp="1"/>
+          </p:cNvSpPr>
+          <p:nvPr>
+            <p:ph sz="quarter" idx="11"/>
+          </p:nvPr>
+        </p:nvSpPr>
+        <p:spPr>
+          <a:xfrm>
+            <a:off x="914399" y="2022250"/>
+            <a:ext cx="10363201" cy="3747180"/>
+          </a:xfrm>
+        </p:spPr>
+        <p:txBody>
+          <a:bodyPr>
+            <a:normAutofit/>
+          </a:bodyPr>
+          <a:lstStyle/>
+          <a:p>
+            <a:pPr marL="0" indent="0">
+              <a:buNone/>
+            </a:pPr>
+            <a:r>
+              <a:rPr lang="de-DE" u="sng" dirty="0"/>
+              <a:t>APIs for movies:</a:t>
+            </a:r>
+            <a:endParaRPr lang="en-DE" dirty="0"/>
+          </a:p>
+          <a:p>
+            <a:r>
+              <a:rPr lang="de-DE" dirty="0"/>
+              <a:t>Open movie database (OMDb)</a:t>
+            </a:r>
+            <a:endParaRPr lang="en-DE" dirty="0"/>
+          </a:p>
+          <a:p>
+            <a:r>
+              <a:rPr lang="de-DE" dirty="0"/>
+              <a:t>Wikimedia API</a:t>
+            </a:r>
+            <a:endParaRPr lang="en-DE" dirty="0"/>
+          </a:p>
+          <a:p>
+            <a:r>
+              <a:rPr lang="de-DE" dirty="0"/>
+              <a:t>Youtube Analytics API</a:t>
+            </a:r>
+            <a:endParaRPr lang="en-DE" dirty="0"/>
+          </a:p>
+          <a:p>
+            <a:endParaRPr lang="en-DE" dirty="0"/>
+          </a:p>
+        </p:txBody>
+      </p:sp>
+    </p:spTree>
+    <p:extLst>
+      <p:ext uri="{BB962C8B-B14F-4D97-AF65-F5344CB8AC3E}">
+        <p14:creationId xmlns:p14="http://schemas.microsoft.com/office/powerpoint/2010/main" val="2242169439"/>
+      </p:ext>
+    </p:extLst>
+  </p:cSld>
+  <p:clrMapOvr>
+    <a:masterClrMapping/>
+  </p:clrMapOvr>
+</p:sld>
+</file>
+
+<file path=ppt/slides/slide12.xml><?xml version="1.0" encoding="utf-8"?>
+<p:sld xmlns:a="http://schemas.openxmlformats.org/drawingml/2006/main" xmlns:r="http://schemas.openxmlformats.org/officeDocument/2006/relationships" xmlns:p="http://schemas.openxmlformats.org/presentationml/2006/main">
+  <p:cSld>
+    <p:spTree>
+      <p:nvGrpSpPr>
+        <p:cNvPr id="1" name="">
+          <a:extLst>
+            <a:ext uri="{FF2B5EF4-FFF2-40B4-BE49-F238E27FC236}">
               <a16:creationId xmlns:a16="http://schemas.microsoft.com/office/drawing/2014/main" id="{37DB42E0-D964-B6C3-AF9A-F5B8D5393093}"/>
             </a:ext>
           </a:extLst>
@@ -6797,7 +7375,7 @@
 </p:sld>
 </file>
 
-<file path=ppt/slides/slide11.xml><?xml version="1.0" encoding="utf-8"?>
+<file path=ppt/slides/slide13.xml><?xml version="1.0" encoding="utf-8"?>
 <p:sld xmlns:a="http://schemas.openxmlformats.org/drawingml/2006/main" xmlns:r="http://schemas.openxmlformats.org/officeDocument/2006/relationships" xmlns:p="http://schemas.openxmlformats.org/presentationml/2006/main">
   <p:cSld>
     <p:spTree>
@@ -6877,7 +7455,7 @@
             <a:fld id="{B5CEABB6-07DC-46E8-9B57-56EC44A396E5}" type="slidenum">
               <a:rPr lang="en-US" smtClean="0"/>
               <a:pPr/>
-              <a:t>11</a:t>
+              <a:t>13</a:t>
             </a:fld>
             <a:endParaRPr lang="en-US" dirty="0"/>
           </a:p>
@@ -6926,7 +7504,7 @@
 </p:sld>
 </file>
 
-<file path=ppt/slides/slide12.xml><?xml version="1.0" encoding="utf-8"?>
+<file path=ppt/slides/slide14.xml><?xml version="1.0" encoding="utf-8"?>
 <p:sld xmlns:a="http://schemas.openxmlformats.org/drawingml/2006/main" xmlns:r="http://schemas.openxmlformats.org/officeDocument/2006/relationships" xmlns:p="http://schemas.openxmlformats.org/presentationml/2006/main">
   <p:cSld>
     <p:bg>
@@ -7124,7 +7702,7 @@
             </a:pPr>
             <a:r>
               <a:rPr lang="de-DE" dirty="0"/>
-              <a:t>Filme</a:t>
+              <a:t>Movies</a:t>
             </a:r>
           </a:p>
           <a:p>
@@ -7226,10 +7804,9 @@
           <a:lstStyle/>
           <a:p>
             <a:r>
-              <a:rPr lang="en-US" dirty="0" err="1"/>
-              <a:t>Luftverschmutzung</a:t>
-            </a:r>
-            <a:endParaRPr lang="en-US" dirty="0"/>
+              <a:rPr lang="en-US" dirty="0"/>
+              <a:t>Air pollution</a:t>
+            </a:r>
           </a:p>
         </p:txBody>
       </p:sp>
@@ -7660,7 +8237,11 @@
             </a:pPr>
             <a:r>
               <a:rPr lang="en-GB" dirty="0"/>
-              <a:t>How do the annual mean PM2 concentrations in Germany compare to those in comparable EU countries over the period 2000–2025 (if possible)?</a:t>
+              <a:t>How do the annual mean PM2 concentrations in Germany compare to those in comparable EU countries over the </a:t>
+            </a:r>
+            <a:r>
+              <a:rPr lang="en-GB"/>
+              <a:t>period 2000–2025?</a:t>
             </a:r>
             <a:br>
               <a:rPr lang="en-GB" dirty="0"/>
@@ -8323,7 +8904,7 @@
           <a:p>
             <a:r>
               <a:rPr lang="en-US" dirty="0"/>
-              <a:t>Filme</a:t>
+              <a:t>Movies</a:t>
             </a:r>
           </a:p>
         </p:txBody>
@@ -8354,10 +8935,7 @@
           <a:bodyPr/>
           <a:lstStyle/>
           <a:p>
-            <a:r>
-              <a:rPr lang="en-US" noProof="1"/>
-              <a:t>Online store and market swap</a:t>
-            </a:r>
+            <a:endParaRPr lang="en-US" noProof="1"/>
           </a:p>
         </p:txBody>
       </p:sp>
@@ -8444,7 +9022,7 @@
           <a:p>
             <a:r>
               <a:rPr lang="en-US" dirty="0"/>
-              <a:t>Filme</a:t>
+              <a:t>Movies -questions</a:t>
             </a:r>
           </a:p>
         </p:txBody>
@@ -8507,10 +9085,102 @@
           </a:xfrm>
         </p:spPr>
         <p:txBody>
-          <a:bodyPr/>
+          <a:bodyPr>
+            <a:normAutofit fontScale="92500" lnSpcReduction="20000"/>
+          </a:bodyPr>
           <a:lstStyle/>
           <a:p>
-            <a:endParaRPr lang="en-DE"/>
+            <a:pPr marL="0" indent="0">
+              <a:buNone/>
+            </a:pPr>
+            <a:r>
+              <a:rPr lang="de-DE" dirty="0"/>
+              <a:t>1. Does the release of „big“ and successful movie releases influence the popularity of the genre?</a:t>
+            </a:r>
+            <a:endParaRPr lang="en-DE" dirty="0"/>
+          </a:p>
+          <a:p>
+            <a:pPr marL="0" indent="0">
+              <a:buNone/>
+            </a:pPr>
+            <a:r>
+              <a:rPr lang="de-DE" dirty="0"/>
+              <a:t>2. Does the budget of a movie or show influence the movies success?</a:t>
+            </a:r>
+            <a:endParaRPr lang="en-DE" dirty="0"/>
+          </a:p>
+          <a:p>
+            <a:pPr marL="0" indent="0">
+              <a:buNone/>
+            </a:pPr>
+            <a:r>
+              <a:rPr lang="de-DE" dirty="0"/>
+              <a:t>3. What characteristics do influence movies to be discussed more online?</a:t>
+            </a:r>
+            <a:endParaRPr lang="en-DE" dirty="0"/>
+          </a:p>
+          <a:p>
+            <a:pPr marL="0" indent="0">
+              <a:buNone/>
+            </a:pPr>
+            <a:r>
+              <a:rPr lang="de-DE" dirty="0"/>
+              <a:t>4. Does the release timing of a movie or show influence it's success?</a:t>
+            </a:r>
+            <a:endParaRPr lang="en-DE" dirty="0"/>
+          </a:p>
+          <a:p>
+            <a:pPr marL="0" indent="0">
+              <a:buNone/>
+            </a:pPr>
+            <a:r>
+              <a:rPr lang="de-DE" dirty="0"/>
+              <a:t>5. What film genres gained more popularity over time?</a:t>
+            </a:r>
+            <a:endParaRPr lang="en-DE" dirty="0"/>
+          </a:p>
+          <a:p>
+            <a:pPr marL="0" indent="0">
+              <a:buNone/>
+            </a:pPr>
+            <a:r>
+              <a:rPr lang="de-DE" dirty="0"/>
+              <a:t>6. Do critics reviews influence the opinion of users?</a:t>
+            </a:r>
+            <a:endParaRPr lang="en-DE" dirty="0"/>
+          </a:p>
+          <a:p>
+            <a:pPr marL="0" indent="0">
+              <a:buNone/>
+            </a:pPr>
+            <a:r>
+              <a:rPr lang="de-DE" dirty="0"/>
+              <a:t>7. Do long releases between season of a show cause users to drop interest in them?</a:t>
+            </a:r>
+            <a:endParaRPr lang="en-DE" dirty="0"/>
+          </a:p>
+          <a:p>
+            <a:pPr marL="0" lvl="0" indent="0">
+              <a:buNone/>
+            </a:pPr>
+            <a:r>
+              <a:rPr lang="de-DE" dirty="0"/>
+              <a:t>8. Does excitement online before a release influence the success of a show?</a:t>
+            </a:r>
+            <a:endParaRPr lang="en-DE" dirty="0"/>
+          </a:p>
+          <a:p>
+            <a:pPr marL="0" lvl="0" indent="0">
+              <a:buNone/>
+            </a:pPr>
+            <a:r>
+              <a:rPr lang="de-DE" dirty="0"/>
+              <a:t>9. Does the general opinion you see on social media influence the success? (is social media a bubble)</a:t>
+            </a:r>
+            <a:endParaRPr lang="en-DE" dirty="0"/>
+          </a:p>
+          <a:p>
+            <a:endParaRPr lang="en-DE" dirty="0"/>
           </a:p>
         </p:txBody>
       </p:sp>

--- a/Data-Science-Project.pptx
+++ b/Data-Science-Project.pptx
@@ -5,10 +5,10 @@
     <p:sldMasterId id="2147483666" r:id="rId4"/>
   </p:sldMasterIdLst>
   <p:notesMasterIdLst>
-    <p:notesMasterId r:id="rId19"/>
+    <p:notesMasterId r:id="rId22"/>
   </p:notesMasterIdLst>
   <p:handoutMasterIdLst>
-    <p:handoutMasterId r:id="rId20"/>
+    <p:handoutMasterId r:id="rId23"/>
   </p:handoutMasterIdLst>
   <p:sldIdLst>
     <p:sldId id="314" r:id="rId5"/>
@@ -23,8 +23,11 @@
     <p:sldId id="330" r:id="rId14"/>
     <p:sldId id="331" r:id="rId15"/>
     <p:sldId id="326" r:id="rId16"/>
-    <p:sldId id="321" r:id="rId17"/>
-    <p:sldId id="309" r:id="rId18"/>
+    <p:sldId id="333" r:id="rId17"/>
+    <p:sldId id="334" r:id="rId18"/>
+    <p:sldId id="335" r:id="rId19"/>
+    <p:sldId id="336" r:id="rId20"/>
+    <p:sldId id="309" r:id="rId21"/>
   </p:sldIdLst>
   <p:sldSz cx="12192000" cy="6858000"/>
   <p:notesSz cx="6858000" cy="9144000"/>
@@ -329,7 +332,7 @@
           <a:p>
             <a:fld id="{4BF9A36D-7FAC-478F-9944-F324014F6FD1}" type="slidenum">
               <a:rPr lang="en-US" smtClean="0"/>
-              <a:t>‹#›</a:t>
+              <a:t>‹Nr.›</a:t>
             </a:fld>
             <a:endParaRPr lang="en-US" dirty="0"/>
           </a:p>
@@ -586,7 +589,7 @@
           <a:p>
             <a:fld id="{D4B9A9E5-4F7F-4A7D-9DE1-899232329269}" type="slidenum">
               <a:rPr lang="en-US" smtClean="0"/>
-              <a:t>‹#›</a:t>
+              <a:t>‹Nr.›</a:t>
             </a:fld>
             <a:endParaRPr lang="en-US" dirty="0"/>
           </a:p>
@@ -1108,7 +1111,13 @@
   <p:cSld>
     <p:spTree>
       <p:nvGrpSpPr>
-        <p:cNvPr id="1" name=""/>
+        <p:cNvPr id="1" name="">
+          <a:extLst>
+            <a:ext uri="{FF2B5EF4-FFF2-40B4-BE49-F238E27FC236}">
+              <a16:creationId xmlns:a16="http://schemas.microsoft.com/office/drawing/2014/main" id="{EAC6B79D-0981-235C-75F1-DE4B727CD851}"/>
+            </a:ext>
+          </a:extLst>
+        </p:cNvPr>
         <p:cNvGrpSpPr/>
         <p:nvPr/>
       </p:nvGrpSpPr>
@@ -1122,7 +1131,13 @@
       </p:grpSpPr>
       <p:sp>
         <p:nvSpPr>
-          <p:cNvPr id="2" name="Slide Image Placeholder 1"/>
+          <p:cNvPr id="2" name="Slide Image Placeholder 1">
+            <a:extLst>
+              <a:ext uri="{FF2B5EF4-FFF2-40B4-BE49-F238E27FC236}">
+                <a16:creationId xmlns:a16="http://schemas.microsoft.com/office/drawing/2014/main" id="{9FC6CA65-DF2F-3495-8A93-4FEB3200A160}"/>
+              </a:ext>
+            </a:extLst>
+          </p:cNvPr>
           <p:cNvSpPr>
             <a:spLocks noGrp="1" noRot="1" noChangeAspect="1"/>
           </p:cNvSpPr>
@@ -1134,7 +1149,13 @@
       </p:sp>
       <p:sp>
         <p:nvSpPr>
-          <p:cNvPr id="3" name="Notes Placeholder 2"/>
+          <p:cNvPr id="3" name="Notes Placeholder 2">
+            <a:extLst>
+              <a:ext uri="{FF2B5EF4-FFF2-40B4-BE49-F238E27FC236}">
+                <a16:creationId xmlns:a16="http://schemas.microsoft.com/office/drawing/2014/main" id="{081B41BD-B558-7F1D-3DCC-8ABFBA2A9D41}"/>
+              </a:ext>
+            </a:extLst>
+          </p:cNvPr>
           <p:cNvSpPr>
             <a:spLocks noGrp="1"/>
           </p:cNvSpPr>
@@ -1153,7 +1174,13 @@
       </p:sp>
       <p:sp>
         <p:nvSpPr>
-          <p:cNvPr id="4" name="Slide Number Placeholder 3"/>
+          <p:cNvPr id="4" name="Slide Number Placeholder 3">
+            <a:extLst>
+              <a:ext uri="{FF2B5EF4-FFF2-40B4-BE49-F238E27FC236}">
+                <a16:creationId xmlns:a16="http://schemas.microsoft.com/office/drawing/2014/main" id="{04246773-75B2-118A-EB72-C03DC1D114BA}"/>
+              </a:ext>
+            </a:extLst>
+          </p:cNvPr>
           <p:cNvSpPr>
             <a:spLocks noGrp="1"/>
           </p:cNvSpPr>
@@ -1177,7 +1204,7 @@
     </p:spTree>
     <p:extLst>
       <p:ext uri="{BB962C8B-B14F-4D97-AF65-F5344CB8AC3E}">
-        <p14:creationId xmlns:p14="http://schemas.microsoft.com/office/powerpoint/2010/main" val="3984229589"/>
+        <p14:creationId xmlns:p14="http://schemas.microsoft.com/office/powerpoint/2010/main" val="45786665"/>
       </p:ext>
     </p:extLst>
   </p:cSld>
@@ -1188,6 +1215,330 @@
 </file>
 
 <file path=ppt/notesSlides/notesSlide14.xml><?xml version="1.0" encoding="utf-8"?>
+<p:notes xmlns:a="http://schemas.openxmlformats.org/drawingml/2006/main" xmlns:r="http://schemas.openxmlformats.org/officeDocument/2006/relationships" xmlns:p="http://schemas.openxmlformats.org/presentationml/2006/main">
+  <p:cSld>
+    <p:spTree>
+      <p:nvGrpSpPr>
+        <p:cNvPr id="1" name="">
+          <a:extLst>
+            <a:ext uri="{FF2B5EF4-FFF2-40B4-BE49-F238E27FC236}">
+              <a16:creationId xmlns:a16="http://schemas.microsoft.com/office/drawing/2014/main" id="{34515F72-CFD4-D408-5143-FFFF2C1E515B}"/>
+            </a:ext>
+          </a:extLst>
+        </p:cNvPr>
+        <p:cNvGrpSpPr/>
+        <p:nvPr/>
+      </p:nvGrpSpPr>
+      <p:grpSpPr>
+        <a:xfrm>
+          <a:off x="0" y="0"/>
+          <a:ext cx="0" cy="0"/>
+          <a:chOff x="0" y="0"/>
+          <a:chExt cx="0" cy="0"/>
+        </a:xfrm>
+      </p:grpSpPr>
+      <p:sp>
+        <p:nvSpPr>
+          <p:cNvPr id="2" name="Slide Image Placeholder 1">
+            <a:extLst>
+              <a:ext uri="{FF2B5EF4-FFF2-40B4-BE49-F238E27FC236}">
+                <a16:creationId xmlns:a16="http://schemas.microsoft.com/office/drawing/2014/main" id="{E90B3193-ED23-40CE-5B2D-E60DF89FFBEB}"/>
+              </a:ext>
+            </a:extLst>
+          </p:cNvPr>
+          <p:cNvSpPr>
+            <a:spLocks noGrp="1" noRot="1" noChangeAspect="1"/>
+          </p:cNvSpPr>
+          <p:nvPr>
+            <p:ph type="sldImg"/>
+          </p:nvPr>
+        </p:nvSpPr>
+        <p:spPr/>
+      </p:sp>
+      <p:sp>
+        <p:nvSpPr>
+          <p:cNvPr id="3" name="Notes Placeholder 2">
+            <a:extLst>
+              <a:ext uri="{FF2B5EF4-FFF2-40B4-BE49-F238E27FC236}">
+                <a16:creationId xmlns:a16="http://schemas.microsoft.com/office/drawing/2014/main" id="{83DB099B-CEE9-83A7-F62F-AF643F65DAF4}"/>
+              </a:ext>
+            </a:extLst>
+          </p:cNvPr>
+          <p:cNvSpPr>
+            <a:spLocks noGrp="1"/>
+          </p:cNvSpPr>
+          <p:nvPr>
+            <p:ph type="body" idx="1"/>
+          </p:nvPr>
+        </p:nvSpPr>
+        <p:spPr/>
+        <p:txBody>
+          <a:bodyPr/>
+          <a:lstStyle/>
+          <a:p>
+            <a:endParaRPr lang="en-US" dirty="0"/>
+          </a:p>
+        </p:txBody>
+      </p:sp>
+      <p:sp>
+        <p:nvSpPr>
+          <p:cNvPr id="4" name="Slide Number Placeholder 3">
+            <a:extLst>
+              <a:ext uri="{FF2B5EF4-FFF2-40B4-BE49-F238E27FC236}">
+                <a16:creationId xmlns:a16="http://schemas.microsoft.com/office/drawing/2014/main" id="{B410F43E-B90B-ADC3-6AB5-9952F513719B}"/>
+              </a:ext>
+            </a:extLst>
+          </p:cNvPr>
+          <p:cNvSpPr>
+            <a:spLocks noGrp="1"/>
+          </p:cNvSpPr>
+          <p:nvPr>
+            <p:ph type="sldNum" sz="quarter" idx="5"/>
+          </p:nvPr>
+        </p:nvSpPr>
+        <p:spPr/>
+        <p:txBody>
+          <a:bodyPr/>
+          <a:lstStyle/>
+          <a:p>
+            <a:fld id="{D4B9A9E5-4F7F-4A7D-9DE1-899232329269}" type="slidenum">
+              <a:rPr lang="en-US" smtClean="0"/>
+              <a:t>14</a:t>
+            </a:fld>
+            <a:endParaRPr lang="en-US" dirty="0"/>
+          </a:p>
+        </p:txBody>
+      </p:sp>
+    </p:spTree>
+    <p:extLst>
+      <p:ext uri="{BB962C8B-B14F-4D97-AF65-F5344CB8AC3E}">
+        <p14:creationId xmlns:p14="http://schemas.microsoft.com/office/powerpoint/2010/main" val="512958566"/>
+      </p:ext>
+    </p:extLst>
+  </p:cSld>
+  <p:clrMapOvr>
+    <a:masterClrMapping/>
+  </p:clrMapOvr>
+</p:notes>
+</file>
+
+<file path=ppt/notesSlides/notesSlide15.xml><?xml version="1.0" encoding="utf-8"?>
+<p:notes xmlns:a="http://schemas.openxmlformats.org/drawingml/2006/main" xmlns:r="http://schemas.openxmlformats.org/officeDocument/2006/relationships" xmlns:p="http://schemas.openxmlformats.org/presentationml/2006/main">
+  <p:cSld>
+    <p:spTree>
+      <p:nvGrpSpPr>
+        <p:cNvPr id="1" name="">
+          <a:extLst>
+            <a:ext uri="{FF2B5EF4-FFF2-40B4-BE49-F238E27FC236}">
+              <a16:creationId xmlns:a16="http://schemas.microsoft.com/office/drawing/2014/main" id="{3C3F2AB4-C377-E798-2D9D-1C1DBC0DEA7C}"/>
+            </a:ext>
+          </a:extLst>
+        </p:cNvPr>
+        <p:cNvGrpSpPr/>
+        <p:nvPr/>
+      </p:nvGrpSpPr>
+      <p:grpSpPr>
+        <a:xfrm>
+          <a:off x="0" y="0"/>
+          <a:ext cx="0" cy="0"/>
+          <a:chOff x="0" y="0"/>
+          <a:chExt cx="0" cy="0"/>
+        </a:xfrm>
+      </p:grpSpPr>
+      <p:sp>
+        <p:nvSpPr>
+          <p:cNvPr id="2" name="Slide Image Placeholder 1">
+            <a:extLst>
+              <a:ext uri="{FF2B5EF4-FFF2-40B4-BE49-F238E27FC236}">
+                <a16:creationId xmlns:a16="http://schemas.microsoft.com/office/drawing/2014/main" id="{D0552CE1-AB3F-67A6-B317-E636DFEAEF4D}"/>
+              </a:ext>
+            </a:extLst>
+          </p:cNvPr>
+          <p:cNvSpPr>
+            <a:spLocks noGrp="1" noRot="1" noChangeAspect="1"/>
+          </p:cNvSpPr>
+          <p:nvPr>
+            <p:ph type="sldImg"/>
+          </p:nvPr>
+        </p:nvSpPr>
+        <p:spPr/>
+      </p:sp>
+      <p:sp>
+        <p:nvSpPr>
+          <p:cNvPr id="3" name="Notes Placeholder 2">
+            <a:extLst>
+              <a:ext uri="{FF2B5EF4-FFF2-40B4-BE49-F238E27FC236}">
+                <a16:creationId xmlns:a16="http://schemas.microsoft.com/office/drawing/2014/main" id="{3BBD1C87-AD84-CA95-3993-45CF9D7E3C14}"/>
+              </a:ext>
+            </a:extLst>
+          </p:cNvPr>
+          <p:cNvSpPr>
+            <a:spLocks noGrp="1"/>
+          </p:cNvSpPr>
+          <p:nvPr>
+            <p:ph type="body" idx="1"/>
+          </p:nvPr>
+        </p:nvSpPr>
+        <p:spPr/>
+        <p:txBody>
+          <a:bodyPr/>
+          <a:lstStyle/>
+          <a:p>
+            <a:endParaRPr lang="en-US" dirty="0"/>
+          </a:p>
+        </p:txBody>
+      </p:sp>
+      <p:sp>
+        <p:nvSpPr>
+          <p:cNvPr id="4" name="Slide Number Placeholder 3">
+            <a:extLst>
+              <a:ext uri="{FF2B5EF4-FFF2-40B4-BE49-F238E27FC236}">
+                <a16:creationId xmlns:a16="http://schemas.microsoft.com/office/drawing/2014/main" id="{69692D78-0153-0414-1E94-E5FE4FA36632}"/>
+              </a:ext>
+            </a:extLst>
+          </p:cNvPr>
+          <p:cNvSpPr>
+            <a:spLocks noGrp="1"/>
+          </p:cNvSpPr>
+          <p:nvPr>
+            <p:ph type="sldNum" sz="quarter" idx="5"/>
+          </p:nvPr>
+        </p:nvSpPr>
+        <p:spPr/>
+        <p:txBody>
+          <a:bodyPr/>
+          <a:lstStyle/>
+          <a:p>
+            <a:fld id="{D4B9A9E5-4F7F-4A7D-9DE1-899232329269}" type="slidenum">
+              <a:rPr lang="en-US" smtClean="0"/>
+              <a:t>15</a:t>
+            </a:fld>
+            <a:endParaRPr lang="en-US" dirty="0"/>
+          </a:p>
+        </p:txBody>
+      </p:sp>
+    </p:spTree>
+    <p:extLst>
+      <p:ext uri="{BB962C8B-B14F-4D97-AF65-F5344CB8AC3E}">
+        <p14:creationId xmlns:p14="http://schemas.microsoft.com/office/powerpoint/2010/main" val="4177499853"/>
+      </p:ext>
+    </p:extLst>
+  </p:cSld>
+  <p:clrMapOvr>
+    <a:masterClrMapping/>
+  </p:clrMapOvr>
+</p:notes>
+</file>
+
+<file path=ppt/notesSlides/notesSlide16.xml><?xml version="1.0" encoding="utf-8"?>
+<p:notes xmlns:a="http://schemas.openxmlformats.org/drawingml/2006/main" xmlns:r="http://schemas.openxmlformats.org/officeDocument/2006/relationships" xmlns:p="http://schemas.openxmlformats.org/presentationml/2006/main">
+  <p:cSld>
+    <p:spTree>
+      <p:nvGrpSpPr>
+        <p:cNvPr id="1" name="">
+          <a:extLst>
+            <a:ext uri="{FF2B5EF4-FFF2-40B4-BE49-F238E27FC236}">
+              <a16:creationId xmlns:a16="http://schemas.microsoft.com/office/drawing/2014/main" id="{0AF03A43-2267-8DBE-8F24-3E6BE371951E}"/>
+            </a:ext>
+          </a:extLst>
+        </p:cNvPr>
+        <p:cNvGrpSpPr/>
+        <p:nvPr/>
+      </p:nvGrpSpPr>
+      <p:grpSpPr>
+        <a:xfrm>
+          <a:off x="0" y="0"/>
+          <a:ext cx="0" cy="0"/>
+          <a:chOff x="0" y="0"/>
+          <a:chExt cx="0" cy="0"/>
+        </a:xfrm>
+      </p:grpSpPr>
+      <p:sp>
+        <p:nvSpPr>
+          <p:cNvPr id="2" name="Slide Image Placeholder 1">
+            <a:extLst>
+              <a:ext uri="{FF2B5EF4-FFF2-40B4-BE49-F238E27FC236}">
+                <a16:creationId xmlns:a16="http://schemas.microsoft.com/office/drawing/2014/main" id="{7BC1A5D9-4071-88F4-FDDC-23FE20C54C95}"/>
+              </a:ext>
+            </a:extLst>
+          </p:cNvPr>
+          <p:cNvSpPr>
+            <a:spLocks noGrp="1" noRot="1" noChangeAspect="1"/>
+          </p:cNvSpPr>
+          <p:nvPr>
+            <p:ph type="sldImg"/>
+          </p:nvPr>
+        </p:nvSpPr>
+        <p:spPr/>
+      </p:sp>
+      <p:sp>
+        <p:nvSpPr>
+          <p:cNvPr id="3" name="Notes Placeholder 2">
+            <a:extLst>
+              <a:ext uri="{FF2B5EF4-FFF2-40B4-BE49-F238E27FC236}">
+                <a16:creationId xmlns:a16="http://schemas.microsoft.com/office/drawing/2014/main" id="{46B2D6B8-14A1-1C50-5041-9EDF99FD269F}"/>
+              </a:ext>
+            </a:extLst>
+          </p:cNvPr>
+          <p:cNvSpPr>
+            <a:spLocks noGrp="1"/>
+          </p:cNvSpPr>
+          <p:nvPr>
+            <p:ph type="body" idx="1"/>
+          </p:nvPr>
+        </p:nvSpPr>
+        <p:spPr/>
+        <p:txBody>
+          <a:bodyPr/>
+          <a:lstStyle/>
+          <a:p>
+            <a:endParaRPr lang="en-US" dirty="0"/>
+          </a:p>
+        </p:txBody>
+      </p:sp>
+      <p:sp>
+        <p:nvSpPr>
+          <p:cNvPr id="4" name="Slide Number Placeholder 3">
+            <a:extLst>
+              <a:ext uri="{FF2B5EF4-FFF2-40B4-BE49-F238E27FC236}">
+                <a16:creationId xmlns:a16="http://schemas.microsoft.com/office/drawing/2014/main" id="{035A1FCF-469E-5D59-7ECD-D7AFECF95D2C}"/>
+              </a:ext>
+            </a:extLst>
+          </p:cNvPr>
+          <p:cNvSpPr>
+            <a:spLocks noGrp="1"/>
+          </p:cNvSpPr>
+          <p:nvPr>
+            <p:ph type="sldNum" sz="quarter" idx="5"/>
+          </p:nvPr>
+        </p:nvSpPr>
+        <p:spPr/>
+        <p:txBody>
+          <a:bodyPr/>
+          <a:lstStyle/>
+          <a:p>
+            <a:fld id="{D4B9A9E5-4F7F-4A7D-9DE1-899232329269}" type="slidenum">
+              <a:rPr lang="en-US" smtClean="0"/>
+              <a:t>16</a:t>
+            </a:fld>
+            <a:endParaRPr lang="en-US" dirty="0"/>
+          </a:p>
+        </p:txBody>
+      </p:sp>
+    </p:spTree>
+    <p:extLst>
+      <p:ext uri="{BB962C8B-B14F-4D97-AF65-F5344CB8AC3E}">
+        <p14:creationId xmlns:p14="http://schemas.microsoft.com/office/powerpoint/2010/main" val="2678002565"/>
+      </p:ext>
+    </p:extLst>
+  </p:cSld>
+  <p:clrMapOvr>
+    <a:masterClrMapping/>
+  </p:clrMapOvr>
+</p:notes>
+</file>
+
+<file path=ppt/notesSlides/notesSlide17.xml><?xml version="1.0" encoding="utf-8"?>
 <p:notes xmlns:a="http://schemas.openxmlformats.org/drawingml/2006/main" xmlns:r="http://schemas.openxmlformats.org/officeDocument/2006/relationships" xmlns:p="http://schemas.openxmlformats.org/presentationml/2006/main">
   <p:cSld>
     <p:spTree>
@@ -1252,7 +1603,7 @@
           <a:p>
             <a:fld id="{D4B9A9E5-4F7F-4A7D-9DE1-899232329269}" type="slidenum">
               <a:rPr lang="en-US" smtClean="0"/>
-              <a:t>14</a:t>
+              <a:t>17</a:t>
             </a:fld>
             <a:endParaRPr lang="en-US" dirty="0"/>
           </a:p>
@@ -1692,6 +2043,144 @@
         <p:txBody>
           <a:bodyPr/>
           <a:lstStyle/>
+          <a:p>
+            <a:pPr marL="0" indent="0">
+              <a:buNone/>
+            </a:pPr>
+            <a:r>
+              <a:rPr lang="de-DE" dirty="0"/>
+              <a:t>1) - gemessene Arten der Luftverschmutzung: Feinstaub - Partikel &lt;= 10 </a:t>
+            </a:r>
+            <a:r>
+              <a:rPr lang="de-DE" b="1" dirty="0"/>
+              <a:t>µm </a:t>
+            </a:r>
+            <a:r>
+              <a:rPr lang="de-DE" dirty="0"/>
+              <a:t>(PM10), Kohlenmonoxid (CO), Ozon (O3), Schwefeldioxid (SO2), Stickstoffdioxid (NO2), Blei im Feinstaub (PM10PB), Benzo(a)</a:t>
+            </a:r>
+            <a:r>
+              <a:rPr lang="de-DE" dirty="0" err="1"/>
+              <a:t>pyren</a:t>
+            </a:r>
+            <a:r>
+              <a:rPr lang="de-DE" dirty="0"/>
+              <a:t> im Feinstaub (PM10BAP), Benzol (CHB), Feinstaub - Partikel &lt;= 2 </a:t>
+            </a:r>
+            <a:r>
+              <a:rPr lang="de-DE" b="1" dirty="0"/>
+              <a:t>µm </a:t>
+            </a:r>
+            <a:r>
+              <a:rPr lang="de-DE" dirty="0"/>
+              <a:t>(PM2), Arsen im Feinstaub (PM10AS), Cadmium im Feinstaub (PM10CD), Nickel im Feinstaub (PM10NI)</a:t>
+            </a:r>
+            <a:endParaRPr lang="en-DE" dirty="0"/>
+          </a:p>
+          <a:p>
+            <a:pPr marL="0" indent="0">
+              <a:buNone/>
+            </a:pPr>
+            <a:r>
+              <a:rPr lang="de-DE" dirty="0"/>
+              <a:t>2) - Bereiche in denen gemessen wird: alles Bundesländer + UBA</a:t>
+            </a:r>
+            <a:endParaRPr lang="en-DE" dirty="0"/>
+          </a:p>
+          <a:p>
+            <a:pPr marL="0" indent="0">
+              <a:buNone/>
+            </a:pPr>
+            <a:r>
+              <a:rPr lang="de-DE" dirty="0"/>
+              <a:t>3) - Tagesmittel, Ein-Stunden-Mittelwert, Ein-Stunden-Tagesmaxima, Acht-Stunden-Mittelwert, Acht-Stunden-Tagesmaxima, Tagesmittel (stündlich gleitend)</a:t>
+            </a:r>
+            <a:endParaRPr lang="en-DE" dirty="0"/>
+          </a:p>
+          <a:p>
+            <a:pPr marL="0" indent="0">
+              <a:buNone/>
+            </a:pPr>
+            <a:r>
+              <a:rPr lang="de-DE" dirty="0"/>
+              <a:t>4) - Lage der Messstation: städtisches Gebiet, vorstädtisches Gebiet, ländliches Gebiet, ländlich abgelegen, ländliche regional, ländlich stadtnah</a:t>
+            </a:r>
+            <a:endParaRPr lang="en-DE" dirty="0"/>
+          </a:p>
+          <a:p>
+            <a:pPr marL="0" indent="0">
+              <a:buNone/>
+            </a:pPr>
+            <a:r>
+              <a:rPr lang="de-DE" dirty="0"/>
+              <a:t>5) - Stationstypen (was messen sie): Hintergrund, Industrie, Verkehr</a:t>
+            </a:r>
+            <a:endParaRPr lang="en-DE" dirty="0"/>
+          </a:p>
+          <a:p>
+            <a:pPr marL="0" indent="0">
+              <a:buNone/>
+            </a:pPr>
+            <a:r>
+              <a:rPr lang="de-DE" dirty="0"/>
+              <a:t>6) - </a:t>
+            </a:r>
+            <a:r>
+              <a:rPr lang="de-DE" dirty="0" err="1"/>
+              <a:t>Thresholds</a:t>
+            </a:r>
+            <a:r>
+              <a:rPr lang="de-DE" dirty="0"/>
+              <a:t> (Klassifizierungsstufen für die Luftverschmutzung): von 0 bis 4</a:t>
+            </a:r>
+            <a:endParaRPr lang="en-DE" dirty="0"/>
+          </a:p>
+          <a:p>
+            <a:pPr marL="0" indent="0">
+              <a:buNone/>
+            </a:pPr>
+            <a:r>
+              <a:rPr lang="de-DE" dirty="0"/>
+              <a:t>7) - Ausgabe wann bestimmte Verschmutzungsgrenzen überschritten wurden</a:t>
+            </a:r>
+            <a:endParaRPr lang="en-DE" dirty="0"/>
+          </a:p>
+          <a:p>
+            <a:pPr marL="0" indent="0">
+              <a:buNone/>
+            </a:pPr>
+            <a:r>
+              <a:rPr lang="de-DE" dirty="0"/>
+              <a:t>8) - viele der oben genannten Kriterien vereint unter einer Suchanfrage mit zeitlicher Abgrenzungsmöglichkeit</a:t>
+            </a:r>
+            <a:endParaRPr lang="en-DE" dirty="0"/>
+          </a:p>
+          <a:p>
+            <a:endParaRPr lang="en-US" dirty="0"/>
+          </a:p>
+          <a:p>
+            <a:pPr marL="0" marR="0" lvl="0" indent="0" algn="l" defTabSz="914400" rtl="0" eaLnBrk="1" fontAlgn="auto" latinLnBrk="0" hangingPunct="1">
+              <a:lnSpc>
+                <a:spcPct val="100000"/>
+              </a:lnSpc>
+              <a:spcBef>
+                <a:spcPts val="0"/>
+              </a:spcBef>
+              <a:spcAft>
+                <a:spcPts val="0"/>
+              </a:spcAft>
+              <a:buClrTx/>
+              <a:buSzTx/>
+              <a:buFontTx/>
+              <a:buNone/>
+              <a:tabLst/>
+              <a:defRPr/>
+            </a:pPr>
+            <a:r>
+              <a:rPr lang="en-US" dirty="0"/>
+              <a:t>Measured types of air pollution: particulate matter ≤ 10 µm (PM10), carbon monoxide (CO), ozone (O3), sulfur dioxide (SO2), nitrogen dioxide (NO2), lead in particulate matter (PM10Pb), benzo(a)pyrene in particulate matter (PM10BaP), benzene (C6H6), particulate matter ≤ 2.5 µm (PM2.5), arsenic in particulate matter (PM10As), cadmium in particulate matter (PM10Cd), nickel in particulate matter (PM10Ni)</a:t>
+            </a:r>
+          </a:p>
           <a:p>
             <a:endParaRPr lang="en-US" dirty="0"/>
           </a:p>
@@ -2510,7 +2999,7 @@
             <a:fld id="{B5CEABB6-07DC-46E8-9B57-56EC44A396E5}" type="slidenum">
               <a:rPr lang="en-US" smtClean="0"/>
               <a:pPr/>
-              <a:t>‹#›</a:t>
+              <a:t>‹Nr.›</a:t>
             </a:fld>
             <a:endParaRPr lang="en-US" dirty="0"/>
           </a:p>
@@ -2930,7 +3419,7 @@
             <a:fld id="{B5CEABB6-07DC-46E8-9B57-56EC44A396E5}" type="slidenum">
               <a:rPr lang="en-US" smtClean="0"/>
               <a:pPr/>
-              <a:t>‹#›</a:t>
+              <a:t>‹Nr.›</a:t>
             </a:fld>
             <a:endParaRPr lang="en-US" dirty="0"/>
           </a:p>
@@ -3123,7 +3612,7 @@
             <a:fld id="{B5CEABB6-07DC-46E8-9B57-56EC44A396E5}" type="slidenum">
               <a:rPr lang="en-US" smtClean="0"/>
               <a:pPr/>
-              <a:t>‹#›</a:t>
+              <a:t>‹Nr.›</a:t>
             </a:fld>
             <a:endParaRPr lang="en-US" dirty="0"/>
           </a:p>
@@ -3726,7 +4215,7 @@
             <a:fld id="{B5CEABB6-07DC-46E8-9B57-56EC44A396E5}" type="slidenum">
               <a:rPr lang="en-US" smtClean="0"/>
               <a:pPr/>
-              <a:t>‹#›</a:t>
+              <a:t>‹Nr.›</a:t>
             </a:fld>
             <a:endParaRPr lang="en-US" dirty="0"/>
           </a:p>
@@ -4603,7 +5092,7 @@
             <a:fld id="{B5CEABB6-07DC-46E8-9B57-56EC44A396E5}" type="slidenum">
               <a:rPr lang="en-US" smtClean="0"/>
               <a:pPr/>
-              <a:t>‹#›</a:t>
+              <a:t>‹Nr.›</a:t>
             </a:fld>
             <a:endParaRPr lang="en-US" dirty="0"/>
           </a:p>
@@ -5445,7 +5934,7 @@
             <a:fld id="{B5CEABB6-07DC-46E8-9B57-56EC44A396E5}" type="slidenum">
               <a:rPr lang="en-US" smtClean="0"/>
               <a:pPr/>
-              <a:t>‹#›</a:t>
+              <a:t>‹Nr.›</a:t>
             </a:fld>
             <a:endParaRPr lang="en-US" dirty="0"/>
           </a:p>
@@ -5856,7 +6345,7 @@
             <a:fld id="{B5CEABB6-07DC-46E8-9B57-56EC44A396E5}" type="slidenum">
               <a:rPr lang="en-US" smtClean="0"/>
               <a:pPr/>
-              <a:t>‹#›</a:t>
+              <a:t>‹Nr.›</a:t>
             </a:fld>
             <a:endParaRPr lang="en-US" dirty="0"/>
           </a:p>
@@ -6127,7 +6616,7 @@
             <a:fld id="{B5CEABB6-07DC-46E8-9B57-56EC44A396E5}" type="slidenum">
               <a:rPr lang="en-US" smtClean="0"/>
               <a:pPr/>
-              <a:t>‹#›</a:t>
+              <a:t>‹Nr.›</a:t>
             </a:fld>
             <a:endParaRPr lang="en-US" dirty="0"/>
           </a:p>
@@ -6544,7 +7033,7 @@
             <a:fld id="{B5CEABB6-07DC-46E8-9B57-56EC44A396E5}" type="slidenum">
               <a:rPr lang="en-US" smtClean="0"/>
               <a:pPr/>
-              <a:t>‹#›</a:t>
+              <a:t>‹Nr.›</a:t>
             </a:fld>
             <a:endParaRPr lang="en-US" dirty="0"/>
           </a:p>
@@ -6962,17 +7451,104 @@
         <p:spPr>
           <a:xfrm>
             <a:off x="914399" y="365125"/>
-            <a:ext cx="10363201" cy="1629601"/>
+            <a:ext cx="7273637" cy="1646555"/>
           </a:xfrm>
         </p:spPr>
         <p:txBody>
-          <a:bodyPr/>
+          <a:bodyPr anchor="ctr">
+            <a:normAutofit/>
+          </a:bodyPr>
           <a:lstStyle/>
           <a:p>
             <a:r>
               <a:rPr lang="en-US" dirty="0"/>
               <a:t>Movies - Measurement criteria </a:t>
             </a:r>
+          </a:p>
+        </p:txBody>
+      </p:sp>
+      <p:sp>
+        <p:nvSpPr>
+          <p:cNvPr id="9" name="Content Placeholder 8">
+            <a:extLst>
+              <a:ext uri="{FF2B5EF4-FFF2-40B4-BE49-F238E27FC236}">
+                <a16:creationId xmlns:a16="http://schemas.microsoft.com/office/drawing/2014/main" id="{2806F918-9F3D-65E9-5302-A6EF42332DC4}"/>
+              </a:ext>
+            </a:extLst>
+          </p:cNvPr>
+          <p:cNvSpPr>
+            <a:spLocks noGrp="1"/>
+          </p:cNvSpPr>
+          <p:nvPr>
+            <p:ph sz="quarter" idx="10"/>
+          </p:nvPr>
+        </p:nvSpPr>
+        <p:spPr>
+          <a:xfrm>
+            <a:off x="914399" y="2011363"/>
+            <a:ext cx="7273638" cy="4155757"/>
+          </a:xfrm>
+        </p:spPr>
+        <p:txBody>
+          <a:bodyPr>
+            <a:normAutofit/>
+          </a:bodyPr>
+          <a:lstStyle/>
+          <a:p>
+            <a:pPr lvl="0"/>
+            <a:r>
+              <a:rPr lang="de-DE" sz="1600" dirty="0"/>
+              <a:t>User Ratings</a:t>
+            </a:r>
+            <a:endParaRPr lang="en-DE" sz="1600" dirty="0"/>
+          </a:p>
+          <a:p>
+            <a:pPr lvl="0"/>
+            <a:r>
+              <a:rPr lang="de-DE" sz="1600" dirty="0"/>
+              <a:t>Release timing</a:t>
+            </a:r>
+            <a:endParaRPr lang="en-DE" sz="1600" dirty="0"/>
+          </a:p>
+          <a:p>
+            <a:pPr lvl="0"/>
+            <a:r>
+              <a:rPr lang="de-DE" sz="1600" dirty="0"/>
+              <a:t>Wikimedia views</a:t>
+            </a:r>
+            <a:endParaRPr lang="en-DE" sz="1600" dirty="0"/>
+          </a:p>
+          <a:p>
+            <a:pPr lvl="0"/>
+            <a:r>
+              <a:rPr lang="de-DE" sz="1600" dirty="0"/>
+              <a:t>Budget</a:t>
+            </a:r>
+            <a:endParaRPr lang="en-DE" sz="1600" dirty="0"/>
+          </a:p>
+          <a:p>
+            <a:pPr lvl="0"/>
+            <a:r>
+              <a:rPr lang="de-DE" sz="1600" dirty="0"/>
+              <a:t>Profit</a:t>
+            </a:r>
+            <a:endParaRPr lang="en-DE" sz="1600" dirty="0"/>
+          </a:p>
+          <a:p>
+            <a:pPr lvl="0"/>
+            <a:r>
+              <a:rPr lang="de-DE" sz="1600" dirty="0"/>
+              <a:t>Youtube view counts</a:t>
+            </a:r>
+            <a:endParaRPr lang="en-DE" sz="1600" dirty="0"/>
+          </a:p>
+          <a:p>
+            <a:pPr lvl="0"/>
+            <a:r>
+              <a:rPr lang="de-DE" sz="1600" dirty="0"/>
+              <a:t>Google search request amounts</a:t>
+            </a:r>
+            <a:endParaRPr lang="en-DE" sz="1600" dirty="0"/>
           </a:p>
         </p:txBody>
       </p:sp>
@@ -6999,100 +7575,26 @@
           </a:xfrm>
         </p:spPr>
         <p:txBody>
-          <a:bodyPr/>
-          <a:lstStyle/>
-          <a:p>
-            <a:fld id="{B5CEABB6-07DC-46E8-9B57-56EC44A396E5}" type="slidenum">
-              <a:rPr lang="en-US" smtClean="0"/>
-              <a:pPr/>
-              <a:t>10</a:t>
-            </a:fld>
-            <a:endParaRPr lang="en-US" dirty="0"/>
-          </a:p>
-        </p:txBody>
-      </p:sp>
-      <p:sp>
-        <p:nvSpPr>
-          <p:cNvPr id="9" name="Content Placeholder 8">
-            <a:extLst>
-              <a:ext uri="{FF2B5EF4-FFF2-40B4-BE49-F238E27FC236}">
-                <a16:creationId xmlns:a16="http://schemas.microsoft.com/office/drawing/2014/main" id="{2806F918-9F3D-65E9-5302-A6EF42332DC4}"/>
-              </a:ext>
-            </a:extLst>
-          </p:cNvPr>
-          <p:cNvSpPr>
-            <a:spLocks noGrp="1"/>
-          </p:cNvSpPr>
-          <p:nvPr>
-            <p:ph sz="quarter" idx="11"/>
-          </p:nvPr>
-        </p:nvSpPr>
-        <p:spPr>
-          <a:xfrm>
-            <a:off x="914399" y="2022250"/>
-            <a:ext cx="10363201" cy="3747180"/>
-          </a:xfrm>
-        </p:spPr>
-        <p:txBody>
-          <a:bodyPr>
+          <a:bodyPr anchor="ctr">
             <a:normAutofit/>
           </a:bodyPr>
           <a:lstStyle/>
           <a:p>
-            <a:pPr lvl="0"/>
-            <a:r>
-              <a:rPr lang="de-DE" dirty="0"/>
-              <a:t>User Ratings</a:t>
-            </a:r>
-            <a:endParaRPr lang="en-DE" dirty="0"/>
-          </a:p>
-          <a:p>
-            <a:pPr lvl="0"/>
-            <a:r>
-              <a:rPr lang="de-DE" dirty="0"/>
-              <a:t>Release timing</a:t>
-            </a:r>
-            <a:endParaRPr lang="en-DE" dirty="0"/>
-          </a:p>
-          <a:p>
-            <a:pPr lvl="0"/>
-            <a:r>
-              <a:rPr lang="de-DE" dirty="0"/>
-              <a:t>Wikimedia views</a:t>
-            </a:r>
-            <a:endParaRPr lang="en-DE" dirty="0"/>
-          </a:p>
-          <a:p>
-            <a:pPr lvl="0"/>
-            <a:r>
-              <a:rPr lang="de-DE" dirty="0"/>
-              <a:t>Budget</a:t>
-            </a:r>
-            <a:endParaRPr lang="en-DE" dirty="0"/>
-          </a:p>
-          <a:p>
-            <a:pPr lvl="0"/>
-            <a:r>
-              <a:rPr lang="de-DE" dirty="0"/>
-              <a:t>Profit</a:t>
-            </a:r>
-            <a:endParaRPr lang="en-DE" dirty="0"/>
-          </a:p>
-          <a:p>
-            <a:pPr lvl="0"/>
-            <a:r>
-              <a:rPr lang="de-DE" dirty="0"/>
-              <a:t>Youtube view counts</a:t>
-            </a:r>
-            <a:endParaRPr lang="en-DE" dirty="0"/>
-          </a:p>
-          <a:p>
-            <a:pPr lvl="0"/>
-            <a:r>
-              <a:rPr lang="de-DE" dirty="0"/>
-              <a:t>Google search request amounts</a:t>
-            </a:r>
-            <a:endParaRPr lang="en-DE" dirty="0"/>
+            <a:pPr>
+              <a:spcAft>
+                <a:spcPts val="600"/>
+              </a:spcAft>
+            </a:pPr>
+            <a:fld id="{B5CEABB6-07DC-46E8-9B57-56EC44A396E5}" type="slidenum">
+              <a:rPr lang="en-US" smtClean="0"/>
+              <a:pPr>
+                <a:spcAft>
+                  <a:spcPts val="600"/>
+                </a:spcAft>
+              </a:pPr>
+              <a:t>10</a:t>
+            </a:fld>
+            <a:endParaRPr lang="en-US"/>
           </a:p>
         </p:txBody>
       </p:sp>
@@ -7151,21 +7653,82 @@
         <p:spPr>
           <a:xfrm>
             <a:off x="914399" y="365125"/>
-            <a:ext cx="10363201" cy="1629601"/>
+            <a:ext cx="7273637" cy="1646555"/>
           </a:xfrm>
         </p:spPr>
         <p:txBody>
-          <a:bodyPr/>
+          <a:bodyPr anchor="ctr">
+            <a:normAutofit/>
+          </a:bodyPr>
           <a:lstStyle/>
           <a:p>
             <a:r>
               <a:rPr lang="en-US" dirty="0"/>
-              <a:t>Movies -API</a:t>
-            </a:r>
-            <a:r>
-              <a:rPr lang="en-US" sz="2400" b="1" dirty="0"/>
-              <a:t>s</a:t>
-            </a:r>
+              <a:t>Movies - APIs</a:t>
+            </a:r>
+          </a:p>
+        </p:txBody>
+      </p:sp>
+      <p:sp>
+        <p:nvSpPr>
+          <p:cNvPr id="9" name="Content Placeholder 8">
+            <a:extLst>
+              <a:ext uri="{FF2B5EF4-FFF2-40B4-BE49-F238E27FC236}">
+                <a16:creationId xmlns:a16="http://schemas.microsoft.com/office/drawing/2014/main" id="{11777FC7-8F96-5BF0-C016-124249732B97}"/>
+              </a:ext>
+            </a:extLst>
+          </p:cNvPr>
+          <p:cNvSpPr>
+            <a:spLocks noGrp="1"/>
+          </p:cNvSpPr>
+          <p:nvPr>
+            <p:ph sz="quarter" idx="10"/>
+          </p:nvPr>
+        </p:nvSpPr>
+        <p:spPr>
+          <a:xfrm>
+            <a:off x="914399" y="2011363"/>
+            <a:ext cx="7273638" cy="4155757"/>
+          </a:xfrm>
+        </p:spPr>
+        <p:txBody>
+          <a:bodyPr>
+            <a:normAutofit/>
+          </a:bodyPr>
+          <a:lstStyle/>
+          <a:p>
+            <a:r>
+              <a:rPr lang="de-DE" sz="1600" dirty="0"/>
+              <a:t>Open movie database (OMDb)</a:t>
+            </a:r>
+            <a:endParaRPr lang="en-DE" sz="1600" dirty="0"/>
+          </a:p>
+          <a:p>
+            <a:r>
+              <a:rPr lang="de-DE" sz="1600" dirty="0"/>
+              <a:t>Wikimedia API</a:t>
+            </a:r>
+            <a:endParaRPr lang="en-DE" sz="1600" dirty="0"/>
+          </a:p>
+          <a:p>
+            <a:r>
+              <a:rPr lang="de-DE" sz="1600" dirty="0" err="1"/>
+              <a:t>Youtube</a:t>
+            </a:r>
+            <a:r>
+              <a:rPr lang="de-DE" sz="1600" dirty="0"/>
+              <a:t> Data API</a:t>
+            </a:r>
+          </a:p>
+          <a:p>
+            <a:r>
+              <a:rPr lang="de-DE" sz="1600" dirty="0"/>
+              <a:t>Google Analytics API</a:t>
+            </a:r>
+            <a:endParaRPr lang="en-DE" sz="1600" dirty="0"/>
+          </a:p>
+          <a:p>
+            <a:endParaRPr lang="en-DE" dirty="0"/>
           </a:p>
         </p:txBody>
       </p:sp>
@@ -7192,78 +7755,26 @@
           </a:xfrm>
         </p:spPr>
         <p:txBody>
-          <a:bodyPr/>
-          <a:lstStyle/>
-          <a:p>
-            <a:fld id="{B5CEABB6-07DC-46E8-9B57-56EC44A396E5}" type="slidenum">
-              <a:rPr lang="en-US" smtClean="0"/>
-              <a:pPr/>
-              <a:t>11</a:t>
-            </a:fld>
-            <a:endParaRPr lang="en-US" dirty="0"/>
-          </a:p>
-        </p:txBody>
-      </p:sp>
-      <p:sp>
-        <p:nvSpPr>
-          <p:cNvPr id="9" name="Content Placeholder 8">
-            <a:extLst>
-              <a:ext uri="{FF2B5EF4-FFF2-40B4-BE49-F238E27FC236}">
-                <a16:creationId xmlns:a16="http://schemas.microsoft.com/office/drawing/2014/main" id="{11777FC7-8F96-5BF0-C016-124249732B97}"/>
-              </a:ext>
-            </a:extLst>
-          </p:cNvPr>
-          <p:cNvSpPr>
-            <a:spLocks noGrp="1"/>
-          </p:cNvSpPr>
-          <p:nvPr>
-            <p:ph sz="quarter" idx="11"/>
-          </p:nvPr>
-        </p:nvSpPr>
-        <p:spPr>
-          <a:xfrm>
-            <a:off x="914399" y="2022250"/>
-            <a:ext cx="10363201" cy="3747180"/>
-          </a:xfrm>
-        </p:spPr>
-        <p:txBody>
-          <a:bodyPr>
+          <a:bodyPr anchor="ctr">
             <a:normAutofit/>
           </a:bodyPr>
           <a:lstStyle/>
           <a:p>
-            <a:pPr marL="0" indent="0">
-              <a:buNone/>
+            <a:pPr>
+              <a:spcAft>
+                <a:spcPts val="600"/>
+              </a:spcAft>
             </a:pPr>
-            <a:r>
-              <a:rPr lang="de-DE" u="sng" dirty="0"/>
-              <a:t>APIs for movies:</a:t>
-            </a:r>
-            <a:endParaRPr lang="en-DE" dirty="0"/>
-          </a:p>
-          <a:p>
-            <a:r>
-              <a:rPr lang="de-DE" dirty="0"/>
-              <a:t>Open movie database (OMDb)</a:t>
-            </a:r>
-            <a:endParaRPr lang="en-DE" dirty="0"/>
-          </a:p>
-          <a:p>
-            <a:r>
-              <a:rPr lang="de-DE" dirty="0"/>
-              <a:t>Wikimedia API</a:t>
-            </a:r>
-            <a:endParaRPr lang="en-DE" dirty="0"/>
-          </a:p>
-          <a:p>
-            <a:r>
-              <a:rPr lang="de-DE" dirty="0"/>
-              <a:t>Youtube Analytics API</a:t>
-            </a:r>
-            <a:endParaRPr lang="en-DE" dirty="0"/>
-          </a:p>
-          <a:p>
-            <a:endParaRPr lang="en-DE" dirty="0"/>
+            <a:fld id="{B5CEABB6-07DC-46E8-9B57-56EC44A396E5}" type="slidenum">
+              <a:rPr lang="en-US" smtClean="0"/>
+              <a:pPr>
+                <a:spcAft>
+                  <a:spcPts val="600"/>
+                </a:spcAft>
+              </a:pPr>
+              <a:t>11</a:t>
+            </a:fld>
+            <a:endParaRPr lang="en-US"/>
           </a:p>
         </p:txBody>
       </p:sp>
@@ -7330,10 +7841,9 @@
           <a:lstStyle/>
           <a:p>
             <a:r>
-              <a:rPr lang="en-US" dirty="0" err="1"/>
-              <a:t>Arbeitsmarkt</a:t>
-            </a:r>
-            <a:endParaRPr lang="en-US" dirty="0"/>
+              <a:rPr lang="en-US" dirty="0"/>
+              <a:t>Job Market</a:t>
+            </a:r>
           </a:p>
         </p:txBody>
       </p:sp>
@@ -7380,7 +7890,13 @@
   <p:cSld>
     <p:spTree>
       <p:nvGrpSpPr>
-        <p:cNvPr id="1" name=""/>
+        <p:cNvPr id="1" name="">
+          <a:extLst>
+            <a:ext uri="{FF2B5EF4-FFF2-40B4-BE49-F238E27FC236}">
+              <a16:creationId xmlns:a16="http://schemas.microsoft.com/office/drawing/2014/main" id="{9FEFAFE4-B449-FEB6-5A12-45203903D58E}"/>
+            </a:ext>
+          </a:extLst>
+        </p:cNvPr>
         <p:cNvGrpSpPr/>
         <p:nvPr/>
       </p:nvGrpSpPr>
@@ -7397,7 +7913,7 @@
           <p:cNvPr id="2" name="Title 1">
             <a:extLst>
               <a:ext uri="{FF2B5EF4-FFF2-40B4-BE49-F238E27FC236}">
-                <a16:creationId xmlns:a16="http://schemas.microsoft.com/office/drawing/2014/main" id="{6DBDB0AE-5ADD-1975-6BDD-38608925072A}"/>
+                <a16:creationId xmlns:a16="http://schemas.microsoft.com/office/drawing/2014/main" id="{58EE2B8B-E3F1-6A25-214B-36E1C26481D2}"/>
               </a:ext>
             </a:extLst>
           </p:cNvPr>
@@ -7410,28 +7926,807 @@
         </p:nvSpPr>
         <p:spPr>
           <a:xfrm>
-            <a:off x="914398" y="365125"/>
-            <a:ext cx="10439401" cy="1617017"/>
+            <a:off x="914399" y="365125"/>
+            <a:ext cx="7273637" cy="1646555"/>
           </a:xfrm>
         </p:spPr>
         <p:txBody>
-          <a:bodyPr/>
+          <a:bodyPr anchor="ctr">
+            <a:normAutofit/>
+          </a:bodyPr>
           <a:lstStyle/>
           <a:p>
             <a:r>
-              <a:rPr lang="en-US" dirty="0" err="1"/>
-              <a:t>Arbeitsmarkt</a:t>
-            </a:r>
-            <a:endParaRPr lang="en-US" dirty="0"/>
+              <a:rPr lang="en-US" dirty="0"/>
+              <a:t>Job Market - questions</a:t>
+            </a:r>
           </a:p>
         </p:txBody>
       </p:sp>
       <p:sp>
         <p:nvSpPr>
+          <p:cNvPr id="9" name="Content Placeholder 8">
+            <a:extLst>
+              <a:ext uri="{FF2B5EF4-FFF2-40B4-BE49-F238E27FC236}">
+                <a16:creationId xmlns:a16="http://schemas.microsoft.com/office/drawing/2014/main" id="{3263E7F8-2B14-F5F3-F69A-C21A10FB5949}"/>
+              </a:ext>
+            </a:extLst>
+          </p:cNvPr>
+          <p:cNvSpPr>
+            <a:spLocks noGrp="1"/>
+          </p:cNvSpPr>
+          <p:nvPr>
+            <p:ph sz="quarter" idx="10"/>
+          </p:nvPr>
+        </p:nvSpPr>
+        <p:spPr>
+          <a:xfrm>
+            <a:off x="914399" y="2011363"/>
+            <a:ext cx="7273638" cy="4155757"/>
+          </a:xfrm>
+        </p:spPr>
+        <p:txBody>
+          <a:bodyPr>
+            <a:normAutofit/>
+          </a:bodyPr>
+          <a:lstStyle/>
+          <a:p>
+            <a:pPr marL="0" lvl="0" indent="0" eaLnBrk="0" fontAlgn="base" hangingPunct="0">
+              <a:lnSpc>
+                <a:spcPct val="110000"/>
+              </a:lnSpc>
+              <a:spcBef>
+                <a:spcPct val="0"/>
+              </a:spcBef>
+              <a:spcAft>
+                <a:spcPts val="600"/>
+              </a:spcAft>
+              <a:buFontTx/>
+              <a:buAutoNum type="arabicPeriod"/>
+            </a:pPr>
+            <a:r>
+              <a:rPr lang="de-DE" altLang="de-DE" sz="1600" dirty="0"/>
+              <a:t> </a:t>
+            </a:r>
+            <a:r>
+              <a:rPr lang="de-DE" altLang="de-DE" sz="1600" dirty="0" err="1"/>
+              <a:t>What</a:t>
+            </a:r>
+            <a:r>
+              <a:rPr lang="de-DE" altLang="de-DE" sz="1600" dirty="0"/>
+              <a:t> </a:t>
+            </a:r>
+            <a:r>
+              <a:rPr lang="de-DE" altLang="de-DE" sz="1600" dirty="0" err="1"/>
+              <a:t>Occupational</a:t>
+            </a:r>
+            <a:r>
+              <a:rPr lang="de-DE" altLang="de-DE" sz="1600" dirty="0"/>
+              <a:t> </a:t>
+            </a:r>
+            <a:r>
+              <a:rPr lang="de-DE" altLang="de-DE" sz="1600" dirty="0" err="1"/>
+              <a:t>bottlenecks</a:t>
+            </a:r>
+            <a:r>
+              <a:rPr lang="de-DE" altLang="de-DE" sz="1600" dirty="0"/>
+              <a:t> </a:t>
+            </a:r>
+            <a:r>
+              <a:rPr lang="de-DE" altLang="de-DE" sz="1600" dirty="0" err="1"/>
+              <a:t>across</a:t>
+            </a:r>
+            <a:r>
+              <a:rPr lang="de-DE" altLang="de-DE" sz="1600" dirty="0"/>
+              <a:t> </a:t>
+            </a:r>
+            <a:r>
+              <a:rPr lang="de-DE" altLang="de-DE" sz="1600" dirty="0" err="1"/>
+              <a:t>the</a:t>
+            </a:r>
+            <a:r>
+              <a:rPr lang="de-DE" altLang="de-DE" sz="1600" dirty="0"/>
+              <a:t> </a:t>
+            </a:r>
+            <a:r>
+              <a:rPr lang="de-DE" altLang="de-DE" sz="1600" dirty="0" err="1"/>
+              <a:t>regions</a:t>
+            </a:r>
+            <a:r>
+              <a:rPr lang="de-DE" altLang="de-DE" sz="1600" dirty="0"/>
+              <a:t> </a:t>
+            </a:r>
+            <a:r>
+              <a:rPr lang="de-DE" altLang="de-DE" sz="1600" dirty="0" err="1"/>
+              <a:t>of</a:t>
+            </a:r>
+            <a:r>
+              <a:rPr lang="de-DE" altLang="de-DE" sz="1600" dirty="0"/>
+              <a:t> Schleswig-Holstein</a:t>
+            </a:r>
+          </a:p>
+          <a:p>
+            <a:pPr marL="0" lvl="0" indent="0" eaLnBrk="0" fontAlgn="base" hangingPunct="0">
+              <a:lnSpc>
+                <a:spcPct val="110000"/>
+              </a:lnSpc>
+              <a:spcBef>
+                <a:spcPct val="0"/>
+              </a:spcBef>
+              <a:spcAft>
+                <a:spcPts val="600"/>
+              </a:spcAft>
+              <a:buFontTx/>
+              <a:buAutoNum type="arabicPeriod" startAt="2"/>
+            </a:pPr>
+            <a:r>
+              <a:rPr lang="de-DE" altLang="de-DE" sz="1600" dirty="0"/>
+              <a:t> How </a:t>
+            </a:r>
+            <a:r>
+              <a:rPr lang="de-DE" altLang="de-DE" sz="1600" dirty="0" err="1"/>
+              <a:t>does</a:t>
+            </a:r>
+            <a:r>
+              <a:rPr lang="de-DE" altLang="de-DE" sz="1600" dirty="0"/>
+              <a:t> </a:t>
+            </a:r>
+            <a:r>
+              <a:rPr lang="de-DE" altLang="de-DE" sz="1600" dirty="0" err="1"/>
+              <a:t>increasing</a:t>
+            </a:r>
+            <a:r>
+              <a:rPr lang="de-DE" altLang="de-DE" sz="1600" dirty="0"/>
+              <a:t> </a:t>
+            </a:r>
+            <a:r>
+              <a:rPr lang="de-DE" altLang="de-DE" sz="1600" dirty="0" err="1"/>
+              <a:t>the</a:t>
+            </a:r>
+            <a:r>
+              <a:rPr lang="de-DE" altLang="de-DE" sz="1600" dirty="0"/>
+              <a:t> </a:t>
+            </a:r>
+            <a:r>
+              <a:rPr lang="de-DE" altLang="de-DE" sz="1600" dirty="0" err="1"/>
+              <a:t>search</a:t>
+            </a:r>
+            <a:r>
+              <a:rPr lang="de-DE" altLang="de-DE" sz="1600" dirty="0"/>
+              <a:t> </a:t>
+            </a:r>
+            <a:r>
+              <a:rPr lang="de-DE" altLang="de-DE" sz="1600" dirty="0" err="1"/>
+              <a:t>radius</a:t>
+            </a:r>
+            <a:r>
+              <a:rPr lang="de-DE" altLang="de-DE" sz="1600" dirty="0"/>
+              <a:t> </a:t>
+            </a:r>
+            <a:r>
+              <a:rPr lang="de-DE" altLang="de-DE" sz="1600" dirty="0" err="1"/>
+              <a:t>change</a:t>
+            </a:r>
+            <a:r>
+              <a:rPr lang="de-DE" altLang="de-DE" sz="1600" dirty="0"/>
+              <a:t> </a:t>
+            </a:r>
+            <a:r>
+              <a:rPr lang="de-DE" altLang="de-DE" sz="1600" dirty="0" err="1"/>
+              <a:t>the</a:t>
+            </a:r>
+            <a:r>
+              <a:rPr lang="de-DE" altLang="de-DE" sz="1600" dirty="0"/>
+              <a:t> </a:t>
+            </a:r>
+            <a:r>
+              <a:rPr lang="de-DE" altLang="de-DE" sz="1600" dirty="0" err="1"/>
+              <a:t>number</a:t>
+            </a:r>
+            <a:r>
+              <a:rPr lang="de-DE" altLang="de-DE" sz="1600" dirty="0"/>
+              <a:t> </a:t>
+            </a:r>
+            <a:r>
+              <a:rPr lang="de-DE" altLang="de-DE" sz="1600" dirty="0" err="1"/>
+              <a:t>of</a:t>
+            </a:r>
+            <a:r>
+              <a:rPr lang="de-DE" altLang="de-DE" sz="1600" dirty="0"/>
+              <a:t> “</a:t>
+            </a:r>
+            <a:r>
+              <a:rPr lang="de-DE" altLang="de-DE" sz="1600" dirty="0" err="1"/>
+              <a:t>reachable</a:t>
+            </a:r>
+            <a:r>
+              <a:rPr lang="de-DE" altLang="de-DE" sz="1600" dirty="0"/>
+              <a:t>” </a:t>
+            </a:r>
+            <a:r>
+              <a:rPr lang="de-DE" altLang="de-DE" sz="1600" dirty="0" err="1"/>
+              <a:t>jobs</a:t>
+            </a:r>
+            <a:r>
+              <a:rPr lang="de-DE" altLang="de-DE" sz="1600" dirty="0"/>
+              <a:t> </a:t>
+            </a:r>
+            <a:r>
+              <a:rPr lang="de-DE" altLang="de-DE" sz="1600" dirty="0" err="1"/>
+              <a:t>vs</a:t>
+            </a:r>
+            <a:r>
+              <a:rPr lang="de-DE" altLang="de-DE" sz="1600" dirty="0"/>
+              <a:t> . </a:t>
+            </a:r>
+            <a:r>
+              <a:rPr lang="de-DE" altLang="de-DE" sz="1600" dirty="0" err="1"/>
+              <a:t>candidates</a:t>
+            </a:r>
+            <a:r>
+              <a:rPr lang="de-DE" altLang="de-DE" sz="1600" dirty="0"/>
+              <a:t> vs. </a:t>
+            </a:r>
+            <a:r>
+              <a:rPr lang="de-DE" altLang="de-DE" sz="1600" dirty="0" err="1"/>
+              <a:t>training</a:t>
+            </a:r>
+            <a:r>
+              <a:rPr lang="de-DE" altLang="de-DE" sz="1600" dirty="0"/>
+              <a:t> </a:t>
+            </a:r>
+            <a:r>
+              <a:rPr lang="de-DE" altLang="de-DE" sz="1600" dirty="0" err="1"/>
+              <a:t>places</a:t>
+            </a:r>
+            <a:r>
+              <a:rPr lang="de-DE" altLang="de-DE" sz="1600" dirty="0"/>
+              <a:t>?</a:t>
+            </a:r>
+          </a:p>
+          <a:p>
+            <a:pPr marL="0" lvl="0" indent="0" eaLnBrk="0" fontAlgn="base" hangingPunct="0">
+              <a:lnSpc>
+                <a:spcPct val="110000"/>
+              </a:lnSpc>
+              <a:spcBef>
+                <a:spcPct val="0"/>
+              </a:spcBef>
+              <a:spcAft>
+                <a:spcPts val="600"/>
+              </a:spcAft>
+              <a:buFontTx/>
+              <a:buAutoNum type="arabicPeriod" startAt="3"/>
+            </a:pPr>
+            <a:r>
+              <a:rPr lang="de-DE" altLang="de-DE" sz="1600" dirty="0"/>
+              <a:t> Do </a:t>
+            </a:r>
+            <a:r>
+              <a:rPr lang="de-DE" altLang="de-DE" sz="1600" dirty="0" err="1"/>
+              <a:t>the</a:t>
+            </a:r>
+            <a:r>
+              <a:rPr lang="de-DE" altLang="de-DE" sz="1600" dirty="0"/>
+              <a:t> </a:t>
+            </a:r>
+            <a:r>
+              <a:rPr lang="de-DE" altLang="de-DE" sz="1600" dirty="0" err="1"/>
+              <a:t>skills</a:t>
+            </a:r>
+            <a:r>
+              <a:rPr lang="de-DE" altLang="de-DE" sz="1600" dirty="0"/>
+              <a:t> in </a:t>
+            </a:r>
+            <a:r>
+              <a:rPr lang="de-DE" altLang="de-DE" sz="1600" dirty="0" err="1"/>
+              <a:t>job</a:t>
+            </a:r>
+            <a:r>
+              <a:rPr lang="de-DE" altLang="de-DE" sz="1600" dirty="0"/>
+              <a:t> </a:t>
+            </a:r>
+            <a:r>
+              <a:rPr lang="de-DE" altLang="de-DE" sz="1600" dirty="0" err="1"/>
+              <a:t>postings</a:t>
+            </a:r>
+            <a:r>
+              <a:rPr lang="de-DE" altLang="de-DE" sz="1600" dirty="0"/>
+              <a:t> </a:t>
+            </a:r>
+            <a:r>
+              <a:rPr lang="de-DE" altLang="de-DE" sz="1600" dirty="0" err="1"/>
+              <a:t>align</a:t>
+            </a:r>
+            <a:r>
+              <a:rPr lang="de-DE" altLang="de-DE" sz="1600" dirty="0"/>
+              <a:t> </a:t>
+            </a:r>
+            <a:r>
+              <a:rPr lang="de-DE" altLang="de-DE" sz="1600" dirty="0" err="1"/>
+              <a:t>with</a:t>
+            </a:r>
+            <a:r>
+              <a:rPr lang="de-DE" altLang="de-DE" sz="1600" dirty="0"/>
+              <a:t> </a:t>
+            </a:r>
+            <a:r>
+              <a:rPr lang="de-DE" altLang="de-DE" sz="1600" dirty="0" err="1"/>
+              <a:t>the</a:t>
+            </a:r>
+            <a:r>
+              <a:rPr lang="de-DE" altLang="de-DE" sz="1600" dirty="0"/>
+              <a:t> </a:t>
+            </a:r>
+            <a:r>
+              <a:rPr lang="de-DE" altLang="de-DE" sz="1600" dirty="0" err="1"/>
+              <a:t>content</a:t>
+            </a:r>
+            <a:r>
+              <a:rPr lang="de-DE" altLang="de-DE" sz="1600" dirty="0"/>
+              <a:t>/</a:t>
+            </a:r>
+            <a:r>
+              <a:rPr lang="de-DE" altLang="de-DE" sz="1600" dirty="0" err="1"/>
+              <a:t>profiles</a:t>
+            </a:r>
+            <a:r>
+              <a:rPr lang="de-DE" altLang="de-DE" sz="1600" dirty="0"/>
+              <a:t> in </a:t>
+            </a:r>
+            <a:r>
+              <a:rPr lang="de-DE" altLang="de-DE" sz="1600" dirty="0" err="1"/>
+              <a:t>training</a:t>
+            </a:r>
+            <a:r>
+              <a:rPr lang="de-DE" altLang="de-DE" sz="1600" dirty="0"/>
+              <a:t> </a:t>
+            </a:r>
+            <a:r>
+              <a:rPr lang="de-DE" altLang="de-DE" sz="1600" dirty="0" err="1"/>
+              <a:t>programs</a:t>
+            </a:r>
+            <a:r>
+              <a:rPr lang="de-DE" altLang="de-DE" sz="1600" dirty="0"/>
+              <a:t> (</a:t>
+            </a:r>
+            <a:r>
+              <a:rPr lang="de-DE" altLang="de-DE" sz="1600" dirty="0" err="1"/>
+              <a:t>offer</a:t>
+            </a:r>
+            <a:r>
+              <a:rPr lang="de-DE" altLang="de-DE" sz="1600" dirty="0"/>
+              <a:t> </a:t>
+            </a:r>
+            <a:r>
+              <a:rPr lang="de-DE" altLang="de-DE" sz="1600" dirty="0" err="1"/>
+              <a:t>descriptions</a:t>
+            </a:r>
+            <a:r>
+              <a:rPr lang="de-DE" altLang="de-DE" sz="1600" dirty="0"/>
+              <a:t>) and </a:t>
+            </a:r>
+            <a:r>
+              <a:rPr lang="de-DE" altLang="de-DE" sz="1600" dirty="0" err="1"/>
+              <a:t>candidate</a:t>
+            </a:r>
+            <a:r>
+              <a:rPr lang="de-DE" altLang="de-DE" sz="1600" dirty="0"/>
+              <a:t> </a:t>
+            </a:r>
+            <a:r>
+              <a:rPr lang="de-DE" altLang="de-DE" sz="1600" dirty="0" err="1"/>
+              <a:t>profiles</a:t>
+            </a:r>
+            <a:r>
+              <a:rPr lang="de-DE" altLang="de-DE" sz="1600" dirty="0"/>
+              <a:t>?</a:t>
+            </a:r>
+          </a:p>
+          <a:p>
+            <a:pPr marL="0" lvl="0" indent="0" eaLnBrk="0" fontAlgn="base" hangingPunct="0">
+              <a:lnSpc>
+                <a:spcPct val="110000"/>
+              </a:lnSpc>
+              <a:spcBef>
+                <a:spcPct val="0"/>
+              </a:spcBef>
+              <a:spcAft>
+                <a:spcPts val="600"/>
+              </a:spcAft>
+              <a:buFontTx/>
+              <a:buAutoNum type="arabicPeriod" startAt="4"/>
+            </a:pPr>
+            <a:r>
+              <a:rPr lang="de-DE" altLang="de-DE" sz="1600" dirty="0"/>
+              <a:t> Do </a:t>
+            </a:r>
+            <a:r>
+              <a:rPr lang="de-DE" altLang="de-DE" sz="1600" dirty="0" err="1"/>
+              <a:t>training</a:t>
+            </a:r>
+            <a:r>
+              <a:rPr lang="de-DE" altLang="de-DE" sz="1600" dirty="0"/>
+              <a:t> </a:t>
+            </a:r>
+            <a:r>
+              <a:rPr lang="de-DE" altLang="de-DE" sz="1600" dirty="0" err="1"/>
+              <a:t>offerings</a:t>
+            </a:r>
+            <a:r>
+              <a:rPr lang="de-DE" altLang="de-DE" sz="1600" dirty="0"/>
+              <a:t> in a </a:t>
+            </a:r>
+            <a:r>
+              <a:rPr lang="de-DE" altLang="de-DE" sz="1600" dirty="0" err="1"/>
+              <a:t>region</a:t>
+            </a:r>
+            <a:r>
+              <a:rPr lang="de-DE" altLang="de-DE" sz="1600" dirty="0"/>
+              <a:t> </a:t>
+            </a:r>
+            <a:r>
+              <a:rPr lang="de-DE" altLang="de-DE" sz="1600" dirty="0" err="1"/>
+              <a:t>cover</a:t>
+            </a:r>
+            <a:r>
+              <a:rPr lang="de-DE" altLang="de-DE" sz="1600" dirty="0"/>
+              <a:t> medium- </a:t>
+            </a:r>
+            <a:r>
+              <a:rPr lang="de-DE" altLang="de-DE" sz="1600" dirty="0" err="1"/>
+              <a:t>to</a:t>
+            </a:r>
+            <a:r>
+              <a:rPr lang="de-DE" altLang="de-DE" sz="1600" dirty="0"/>
+              <a:t> </a:t>
+            </a:r>
+            <a:r>
+              <a:rPr lang="de-DE" altLang="de-DE" sz="1600" dirty="0" err="1"/>
+              <a:t>long</a:t>
+            </a:r>
+            <a:r>
+              <a:rPr lang="de-DE" altLang="de-DE" sz="1600" dirty="0"/>
+              <a:t>-term </a:t>
+            </a:r>
+            <a:r>
+              <a:rPr lang="de-DE" altLang="de-DE" sz="1600" dirty="0" err="1"/>
+              <a:t>job</a:t>
+            </a:r>
+            <a:r>
+              <a:rPr lang="de-DE" altLang="de-DE" sz="1600" dirty="0"/>
+              <a:t> </a:t>
+            </a:r>
+            <a:r>
+              <a:rPr lang="de-DE" altLang="de-DE" sz="1600" dirty="0" err="1"/>
+              <a:t>demand</a:t>
+            </a:r>
+            <a:r>
+              <a:rPr lang="de-DE" altLang="de-DE" sz="1600" dirty="0"/>
+              <a:t>, and </a:t>
+            </a:r>
+            <a:r>
+              <a:rPr lang="de-DE" altLang="de-DE" sz="1600" dirty="0" err="1"/>
+              <a:t>is</a:t>
+            </a:r>
+            <a:r>
+              <a:rPr lang="de-DE" altLang="de-DE" sz="1600" dirty="0"/>
+              <a:t> </a:t>
+            </a:r>
+            <a:r>
+              <a:rPr lang="de-DE" altLang="de-DE" sz="1600" dirty="0" err="1"/>
+              <a:t>there</a:t>
+            </a:r>
+            <a:r>
+              <a:rPr lang="de-DE" altLang="de-DE" sz="1600" dirty="0"/>
+              <a:t> a </a:t>
+            </a:r>
+            <a:r>
+              <a:rPr lang="de-DE" altLang="de-DE" sz="1600" dirty="0" err="1"/>
+              <a:t>sufficient</a:t>
+            </a:r>
+            <a:r>
+              <a:rPr lang="de-DE" altLang="de-DE" sz="1600" dirty="0"/>
+              <a:t> </a:t>
+            </a:r>
+            <a:r>
+              <a:rPr lang="de-DE" altLang="de-DE" sz="1600" dirty="0" err="1"/>
+              <a:t>candidate</a:t>
+            </a:r>
+            <a:r>
+              <a:rPr lang="de-DE" altLang="de-DE" sz="1600" dirty="0"/>
+              <a:t> pool?</a:t>
+            </a:r>
+          </a:p>
+          <a:p>
+            <a:pPr marL="0" lvl="0" indent="0" eaLnBrk="0" fontAlgn="base" hangingPunct="0">
+              <a:lnSpc>
+                <a:spcPct val="110000"/>
+              </a:lnSpc>
+              <a:spcBef>
+                <a:spcPct val="0"/>
+              </a:spcBef>
+              <a:spcAft>
+                <a:spcPts val="600"/>
+              </a:spcAft>
+              <a:buFontTx/>
+              <a:buAutoNum type="arabicPeriod" startAt="5"/>
+            </a:pPr>
+            <a:r>
+              <a:rPr lang="de-DE" altLang="de-DE" sz="1600" dirty="0"/>
+              <a:t> </a:t>
+            </a:r>
+            <a:r>
+              <a:rPr lang="de-DE" altLang="de-DE" sz="1600" dirty="0" err="1"/>
+              <a:t>Which</a:t>
+            </a:r>
+            <a:r>
+              <a:rPr lang="de-DE" altLang="de-DE" sz="1600" dirty="0"/>
+              <a:t> </a:t>
+            </a:r>
+            <a:r>
+              <a:rPr lang="de-DE" altLang="de-DE" sz="1600" dirty="0" err="1"/>
+              <a:t>training</a:t>
+            </a:r>
+            <a:r>
+              <a:rPr lang="de-DE" altLang="de-DE" sz="1600" dirty="0"/>
+              <a:t> </a:t>
+            </a:r>
+            <a:r>
+              <a:rPr lang="de-DE" altLang="de-DE" sz="1600" dirty="0" err="1"/>
+              <a:t>providers</a:t>
+            </a:r>
+            <a:r>
+              <a:rPr lang="de-DE" altLang="de-DE" sz="1600" dirty="0"/>
+              <a:t> </a:t>
+            </a:r>
+            <a:r>
+              <a:rPr lang="de-DE" altLang="de-DE" sz="1600" dirty="0" err="1"/>
+              <a:t>act</a:t>
+            </a:r>
+            <a:r>
+              <a:rPr lang="de-DE" altLang="de-DE" sz="1600" dirty="0"/>
+              <a:t> </a:t>
+            </a:r>
+            <a:r>
+              <a:rPr lang="de-DE" altLang="de-DE" sz="1600" dirty="0" err="1"/>
+              <a:t>as</a:t>
+            </a:r>
+            <a:r>
+              <a:rPr lang="de-DE" altLang="de-DE" sz="1600" dirty="0"/>
+              <a:t> “</a:t>
+            </a:r>
+            <a:r>
+              <a:rPr lang="de-DE" altLang="de-DE" sz="1600" dirty="0" err="1"/>
+              <a:t>suppliers</a:t>
+            </a:r>
+            <a:r>
+              <a:rPr lang="de-DE" altLang="de-DE" sz="1600" dirty="0"/>
+              <a:t>” </a:t>
+            </a:r>
+            <a:r>
+              <a:rPr lang="de-DE" altLang="de-DE" sz="1600" dirty="0" err="1"/>
+              <a:t>to</a:t>
+            </a:r>
+            <a:r>
+              <a:rPr lang="de-DE" altLang="de-DE" sz="1600" dirty="0"/>
+              <a:t> </a:t>
+            </a:r>
+            <a:r>
+              <a:rPr lang="de-DE" altLang="de-DE" sz="1600" dirty="0" err="1"/>
+              <a:t>which</a:t>
+            </a:r>
+            <a:r>
+              <a:rPr lang="de-DE" altLang="de-DE" sz="1600" dirty="0"/>
+              <a:t> </a:t>
+            </a:r>
+            <a:r>
+              <a:rPr lang="de-DE" altLang="de-DE" sz="1600" dirty="0" err="1"/>
+              <a:t>employer</a:t>
+            </a:r>
+            <a:r>
+              <a:rPr lang="de-DE" altLang="de-DE" sz="1600" dirty="0"/>
+              <a:t> </a:t>
+            </a:r>
+            <a:r>
+              <a:rPr lang="de-DE" altLang="de-DE" sz="1600" dirty="0" err="1"/>
+              <a:t>clusters</a:t>
+            </a:r>
+            <a:r>
+              <a:rPr lang="de-DE" altLang="de-DE" sz="1600" dirty="0"/>
+              <a:t>, and do </a:t>
+            </a:r>
+            <a:r>
+              <a:rPr lang="de-DE" altLang="de-DE" sz="1600" dirty="0" err="1"/>
+              <a:t>candidate</a:t>
+            </a:r>
+            <a:r>
+              <a:rPr lang="de-DE" altLang="de-DE" sz="1600" dirty="0"/>
+              <a:t> </a:t>
+            </a:r>
+            <a:r>
+              <a:rPr lang="de-DE" altLang="de-DE" sz="1600" dirty="0" err="1"/>
+              <a:t>profiles</a:t>
+            </a:r>
+            <a:r>
+              <a:rPr lang="de-DE" altLang="de-DE" sz="1600" dirty="0"/>
+              <a:t> fit </a:t>
+            </a:r>
+            <a:r>
+              <a:rPr lang="de-DE" altLang="de-DE" sz="1600" dirty="0" err="1"/>
+              <a:t>those</a:t>
+            </a:r>
+            <a:r>
+              <a:rPr lang="de-DE" altLang="de-DE" sz="1600" dirty="0"/>
+              <a:t> </a:t>
+            </a:r>
+            <a:r>
+              <a:rPr lang="de-DE" altLang="de-DE" sz="1600" dirty="0" err="1"/>
+              <a:t>clusters</a:t>
+            </a:r>
+            <a:r>
+              <a:rPr lang="de-DE" altLang="de-DE" sz="1600" dirty="0"/>
+              <a:t>?</a:t>
+            </a:r>
+          </a:p>
+          <a:p>
+            <a:pPr marL="0" lvl="0" indent="0" eaLnBrk="0" fontAlgn="base" hangingPunct="0">
+              <a:lnSpc>
+                <a:spcPct val="110000"/>
+              </a:lnSpc>
+              <a:spcBef>
+                <a:spcPct val="0"/>
+              </a:spcBef>
+              <a:spcAft>
+                <a:spcPts val="600"/>
+              </a:spcAft>
+              <a:buFontTx/>
+              <a:buAutoNum type="arabicPeriod" startAt="6"/>
+            </a:pPr>
+            <a:r>
+              <a:rPr lang="de-DE" altLang="de-DE" sz="1600" dirty="0"/>
+              <a:t> Are </a:t>
+            </a:r>
+            <a:r>
+              <a:rPr lang="de-DE" altLang="de-DE" sz="1600" dirty="0" err="1"/>
+              <a:t>there</a:t>
+            </a:r>
+            <a:r>
+              <a:rPr lang="de-DE" altLang="de-DE" sz="1600" dirty="0"/>
+              <a:t> </a:t>
+            </a:r>
+            <a:r>
+              <a:rPr lang="de-DE" altLang="de-DE" sz="1600" dirty="0" err="1"/>
+              <a:t>occupations</a:t>
+            </a:r>
+            <a:r>
+              <a:rPr lang="de-DE" altLang="de-DE" sz="1600" dirty="0"/>
+              <a:t>/</a:t>
+            </a:r>
+            <a:r>
+              <a:rPr lang="de-DE" altLang="de-DE" sz="1600" dirty="0" err="1"/>
+              <a:t>regions</a:t>
+            </a:r>
+            <a:r>
+              <a:rPr lang="de-DE" altLang="de-DE" sz="1600" dirty="0"/>
+              <a:t> </a:t>
+            </a:r>
+            <a:r>
+              <a:rPr lang="de-DE" altLang="de-DE" sz="1600" dirty="0" err="1"/>
+              <a:t>where</a:t>
+            </a:r>
+            <a:r>
+              <a:rPr lang="de-DE" altLang="de-DE" sz="1600" dirty="0"/>
+              <a:t> </a:t>
+            </a:r>
+            <a:r>
+              <a:rPr lang="de-DE" altLang="de-DE" sz="1600" dirty="0" err="1"/>
+              <a:t>training</a:t>
+            </a:r>
+            <a:r>
+              <a:rPr lang="de-DE" altLang="de-DE" sz="1600" dirty="0"/>
+              <a:t> </a:t>
+            </a:r>
+            <a:r>
+              <a:rPr lang="de-DE" altLang="de-DE" sz="1600" dirty="0" err="1"/>
+              <a:t>offers</a:t>
+            </a:r>
+            <a:r>
+              <a:rPr lang="de-DE" altLang="de-DE" sz="1600" dirty="0"/>
+              <a:t> </a:t>
+            </a:r>
+            <a:r>
+              <a:rPr lang="de-DE" altLang="de-DE" sz="1600" dirty="0" err="1"/>
+              <a:t>are</a:t>
+            </a:r>
+            <a:r>
+              <a:rPr lang="de-DE" altLang="de-DE" sz="1600" dirty="0"/>
+              <a:t> abundant but </a:t>
+            </a:r>
+            <a:r>
+              <a:rPr lang="de-DE" altLang="de-DE" sz="1600" dirty="0" err="1"/>
+              <a:t>candidate</a:t>
+            </a:r>
+            <a:r>
+              <a:rPr lang="de-DE" altLang="de-DE" sz="1600" dirty="0"/>
+              <a:t> </a:t>
+            </a:r>
+            <a:r>
+              <a:rPr lang="de-DE" altLang="de-DE" sz="1600" dirty="0" err="1"/>
+              <a:t>profiles</a:t>
+            </a:r>
+            <a:r>
+              <a:rPr lang="de-DE" altLang="de-DE" sz="1600" dirty="0"/>
+              <a:t> </a:t>
+            </a:r>
+            <a:r>
+              <a:rPr lang="de-DE" altLang="de-DE" sz="1600" dirty="0" err="1"/>
+              <a:t>with</a:t>
+            </a:r>
+            <a:r>
+              <a:rPr lang="de-DE" altLang="de-DE" sz="1600" dirty="0"/>
+              <a:t> </a:t>
+            </a:r>
+            <a:r>
+              <a:rPr lang="de-DE" altLang="de-DE" sz="1600" dirty="0" err="1"/>
+              <a:t>specific</a:t>
+            </a:r>
+            <a:r>
+              <a:rPr lang="de-DE" altLang="de-DE" sz="1600" dirty="0"/>
+              <a:t> </a:t>
+            </a:r>
+            <a:r>
+              <a:rPr lang="de-DE" altLang="de-DE" sz="1600" dirty="0" err="1"/>
+              <a:t>attributes</a:t>
+            </a:r>
+            <a:r>
+              <a:rPr lang="de-DE" altLang="de-DE" sz="1600" dirty="0"/>
+              <a:t> (e.g., school-</a:t>
+            </a:r>
+            <a:r>
+              <a:rPr lang="de-DE" altLang="de-DE" sz="1600" dirty="0" err="1"/>
+              <a:t>leaving</a:t>
+            </a:r>
+            <a:r>
+              <a:rPr lang="de-DE" altLang="de-DE" sz="1600" dirty="0"/>
+              <a:t> </a:t>
+            </a:r>
+            <a:r>
+              <a:rPr lang="de-DE" altLang="de-DE" sz="1600" dirty="0" err="1"/>
+              <a:t>qualifications</a:t>
+            </a:r>
+            <a:r>
+              <a:rPr lang="de-DE" altLang="de-DE" sz="1600" dirty="0"/>
+              <a:t>) </a:t>
+            </a:r>
+            <a:r>
+              <a:rPr lang="de-DE" altLang="de-DE" sz="1600" dirty="0" err="1"/>
+              <a:t>are</a:t>
+            </a:r>
+            <a:r>
+              <a:rPr lang="de-DE" altLang="de-DE" sz="1600" dirty="0"/>
+              <a:t> </a:t>
+            </a:r>
+            <a:r>
+              <a:rPr lang="de-DE" altLang="de-DE" sz="1600" dirty="0" err="1"/>
+              <a:t>scarce</a:t>
+            </a:r>
+            <a:r>
+              <a:rPr lang="de-DE" altLang="de-DE" sz="1600" dirty="0"/>
+              <a:t>?</a:t>
+            </a:r>
+          </a:p>
+          <a:p>
+            <a:endParaRPr lang="en-DE" sz="1600" dirty="0"/>
+          </a:p>
+        </p:txBody>
+      </p:sp>
+      <p:sp>
+        <p:nvSpPr>
           <p:cNvPr id="5" name="Slide Number Placeholder 4">
             <a:extLst>
               <a:ext uri="{FF2B5EF4-FFF2-40B4-BE49-F238E27FC236}">
-                <a16:creationId xmlns:a16="http://schemas.microsoft.com/office/drawing/2014/main" id="{4D27E5DB-AFB6-9088-87C9-1F671C0B0330}"/>
+                <a16:creationId xmlns:a16="http://schemas.microsoft.com/office/drawing/2014/main" id="{E41B11DD-7668-511A-F4CD-66717D9B4D44}"/>
               </a:ext>
             </a:extLst>
           </p:cNvPr>
@@ -7449,52 +8744,33 @@
           </a:xfrm>
         </p:spPr>
         <p:txBody>
-          <a:bodyPr/>
+          <a:bodyPr anchor="ctr">
+            <a:normAutofit/>
+          </a:bodyPr>
           <a:lstStyle/>
           <a:p>
+            <a:pPr>
+              <a:spcAft>
+                <a:spcPts val="600"/>
+              </a:spcAft>
+            </a:pPr>
             <a:fld id="{B5CEABB6-07DC-46E8-9B57-56EC44A396E5}" type="slidenum">
               <a:rPr lang="en-US" smtClean="0"/>
-              <a:pPr/>
+              <a:pPr>
+                <a:spcAft>
+                  <a:spcPts val="600"/>
+                </a:spcAft>
+              </a:pPr>
               <a:t>13</a:t>
             </a:fld>
-            <a:endParaRPr lang="en-US" dirty="0"/>
-          </a:p>
-        </p:txBody>
-      </p:sp>
-      <p:sp>
-        <p:nvSpPr>
-          <p:cNvPr id="7" name="Content Placeholder 6">
-            <a:extLst>
-              <a:ext uri="{FF2B5EF4-FFF2-40B4-BE49-F238E27FC236}">
-                <a16:creationId xmlns:a16="http://schemas.microsoft.com/office/drawing/2014/main" id="{33D4C493-6B56-BE2A-51E3-AC9B485C5C89}"/>
-              </a:ext>
-            </a:extLst>
-          </p:cNvPr>
-          <p:cNvSpPr>
-            <a:spLocks noGrp="1"/>
-          </p:cNvSpPr>
-          <p:nvPr>
-            <p:ph sz="quarter" idx="11"/>
-          </p:nvPr>
-        </p:nvSpPr>
-        <p:spPr>
-          <a:xfrm>
-            <a:off x="914398" y="2018120"/>
-            <a:ext cx="10439401" cy="3747180"/>
-          </a:xfrm>
-        </p:spPr>
-        <p:txBody>
-          <a:bodyPr/>
-          <a:lstStyle/>
-          <a:p>
-            <a:endParaRPr lang="en-DE" dirty="0"/>
+            <a:endParaRPr lang="en-US"/>
           </a:p>
         </p:txBody>
       </p:sp>
     </p:spTree>
     <p:extLst>
       <p:ext uri="{BB962C8B-B14F-4D97-AF65-F5344CB8AC3E}">
-        <p14:creationId xmlns:p14="http://schemas.microsoft.com/office/powerpoint/2010/main" val="569699605"/>
+        <p14:creationId xmlns:p14="http://schemas.microsoft.com/office/powerpoint/2010/main" val="409797650"/>
       </p:ext>
     </p:extLst>
   </p:cSld>
@@ -7505,6 +8781,1511 @@
 </file>
 
 <file path=ppt/slides/slide14.xml><?xml version="1.0" encoding="utf-8"?>
+<p:sld xmlns:a="http://schemas.openxmlformats.org/drawingml/2006/main" xmlns:r="http://schemas.openxmlformats.org/officeDocument/2006/relationships" xmlns:p="http://schemas.openxmlformats.org/presentationml/2006/main">
+  <p:cSld>
+    <p:spTree>
+      <p:nvGrpSpPr>
+        <p:cNvPr id="1" name="">
+          <a:extLst>
+            <a:ext uri="{FF2B5EF4-FFF2-40B4-BE49-F238E27FC236}">
+              <a16:creationId xmlns:a16="http://schemas.microsoft.com/office/drawing/2014/main" id="{069D251D-3D21-B9CB-2CE3-C04E559A4093}"/>
+            </a:ext>
+          </a:extLst>
+        </p:cNvPr>
+        <p:cNvGrpSpPr/>
+        <p:nvPr/>
+      </p:nvGrpSpPr>
+      <p:grpSpPr>
+        <a:xfrm>
+          <a:off x="0" y="0"/>
+          <a:ext cx="0" cy="0"/>
+          <a:chOff x="0" y="0"/>
+          <a:chExt cx="0" cy="0"/>
+        </a:xfrm>
+      </p:grpSpPr>
+      <p:sp>
+        <p:nvSpPr>
+          <p:cNvPr id="2" name="Title 1">
+            <a:extLst>
+              <a:ext uri="{FF2B5EF4-FFF2-40B4-BE49-F238E27FC236}">
+                <a16:creationId xmlns:a16="http://schemas.microsoft.com/office/drawing/2014/main" id="{38BCF590-E615-5199-FECF-49AC6C9BA854}"/>
+              </a:ext>
+            </a:extLst>
+          </p:cNvPr>
+          <p:cNvSpPr>
+            <a:spLocks noGrp="1"/>
+          </p:cNvSpPr>
+          <p:nvPr>
+            <p:ph type="title"/>
+          </p:nvPr>
+        </p:nvSpPr>
+        <p:spPr>
+          <a:xfrm>
+            <a:off x="914399" y="365125"/>
+            <a:ext cx="7273637" cy="1646555"/>
+          </a:xfrm>
+        </p:spPr>
+        <p:txBody>
+          <a:bodyPr anchor="ctr">
+            <a:normAutofit/>
+          </a:bodyPr>
+          <a:lstStyle/>
+          <a:p>
+            <a:r>
+              <a:rPr lang="en-US" dirty="0"/>
+              <a:t>Job Market - questions</a:t>
+            </a:r>
+          </a:p>
+        </p:txBody>
+      </p:sp>
+      <p:sp>
+        <p:nvSpPr>
+          <p:cNvPr id="9" name="Content Placeholder 8">
+            <a:extLst>
+              <a:ext uri="{FF2B5EF4-FFF2-40B4-BE49-F238E27FC236}">
+                <a16:creationId xmlns:a16="http://schemas.microsoft.com/office/drawing/2014/main" id="{AD662606-3081-5A3E-ED4D-0DB240149FB9}"/>
+              </a:ext>
+            </a:extLst>
+          </p:cNvPr>
+          <p:cNvSpPr>
+            <a:spLocks noGrp="1"/>
+          </p:cNvSpPr>
+          <p:nvPr>
+            <p:ph sz="quarter" idx="10"/>
+          </p:nvPr>
+        </p:nvSpPr>
+        <p:spPr>
+          <a:xfrm>
+            <a:off x="914399" y="2011363"/>
+            <a:ext cx="7273638" cy="4155757"/>
+          </a:xfrm>
+        </p:spPr>
+        <p:txBody>
+          <a:bodyPr>
+            <a:normAutofit lnSpcReduction="10000"/>
+          </a:bodyPr>
+          <a:lstStyle/>
+          <a:p>
+            <a:pPr lvl="0" eaLnBrk="0" fontAlgn="base" hangingPunct="0">
+              <a:spcBef>
+                <a:spcPct val="0"/>
+              </a:spcBef>
+              <a:spcAft>
+                <a:spcPts val="600"/>
+              </a:spcAft>
+              <a:buFontTx/>
+              <a:buAutoNum type="arabicPeriod" startAt="7"/>
+            </a:pPr>
+            <a:r>
+              <a:rPr lang="de-DE" altLang="de-DE" sz="1600" dirty="0"/>
+              <a:t> </a:t>
+            </a:r>
+            <a:r>
+              <a:rPr lang="de-DE" altLang="de-DE" sz="1600" dirty="0" err="1"/>
+              <a:t>What</a:t>
+            </a:r>
+            <a:r>
+              <a:rPr lang="de-DE" altLang="de-DE" sz="1600" dirty="0"/>
+              <a:t> </a:t>
+            </a:r>
+            <a:r>
+              <a:rPr lang="de-DE" altLang="de-DE" sz="1600" dirty="0" err="1"/>
+              <a:t>is</a:t>
+            </a:r>
+            <a:r>
+              <a:rPr lang="de-DE" altLang="de-DE" sz="1600" dirty="0"/>
+              <a:t> </a:t>
+            </a:r>
+            <a:r>
+              <a:rPr lang="de-DE" altLang="de-DE" sz="1600" dirty="0" err="1"/>
+              <a:t>the</a:t>
+            </a:r>
+            <a:r>
+              <a:rPr lang="de-DE" altLang="de-DE" sz="1600" dirty="0"/>
+              <a:t> </a:t>
+            </a:r>
+            <a:r>
+              <a:rPr lang="de-DE" altLang="de-DE" sz="1600" dirty="0" err="1"/>
+              <a:t>distribution</a:t>
+            </a:r>
+            <a:r>
+              <a:rPr lang="de-DE" altLang="de-DE" sz="1600" dirty="0"/>
+              <a:t> </a:t>
+            </a:r>
+            <a:r>
+              <a:rPr lang="de-DE" altLang="de-DE" sz="1600" dirty="0" err="1"/>
+              <a:t>of</a:t>
+            </a:r>
+            <a:r>
+              <a:rPr lang="de-DE" altLang="de-DE" sz="1600" dirty="0"/>
+              <a:t> </a:t>
+            </a:r>
+            <a:r>
+              <a:rPr lang="de-DE" altLang="de-DE" sz="1600" dirty="0" err="1"/>
+              <a:t>qualifications</a:t>
+            </a:r>
+            <a:r>
+              <a:rPr lang="de-DE" altLang="de-DE" sz="1600" dirty="0"/>
+              <a:t>/</a:t>
+            </a:r>
+            <a:r>
+              <a:rPr lang="de-DE" altLang="de-DE" sz="1600" dirty="0" err="1"/>
+              <a:t>educational</a:t>
+            </a:r>
+            <a:r>
+              <a:rPr lang="de-DE" altLang="de-DE" sz="1600" dirty="0"/>
+              <a:t> </a:t>
+            </a:r>
+            <a:r>
+              <a:rPr lang="de-DE" altLang="de-DE" sz="1600" dirty="0" err="1"/>
+              <a:t>degrees</a:t>
+            </a:r>
+            <a:r>
+              <a:rPr lang="de-DE" altLang="de-DE" sz="1600" dirty="0"/>
+              <a:t>/</a:t>
+            </a:r>
+            <a:r>
+              <a:rPr lang="de-DE" altLang="de-DE" sz="1600" dirty="0" err="1"/>
+              <a:t>skills</a:t>
+            </a:r>
+            <a:r>
+              <a:rPr lang="de-DE" altLang="de-DE" sz="1600" dirty="0"/>
+              <a:t> </a:t>
+            </a:r>
+            <a:r>
+              <a:rPr lang="de-DE" altLang="de-DE" sz="1600" dirty="0" err="1"/>
+              <a:t>by</a:t>
+            </a:r>
+            <a:r>
+              <a:rPr lang="de-DE" altLang="de-DE" sz="1600" dirty="0"/>
+              <a:t> </a:t>
+            </a:r>
+            <a:r>
+              <a:rPr lang="de-DE" altLang="de-DE" sz="1600" dirty="0" err="1"/>
+              <a:t>region</a:t>
+            </a:r>
+            <a:r>
+              <a:rPr lang="de-DE" altLang="de-DE" sz="1600" dirty="0"/>
+              <a:t> (</a:t>
+            </a:r>
+            <a:r>
+              <a:rPr lang="de-DE" altLang="de-DE" sz="1600" dirty="0" err="1"/>
+              <a:t>where</a:t>
+            </a:r>
+            <a:r>
+              <a:rPr lang="de-DE" altLang="de-DE" sz="1600" dirty="0"/>
+              <a:t>/</a:t>
+            </a:r>
+            <a:r>
+              <a:rPr lang="de-DE" altLang="de-DE" sz="1600" dirty="0" err="1"/>
+              <a:t>re</a:t>
+            </a:r>
+            <a:r>
+              <a:rPr lang="de-DE" altLang="de-DE" sz="1600" dirty="0"/>
+              <a:t>/</a:t>
+            </a:r>
+            <a:r>
+              <a:rPr lang="de-DE" altLang="de-DE" sz="1600" dirty="0" err="1"/>
+              <a:t>zip</a:t>
+            </a:r>
+            <a:r>
+              <a:rPr lang="de-DE" altLang="de-DE" sz="1600" dirty="0"/>
+              <a:t>) and </a:t>
+            </a:r>
+            <a:r>
+              <a:rPr lang="de-DE" altLang="de-DE" sz="1600" dirty="0" err="1"/>
+              <a:t>occupational</a:t>
+            </a:r>
+            <a:r>
+              <a:rPr lang="de-DE" altLang="de-DE" sz="1600" dirty="0"/>
+              <a:t> </a:t>
+            </a:r>
+            <a:r>
+              <a:rPr lang="de-DE" altLang="de-DE" sz="1600" dirty="0" err="1"/>
+              <a:t>field</a:t>
+            </a:r>
+            <a:r>
+              <a:rPr lang="de-DE" altLang="de-DE" sz="1600" dirty="0"/>
+              <a:t>?</a:t>
+            </a:r>
+          </a:p>
+          <a:p>
+            <a:pPr lvl="0" eaLnBrk="0" fontAlgn="base" hangingPunct="0">
+              <a:spcBef>
+                <a:spcPct val="0"/>
+              </a:spcBef>
+              <a:spcAft>
+                <a:spcPts val="600"/>
+              </a:spcAft>
+              <a:buFontTx/>
+              <a:buAutoNum type="arabicPeriod" startAt="8"/>
+            </a:pPr>
+            <a:r>
+              <a:rPr lang="de-DE" altLang="de-DE" sz="1600" dirty="0"/>
+              <a:t> How </a:t>
+            </a:r>
+            <a:r>
+              <a:rPr lang="de-DE" altLang="de-DE" sz="1600" dirty="0" err="1"/>
+              <a:t>many</a:t>
+            </a:r>
+            <a:r>
+              <a:rPr lang="de-DE" altLang="de-DE" sz="1600" dirty="0"/>
+              <a:t> </a:t>
+            </a:r>
+            <a:r>
+              <a:rPr lang="de-DE" altLang="de-DE" sz="1600" dirty="0" err="1"/>
+              <a:t>entry</a:t>
+            </a:r>
+            <a:r>
+              <a:rPr lang="de-DE" altLang="de-DE" sz="1600" dirty="0"/>
+              <a:t>-level vs. </a:t>
+            </a:r>
+            <a:r>
+              <a:rPr lang="de-DE" altLang="de-DE" sz="1600" dirty="0" err="1"/>
+              <a:t>senior</a:t>
+            </a:r>
+            <a:r>
+              <a:rPr lang="de-DE" altLang="de-DE" sz="1600" dirty="0"/>
+              <a:t> </a:t>
+            </a:r>
+            <a:r>
+              <a:rPr lang="de-DE" altLang="de-DE" sz="1600" dirty="0" err="1"/>
+              <a:t>roles</a:t>
+            </a:r>
+            <a:r>
+              <a:rPr lang="de-DE" altLang="de-DE" sz="1600" dirty="0"/>
+              <a:t> </a:t>
+            </a:r>
+            <a:r>
+              <a:rPr lang="de-DE" altLang="de-DE" sz="1600" dirty="0" err="1"/>
+              <a:t>are</a:t>
+            </a:r>
+            <a:r>
+              <a:rPr lang="de-DE" altLang="de-DE" sz="1600" dirty="0"/>
+              <a:t> </a:t>
+            </a:r>
+            <a:r>
+              <a:rPr lang="de-DE" altLang="de-DE" sz="1600" dirty="0" err="1"/>
+              <a:t>advertised</a:t>
+            </a:r>
+            <a:r>
+              <a:rPr lang="de-DE" altLang="de-DE" sz="1600" dirty="0"/>
+              <a:t> </a:t>
+            </a:r>
+            <a:r>
+              <a:rPr lang="de-DE" altLang="de-DE" sz="1600" dirty="0" err="1"/>
+              <a:t>within</a:t>
+            </a:r>
+            <a:r>
+              <a:rPr lang="de-DE" altLang="de-DE" sz="1600" dirty="0"/>
+              <a:t> </a:t>
+            </a:r>
+            <a:r>
+              <a:rPr lang="de-DE" altLang="de-DE" sz="1600" dirty="0" err="1"/>
+              <a:t>occupational</a:t>
+            </a:r>
+            <a:r>
+              <a:rPr lang="de-DE" altLang="de-DE" sz="1600" dirty="0"/>
+              <a:t> </a:t>
+            </a:r>
+            <a:r>
+              <a:rPr lang="de-DE" altLang="de-DE" sz="1600" dirty="0" err="1"/>
+              <a:t>field</a:t>
+            </a:r>
+            <a:r>
+              <a:rPr lang="de-DE" altLang="de-DE" sz="1600" dirty="0"/>
+              <a:t> Y, and </a:t>
+            </a:r>
+            <a:r>
+              <a:rPr lang="de-DE" altLang="de-DE" sz="1600" dirty="0" err="1"/>
+              <a:t>which</a:t>
+            </a:r>
+            <a:r>
+              <a:rPr lang="de-DE" altLang="de-DE" sz="1600" dirty="0"/>
+              <a:t> </a:t>
+            </a:r>
+            <a:r>
+              <a:rPr lang="de-DE" altLang="de-DE" sz="1600" dirty="0" err="1"/>
+              <a:t>regions</a:t>
+            </a:r>
+            <a:r>
+              <a:rPr lang="de-DE" altLang="de-DE" sz="1600" dirty="0"/>
+              <a:t> </a:t>
+            </a:r>
+            <a:r>
+              <a:rPr lang="de-DE" altLang="de-DE" sz="1600" dirty="0" err="1"/>
+              <a:t>offer</a:t>
+            </a:r>
+            <a:r>
+              <a:rPr lang="de-DE" altLang="de-DE" sz="1600" dirty="0"/>
+              <a:t> an </a:t>
+            </a:r>
+            <a:r>
+              <a:rPr lang="de-DE" altLang="de-DE" sz="1600" dirty="0" err="1"/>
+              <a:t>above-average</a:t>
+            </a:r>
+            <a:r>
+              <a:rPr lang="de-DE" altLang="de-DE" sz="1600" dirty="0"/>
+              <a:t> </a:t>
+            </a:r>
+            <a:r>
+              <a:rPr lang="de-DE" altLang="de-DE" sz="1600" dirty="0" err="1"/>
+              <a:t>number</a:t>
+            </a:r>
+            <a:r>
+              <a:rPr lang="de-DE" altLang="de-DE" sz="1600" dirty="0"/>
+              <a:t> </a:t>
+            </a:r>
+            <a:r>
+              <a:rPr lang="de-DE" altLang="de-DE" sz="1600" dirty="0" err="1"/>
+              <a:t>of</a:t>
+            </a:r>
+            <a:r>
+              <a:rPr lang="de-DE" altLang="de-DE" sz="1600" dirty="0"/>
+              <a:t> </a:t>
+            </a:r>
+            <a:r>
+              <a:rPr lang="de-DE" altLang="de-DE" sz="1600" dirty="0" err="1"/>
+              <a:t>entry</a:t>
+            </a:r>
+            <a:r>
+              <a:rPr lang="de-DE" altLang="de-DE" sz="1600" dirty="0"/>
+              <a:t> </a:t>
+            </a:r>
+            <a:r>
+              <a:rPr lang="de-DE" altLang="de-DE" sz="1600" dirty="0" err="1"/>
+              <a:t>opportunities</a:t>
+            </a:r>
+            <a:r>
+              <a:rPr lang="de-DE" altLang="de-DE" sz="1600" dirty="0"/>
+              <a:t>?</a:t>
+            </a:r>
+          </a:p>
+          <a:p>
+            <a:pPr lvl="0" eaLnBrk="0" fontAlgn="base" hangingPunct="0">
+              <a:spcBef>
+                <a:spcPct val="0"/>
+              </a:spcBef>
+              <a:spcAft>
+                <a:spcPts val="600"/>
+              </a:spcAft>
+              <a:buFontTx/>
+              <a:buAutoNum type="arabicPeriod" startAt="9"/>
+            </a:pPr>
+            <a:r>
+              <a:rPr lang="de-DE" altLang="de-DE" sz="1600" dirty="0"/>
+              <a:t> </a:t>
+            </a:r>
+            <a:r>
+              <a:rPr lang="de-DE" altLang="de-DE" sz="1600" dirty="0" err="1"/>
+              <a:t>Which</a:t>
+            </a:r>
+            <a:r>
+              <a:rPr lang="de-DE" altLang="de-DE" sz="1600" dirty="0"/>
+              <a:t> top </a:t>
+            </a:r>
+            <a:r>
+              <a:rPr lang="de-DE" altLang="de-DE" sz="1600" dirty="0" err="1"/>
+              <a:t>five</a:t>
+            </a:r>
+            <a:r>
+              <a:rPr lang="de-DE" altLang="de-DE" sz="1600" dirty="0"/>
+              <a:t> </a:t>
+            </a:r>
+            <a:r>
+              <a:rPr lang="de-DE" altLang="de-DE" sz="1600" dirty="0" err="1"/>
+              <a:t>occupations</a:t>
+            </a:r>
+            <a:r>
+              <a:rPr lang="de-DE" altLang="de-DE" sz="1600" dirty="0"/>
+              <a:t> in and </a:t>
+            </a:r>
+            <a:r>
+              <a:rPr lang="de-DE" altLang="de-DE" sz="1600" dirty="0" err="1"/>
+              <a:t>around</a:t>
+            </a:r>
+            <a:r>
+              <a:rPr lang="de-DE" altLang="de-DE" sz="1600" dirty="0"/>
+              <a:t> Kiel </a:t>
+            </a:r>
+            <a:r>
+              <a:rPr lang="de-DE" altLang="de-DE" sz="1600" dirty="0" err="1"/>
+              <a:t>show</a:t>
+            </a:r>
+            <a:r>
+              <a:rPr lang="de-DE" altLang="de-DE" sz="1600" dirty="0"/>
+              <a:t> </a:t>
+            </a:r>
+            <a:r>
+              <a:rPr lang="de-DE" altLang="de-DE" sz="1600" dirty="0" err="1"/>
+              <a:t>the</a:t>
+            </a:r>
+            <a:r>
+              <a:rPr lang="de-DE" altLang="de-DE" sz="1600" dirty="0"/>
+              <a:t> </a:t>
+            </a:r>
+            <a:r>
+              <a:rPr lang="de-DE" altLang="de-DE" sz="1600" dirty="0" err="1"/>
+              <a:t>largest</a:t>
+            </a:r>
+            <a:r>
+              <a:rPr lang="de-DE" altLang="de-DE" sz="1600" dirty="0"/>
+              <a:t> </a:t>
+            </a:r>
+            <a:r>
+              <a:rPr lang="de-DE" altLang="de-DE" sz="1600" dirty="0" err="1"/>
+              <a:t>mismatch</a:t>
+            </a:r>
+            <a:r>
+              <a:rPr lang="de-DE" altLang="de-DE" sz="1600" dirty="0"/>
+              <a:t> (</a:t>
+            </a:r>
+            <a:r>
+              <a:rPr lang="de-DE" altLang="de-DE" sz="1600" dirty="0" err="1"/>
+              <a:t>many</a:t>
+            </a:r>
+            <a:r>
+              <a:rPr lang="de-DE" altLang="de-DE" sz="1600" dirty="0"/>
+              <a:t> </a:t>
+            </a:r>
+            <a:r>
+              <a:rPr lang="de-DE" altLang="de-DE" sz="1600" dirty="0" err="1"/>
+              <a:t>jobs</a:t>
+            </a:r>
+            <a:r>
+              <a:rPr lang="de-DE" altLang="de-DE" sz="1600" dirty="0"/>
+              <a:t>, </a:t>
+            </a:r>
+            <a:r>
+              <a:rPr lang="de-DE" altLang="de-DE" sz="1600" dirty="0" err="1"/>
+              <a:t>few</a:t>
+            </a:r>
+            <a:r>
+              <a:rPr lang="de-DE" altLang="de-DE" sz="1600" dirty="0"/>
+              <a:t> </a:t>
+            </a:r>
+            <a:r>
+              <a:rPr lang="de-DE" altLang="de-DE" sz="1600" dirty="0" err="1"/>
+              <a:t>candidates</a:t>
+            </a:r>
+            <a:r>
+              <a:rPr lang="de-DE" altLang="de-DE" sz="1600" dirty="0"/>
+              <a:t>) — and </a:t>
+            </a:r>
+            <a:r>
+              <a:rPr lang="de-DE" altLang="de-DE" sz="1600" dirty="0" err="1"/>
+              <a:t>are</a:t>
+            </a:r>
+            <a:r>
+              <a:rPr lang="de-DE" altLang="de-DE" sz="1600" dirty="0"/>
+              <a:t> </a:t>
+            </a:r>
+            <a:r>
+              <a:rPr lang="de-DE" altLang="de-DE" sz="1600" dirty="0" err="1"/>
+              <a:t>there</a:t>
+            </a:r>
+            <a:r>
+              <a:rPr lang="de-DE" altLang="de-DE" sz="1600" dirty="0"/>
+              <a:t> </a:t>
+            </a:r>
+            <a:r>
+              <a:rPr lang="de-DE" altLang="de-DE" sz="1600" dirty="0" err="1"/>
+              <a:t>sufficient</a:t>
+            </a:r>
+            <a:r>
+              <a:rPr lang="de-DE" altLang="de-DE" sz="1600" dirty="0"/>
+              <a:t> </a:t>
+            </a:r>
+            <a:r>
+              <a:rPr lang="de-DE" altLang="de-DE" sz="1600" dirty="0" err="1"/>
+              <a:t>training</a:t>
+            </a:r>
+            <a:r>
+              <a:rPr lang="de-DE" altLang="de-DE" sz="1600" dirty="0"/>
+              <a:t> </a:t>
+            </a:r>
+            <a:r>
+              <a:rPr lang="de-DE" altLang="de-DE" sz="1600" dirty="0" err="1"/>
+              <a:t>places</a:t>
+            </a:r>
+            <a:r>
+              <a:rPr lang="de-DE" altLang="de-DE" sz="1600" dirty="0"/>
+              <a:t> </a:t>
+            </a:r>
+            <a:r>
+              <a:rPr lang="de-DE" altLang="de-DE" sz="1600" dirty="0" err="1"/>
+              <a:t>available</a:t>
+            </a:r>
+            <a:r>
+              <a:rPr lang="de-DE" altLang="de-DE" sz="1600" dirty="0"/>
+              <a:t>?</a:t>
+            </a:r>
+          </a:p>
+          <a:p>
+            <a:pPr lvl="0" eaLnBrk="0" fontAlgn="base" hangingPunct="0">
+              <a:spcBef>
+                <a:spcPct val="0"/>
+              </a:spcBef>
+              <a:spcAft>
+                <a:spcPts val="600"/>
+              </a:spcAft>
+              <a:buFontTx/>
+              <a:buAutoNum type="arabicPeriod" startAt="10"/>
+            </a:pPr>
+            <a:r>
+              <a:rPr lang="de-DE" altLang="de-DE" sz="1600" dirty="0"/>
+              <a:t> </a:t>
+            </a:r>
+            <a:r>
+              <a:rPr lang="de-DE" altLang="de-DE" sz="1600" dirty="0" err="1"/>
+              <a:t>Which</a:t>
+            </a:r>
+            <a:r>
+              <a:rPr lang="de-DE" altLang="de-DE" sz="1600" dirty="0"/>
+              <a:t> formal </a:t>
+            </a:r>
+            <a:r>
+              <a:rPr lang="de-DE" altLang="de-DE" sz="1600" dirty="0" err="1"/>
+              <a:t>qualifications</a:t>
+            </a:r>
+            <a:r>
+              <a:rPr lang="de-DE" altLang="de-DE" sz="1600" dirty="0"/>
+              <a:t> (school-</a:t>
+            </a:r>
+            <a:r>
+              <a:rPr lang="de-DE" altLang="de-DE" sz="1600" dirty="0" err="1"/>
+              <a:t>leaving</a:t>
+            </a:r>
+            <a:r>
+              <a:rPr lang="de-DE" altLang="de-DE" sz="1600" dirty="0"/>
+              <a:t> </a:t>
+            </a:r>
+            <a:r>
+              <a:rPr lang="de-DE" altLang="de-DE" sz="1600" dirty="0" err="1"/>
+              <a:t>certificate</a:t>
+            </a:r>
+            <a:r>
+              <a:rPr lang="de-DE" altLang="de-DE" sz="1600" dirty="0"/>
+              <a:t>, </a:t>
+            </a:r>
+            <a:r>
+              <a:rPr lang="de-DE" altLang="de-DE" sz="1600" dirty="0" err="1"/>
+              <a:t>vocational</a:t>
+            </a:r>
+            <a:r>
+              <a:rPr lang="de-DE" altLang="de-DE" sz="1600" dirty="0"/>
+              <a:t> </a:t>
+            </a:r>
+            <a:r>
+              <a:rPr lang="de-DE" altLang="de-DE" sz="1600" dirty="0" err="1"/>
+              <a:t>qualification</a:t>
+            </a:r>
+            <a:r>
+              <a:rPr lang="de-DE" altLang="de-DE" sz="1600" dirty="0"/>
+              <a:t>, additional </a:t>
+            </a:r>
+            <a:r>
+              <a:rPr lang="de-DE" altLang="de-DE" sz="1600" dirty="0" err="1"/>
+              <a:t>certifications</a:t>
+            </a:r>
+            <a:r>
+              <a:rPr lang="de-DE" altLang="de-DE" sz="1600" dirty="0"/>
+              <a:t>) </a:t>
+            </a:r>
+            <a:r>
+              <a:rPr lang="de-DE" altLang="de-DE" sz="1600" dirty="0" err="1"/>
+              <a:t>are</a:t>
+            </a:r>
+            <a:r>
+              <a:rPr lang="de-DE" altLang="de-DE" sz="1600" dirty="0"/>
+              <a:t> </a:t>
+            </a:r>
+            <a:r>
+              <a:rPr lang="de-DE" altLang="de-DE" sz="1600" dirty="0" err="1"/>
+              <a:t>most</a:t>
+            </a:r>
+            <a:r>
+              <a:rPr lang="de-DE" altLang="de-DE" sz="1600" dirty="0"/>
+              <a:t> </a:t>
+            </a:r>
+            <a:r>
+              <a:rPr lang="de-DE" altLang="de-DE" sz="1600" dirty="0" err="1"/>
+              <a:t>frequently</a:t>
+            </a:r>
+            <a:r>
+              <a:rPr lang="de-DE" altLang="de-DE" sz="1600" dirty="0"/>
+              <a:t> </a:t>
+            </a:r>
+            <a:r>
+              <a:rPr lang="de-DE" altLang="de-DE" sz="1600" dirty="0" err="1"/>
+              <a:t>required</a:t>
+            </a:r>
+            <a:r>
+              <a:rPr lang="de-DE" altLang="de-DE" sz="1600" dirty="0"/>
+              <a:t> in a </a:t>
+            </a:r>
+            <a:r>
+              <a:rPr lang="de-DE" altLang="de-DE" sz="1600" dirty="0" err="1"/>
+              <a:t>region’s</a:t>
+            </a:r>
+            <a:r>
+              <a:rPr lang="de-DE" altLang="de-DE" sz="1600" dirty="0"/>
+              <a:t> </a:t>
+            </a:r>
+            <a:r>
+              <a:rPr lang="de-DE" altLang="de-DE" sz="1600" dirty="0" err="1"/>
+              <a:t>job</a:t>
+            </a:r>
+            <a:r>
+              <a:rPr lang="de-DE" altLang="de-DE" sz="1600" dirty="0"/>
+              <a:t> </a:t>
+            </a:r>
+            <a:r>
+              <a:rPr lang="de-DE" altLang="de-DE" sz="1600" dirty="0" err="1"/>
+              <a:t>ads</a:t>
+            </a:r>
+            <a:r>
+              <a:rPr lang="de-DE" altLang="de-DE" sz="1600" dirty="0"/>
+              <a:t> — and do </a:t>
+            </a:r>
+            <a:r>
+              <a:rPr lang="de-DE" altLang="de-DE" sz="1600" dirty="0" err="1"/>
+              <a:t>local</a:t>
+            </a:r>
+            <a:r>
+              <a:rPr lang="de-DE" altLang="de-DE" sz="1600" dirty="0"/>
+              <a:t> </a:t>
+            </a:r>
+            <a:r>
+              <a:rPr lang="de-DE" altLang="de-DE" sz="1600" dirty="0" err="1"/>
+              <a:t>training</a:t>
+            </a:r>
+            <a:r>
+              <a:rPr lang="de-DE" altLang="de-DE" sz="1600" dirty="0"/>
+              <a:t> </a:t>
+            </a:r>
+            <a:r>
+              <a:rPr lang="de-DE" altLang="de-DE" sz="1600" dirty="0" err="1"/>
+              <a:t>programs</a:t>
+            </a:r>
+            <a:r>
+              <a:rPr lang="de-DE" altLang="de-DE" sz="1600" dirty="0"/>
+              <a:t> </a:t>
+            </a:r>
+            <a:r>
+              <a:rPr lang="de-DE" altLang="de-DE" sz="1600" dirty="0" err="1"/>
+              <a:t>reflect</a:t>
+            </a:r>
+            <a:r>
+              <a:rPr lang="de-DE" altLang="de-DE" sz="1600" dirty="0"/>
+              <a:t> </a:t>
+            </a:r>
+            <a:r>
+              <a:rPr lang="de-DE" altLang="de-DE" sz="1600" dirty="0" err="1"/>
+              <a:t>these</a:t>
+            </a:r>
+            <a:r>
+              <a:rPr lang="de-DE" altLang="de-DE" sz="1600" dirty="0"/>
+              <a:t> </a:t>
+            </a:r>
+            <a:r>
+              <a:rPr lang="de-DE" altLang="de-DE" sz="1600" dirty="0" err="1"/>
+              <a:t>requirements</a:t>
+            </a:r>
+            <a:r>
+              <a:rPr lang="de-DE" altLang="de-DE" sz="1600" dirty="0"/>
+              <a:t>?</a:t>
+            </a:r>
+          </a:p>
+          <a:p>
+            <a:pPr lvl="0" eaLnBrk="0" fontAlgn="base" hangingPunct="0">
+              <a:spcBef>
+                <a:spcPct val="0"/>
+              </a:spcBef>
+              <a:spcAft>
+                <a:spcPts val="600"/>
+              </a:spcAft>
+              <a:buFontTx/>
+              <a:buAutoNum type="arabicPeriod" startAt="11"/>
+            </a:pPr>
+            <a:r>
+              <a:rPr lang="de-DE" altLang="de-DE" sz="1600" dirty="0"/>
+              <a:t> </a:t>
+            </a:r>
+            <a:r>
+              <a:rPr lang="de-DE" altLang="de-DE" sz="1600" dirty="0" err="1"/>
+              <a:t>Which</a:t>
+            </a:r>
+            <a:r>
+              <a:rPr lang="de-DE" altLang="de-DE" sz="1600" dirty="0"/>
+              <a:t> soft </a:t>
+            </a:r>
+            <a:r>
+              <a:rPr lang="de-DE" altLang="de-DE" sz="1600" dirty="0" err="1"/>
+              <a:t>skills</a:t>
+            </a:r>
+            <a:r>
+              <a:rPr lang="de-DE" altLang="de-DE" sz="1600" dirty="0"/>
+              <a:t> vs. </a:t>
+            </a:r>
+            <a:r>
+              <a:rPr lang="de-DE" altLang="de-DE" sz="1600" dirty="0" err="1"/>
+              <a:t>hard</a:t>
+            </a:r>
+            <a:r>
+              <a:rPr lang="de-DE" altLang="de-DE" sz="1600" dirty="0"/>
+              <a:t> </a:t>
+            </a:r>
+            <a:r>
+              <a:rPr lang="de-DE" altLang="de-DE" sz="1600" dirty="0" err="1"/>
+              <a:t>skills</a:t>
+            </a:r>
+            <a:r>
+              <a:rPr lang="de-DE" altLang="de-DE" sz="1600" dirty="0"/>
+              <a:t> </a:t>
+            </a:r>
+            <a:r>
+              <a:rPr lang="de-DE" altLang="de-DE" sz="1600" dirty="0" err="1"/>
+              <a:t>are</a:t>
+            </a:r>
+            <a:r>
+              <a:rPr lang="de-DE" altLang="de-DE" sz="1600" dirty="0"/>
+              <a:t> </a:t>
+            </a:r>
+            <a:r>
+              <a:rPr lang="de-DE" altLang="de-DE" sz="1600" dirty="0" err="1"/>
+              <a:t>most</a:t>
+            </a:r>
+            <a:r>
+              <a:rPr lang="de-DE" altLang="de-DE" sz="1600" dirty="0"/>
+              <a:t> </a:t>
+            </a:r>
+            <a:r>
+              <a:rPr lang="de-DE" altLang="de-DE" sz="1600" dirty="0" err="1"/>
+              <a:t>emphasized</a:t>
+            </a:r>
+            <a:r>
+              <a:rPr lang="de-DE" altLang="de-DE" sz="1600" dirty="0"/>
+              <a:t> in </a:t>
+            </a:r>
+            <a:r>
+              <a:rPr lang="de-DE" altLang="de-DE" sz="1600" dirty="0" err="1"/>
+              <a:t>jobs</a:t>
+            </a:r>
+            <a:r>
+              <a:rPr lang="de-DE" altLang="de-DE" sz="1600" dirty="0"/>
+              <a:t>, and </a:t>
+            </a:r>
+            <a:r>
+              <a:rPr lang="de-DE" altLang="de-DE" sz="1600" dirty="0" err="1"/>
+              <a:t>to</a:t>
+            </a:r>
+            <a:r>
+              <a:rPr lang="de-DE" altLang="de-DE" sz="1600" dirty="0"/>
+              <a:t> </a:t>
+            </a:r>
+            <a:r>
+              <a:rPr lang="de-DE" altLang="de-DE" sz="1600" dirty="0" err="1"/>
+              <a:t>what</a:t>
+            </a:r>
+            <a:r>
+              <a:rPr lang="de-DE" altLang="de-DE" sz="1600" dirty="0"/>
+              <a:t> </a:t>
+            </a:r>
+            <a:r>
+              <a:rPr lang="de-DE" altLang="de-DE" sz="1600" dirty="0" err="1"/>
+              <a:t>extent</a:t>
+            </a:r>
+            <a:r>
+              <a:rPr lang="de-DE" altLang="de-DE" sz="1600" dirty="0"/>
+              <a:t> do </a:t>
+            </a:r>
+            <a:r>
+              <a:rPr lang="de-DE" altLang="de-DE" sz="1600" dirty="0" err="1"/>
+              <a:t>training</a:t>
+            </a:r>
+            <a:r>
+              <a:rPr lang="de-DE" altLang="de-DE" sz="1600" dirty="0"/>
+              <a:t> </a:t>
+            </a:r>
+            <a:r>
+              <a:rPr lang="de-DE" altLang="de-DE" sz="1600" dirty="0" err="1"/>
+              <a:t>curricula</a:t>
+            </a:r>
+            <a:r>
+              <a:rPr lang="de-DE" altLang="de-DE" sz="1600" dirty="0"/>
+              <a:t> (</a:t>
+            </a:r>
+            <a:r>
+              <a:rPr lang="de-DE" altLang="de-DE" sz="1600" dirty="0" err="1"/>
+              <a:t>module</a:t>
+            </a:r>
+            <a:r>
+              <a:rPr lang="de-DE" altLang="de-DE" sz="1600" dirty="0"/>
+              <a:t>/TQ </a:t>
+            </a:r>
+            <a:r>
+              <a:rPr lang="de-DE" altLang="de-DE" sz="1600" dirty="0" err="1"/>
+              <a:t>descriptions</a:t>
+            </a:r>
+            <a:r>
+              <a:rPr lang="de-DE" altLang="de-DE" sz="1600" dirty="0"/>
+              <a:t>) </a:t>
+            </a:r>
+            <a:r>
+              <a:rPr lang="de-DE" altLang="de-DE" sz="1600" dirty="0" err="1"/>
+              <a:t>address</a:t>
+            </a:r>
+            <a:r>
+              <a:rPr lang="de-DE" altLang="de-DE" sz="1600" dirty="0"/>
+              <a:t> </a:t>
+            </a:r>
+            <a:r>
+              <a:rPr lang="de-DE" altLang="de-DE" sz="1600" dirty="0" err="1"/>
+              <a:t>these</a:t>
+            </a:r>
+            <a:r>
+              <a:rPr lang="de-DE" altLang="de-DE" sz="1600" dirty="0"/>
+              <a:t> soft-skill </a:t>
+            </a:r>
+            <a:r>
+              <a:rPr lang="de-DE" altLang="de-DE" sz="1600" dirty="0" err="1"/>
+              <a:t>components</a:t>
+            </a:r>
+            <a:r>
+              <a:rPr lang="de-DE" altLang="de-DE" sz="1600" dirty="0"/>
+              <a:t>?</a:t>
+            </a:r>
+          </a:p>
+          <a:p>
+            <a:pPr lvl="0" eaLnBrk="0" fontAlgn="base" hangingPunct="0">
+              <a:spcBef>
+                <a:spcPct val="0"/>
+              </a:spcBef>
+              <a:spcAft>
+                <a:spcPts val="600"/>
+              </a:spcAft>
+              <a:buFontTx/>
+              <a:buAutoNum type="arabicPeriod" startAt="12"/>
+            </a:pPr>
+            <a:r>
+              <a:rPr lang="de-DE" altLang="de-DE" sz="1600" dirty="0"/>
+              <a:t> How do </a:t>
+            </a:r>
+            <a:r>
+              <a:rPr lang="de-DE" altLang="de-DE" sz="1600" dirty="0" err="1"/>
+              <a:t>qualification</a:t>
+            </a:r>
+            <a:r>
+              <a:rPr lang="de-DE" altLang="de-DE" sz="1600" dirty="0"/>
+              <a:t> </a:t>
+            </a:r>
+            <a:r>
+              <a:rPr lang="de-DE" altLang="de-DE" sz="1600" dirty="0" err="1"/>
+              <a:t>profiles</a:t>
+            </a:r>
+            <a:r>
+              <a:rPr lang="de-DE" altLang="de-DE" sz="1600" dirty="0"/>
+              <a:t> </a:t>
+            </a:r>
+            <a:r>
+              <a:rPr lang="de-DE" altLang="de-DE" sz="1600" dirty="0" err="1"/>
+              <a:t>of</a:t>
+            </a:r>
+            <a:r>
+              <a:rPr lang="de-DE" altLang="de-DE" sz="1600" dirty="0"/>
+              <a:t> </a:t>
+            </a:r>
+            <a:r>
+              <a:rPr lang="de-DE" altLang="de-DE" sz="1600" dirty="0" err="1"/>
+              <a:t>candidates</a:t>
+            </a:r>
+            <a:r>
+              <a:rPr lang="de-DE" altLang="de-DE" sz="1600" dirty="0"/>
+              <a:t> </a:t>
+            </a:r>
+            <a:r>
+              <a:rPr lang="de-DE" altLang="de-DE" sz="1600" dirty="0" err="1"/>
+              <a:t>with</a:t>
+            </a:r>
+            <a:r>
+              <a:rPr lang="de-DE" altLang="de-DE" sz="1600" dirty="0"/>
+              <a:t> </a:t>
+            </a:r>
+            <a:r>
+              <a:rPr lang="de-DE" altLang="de-DE" sz="1600" dirty="0" err="1"/>
+              <a:t>completed</a:t>
+            </a:r>
+            <a:r>
+              <a:rPr lang="de-DE" altLang="de-DE" sz="1600" dirty="0"/>
+              <a:t>, relevant </a:t>
+            </a:r>
+            <a:r>
+              <a:rPr lang="de-DE" altLang="de-DE" sz="1600" dirty="0" err="1"/>
+              <a:t>vocational</a:t>
+            </a:r>
+            <a:r>
+              <a:rPr lang="de-DE" altLang="de-DE" sz="1600" dirty="0"/>
+              <a:t> </a:t>
+            </a:r>
+            <a:r>
+              <a:rPr lang="de-DE" altLang="de-DE" sz="1600" dirty="0" err="1"/>
+              <a:t>training</a:t>
+            </a:r>
+            <a:r>
+              <a:rPr lang="de-DE" altLang="de-DE" sz="1600" dirty="0"/>
+              <a:t> </a:t>
+            </a:r>
+            <a:r>
+              <a:rPr lang="de-DE" altLang="de-DE" sz="1600" dirty="0" err="1"/>
+              <a:t>differ</a:t>
+            </a:r>
+            <a:r>
+              <a:rPr lang="de-DE" altLang="de-DE" sz="1600" dirty="0"/>
+              <a:t> </a:t>
+            </a:r>
+            <a:r>
+              <a:rPr lang="de-DE" altLang="de-DE" sz="1600" dirty="0" err="1"/>
+              <a:t>from</a:t>
+            </a:r>
+            <a:r>
+              <a:rPr lang="de-DE" altLang="de-DE" sz="1600" dirty="0"/>
+              <a:t> </a:t>
+            </a:r>
+            <a:r>
+              <a:rPr lang="de-DE" altLang="de-DE" sz="1600" dirty="0" err="1"/>
+              <a:t>those</a:t>
+            </a:r>
+            <a:r>
+              <a:rPr lang="de-DE" altLang="de-DE" sz="1600" dirty="0"/>
+              <a:t> </a:t>
+            </a:r>
+            <a:r>
+              <a:rPr lang="de-DE" altLang="de-DE" sz="1600" dirty="0" err="1"/>
+              <a:t>of</a:t>
+            </a:r>
+            <a:r>
+              <a:rPr lang="de-DE" altLang="de-DE" sz="1600" dirty="0"/>
+              <a:t> </a:t>
+            </a:r>
+            <a:r>
+              <a:rPr lang="de-DE" altLang="de-DE" sz="1600" dirty="0" err="1"/>
+              <a:t>career</a:t>
+            </a:r>
+            <a:r>
+              <a:rPr lang="de-DE" altLang="de-DE" sz="1600" dirty="0"/>
+              <a:t> </a:t>
+            </a:r>
+            <a:r>
+              <a:rPr lang="de-DE" altLang="de-DE" sz="1600" dirty="0" err="1"/>
+              <a:t>changers</a:t>
+            </a:r>
+            <a:r>
+              <a:rPr lang="de-DE" altLang="de-DE" sz="1600" dirty="0"/>
+              <a:t> </a:t>
+            </a:r>
+            <a:r>
+              <a:rPr lang="de-DE" altLang="de-DE" sz="1600" dirty="0" err="1"/>
+              <a:t>within</a:t>
+            </a:r>
+            <a:r>
+              <a:rPr lang="de-DE" altLang="de-DE" sz="1600" dirty="0"/>
+              <a:t> </a:t>
+            </a:r>
+            <a:r>
+              <a:rPr lang="de-DE" altLang="de-DE" sz="1600" dirty="0" err="1"/>
+              <a:t>the</a:t>
+            </a:r>
+            <a:r>
+              <a:rPr lang="de-DE" altLang="de-DE" sz="1600" dirty="0"/>
+              <a:t> same </a:t>
+            </a:r>
+            <a:r>
+              <a:rPr lang="de-DE" altLang="de-DE" sz="1600" dirty="0" err="1"/>
+              <a:t>job</a:t>
+            </a:r>
+            <a:r>
+              <a:rPr lang="de-DE" altLang="de-DE" sz="1600" dirty="0"/>
+              <a:t> </a:t>
+            </a:r>
+            <a:r>
+              <a:rPr lang="de-DE" altLang="de-DE" sz="1600" dirty="0" err="1"/>
+              <a:t>family</a:t>
+            </a:r>
+            <a:r>
+              <a:rPr lang="de-DE" altLang="de-DE" sz="1600" dirty="0"/>
+              <a:t>?</a:t>
+            </a:r>
+          </a:p>
+          <a:p>
+            <a:pPr marL="0" indent="0">
+              <a:buNone/>
+            </a:pPr>
+            <a:endParaRPr lang="en-DE" sz="1600" dirty="0"/>
+          </a:p>
+        </p:txBody>
+      </p:sp>
+      <p:sp>
+        <p:nvSpPr>
+          <p:cNvPr id="5" name="Slide Number Placeholder 4">
+            <a:extLst>
+              <a:ext uri="{FF2B5EF4-FFF2-40B4-BE49-F238E27FC236}">
+                <a16:creationId xmlns:a16="http://schemas.microsoft.com/office/drawing/2014/main" id="{5E52A175-6B45-4B38-7869-32BD7C7D0341}"/>
+              </a:ext>
+            </a:extLst>
+          </p:cNvPr>
+          <p:cNvSpPr>
+            <a:spLocks noGrp="1"/>
+          </p:cNvSpPr>
+          <p:nvPr>
+            <p:ph type="sldNum" sz="quarter" idx="4"/>
+          </p:nvPr>
+        </p:nvSpPr>
+        <p:spPr>
+          <a:xfrm>
+            <a:off x="914400" y="6246254"/>
+            <a:ext cx="631065" cy="296214"/>
+          </a:xfrm>
+        </p:spPr>
+        <p:txBody>
+          <a:bodyPr anchor="ctr">
+            <a:normAutofit/>
+          </a:bodyPr>
+          <a:lstStyle/>
+          <a:p>
+            <a:pPr>
+              <a:spcAft>
+                <a:spcPts val="600"/>
+              </a:spcAft>
+            </a:pPr>
+            <a:fld id="{B5CEABB6-07DC-46E8-9B57-56EC44A396E5}" type="slidenum">
+              <a:rPr lang="en-US" smtClean="0"/>
+              <a:pPr>
+                <a:spcAft>
+                  <a:spcPts val="600"/>
+                </a:spcAft>
+              </a:pPr>
+              <a:t>14</a:t>
+            </a:fld>
+            <a:endParaRPr lang="en-US"/>
+          </a:p>
+        </p:txBody>
+      </p:sp>
+    </p:spTree>
+    <p:extLst>
+      <p:ext uri="{BB962C8B-B14F-4D97-AF65-F5344CB8AC3E}">
+        <p14:creationId xmlns:p14="http://schemas.microsoft.com/office/powerpoint/2010/main" val="1047542183"/>
+      </p:ext>
+    </p:extLst>
+  </p:cSld>
+  <p:clrMapOvr>
+    <a:masterClrMapping/>
+  </p:clrMapOvr>
+</p:sld>
+</file>
+
+<file path=ppt/slides/slide15.xml><?xml version="1.0" encoding="utf-8"?>
+<p:sld xmlns:a="http://schemas.openxmlformats.org/drawingml/2006/main" xmlns:r="http://schemas.openxmlformats.org/officeDocument/2006/relationships" xmlns:p="http://schemas.openxmlformats.org/presentationml/2006/main">
+  <p:cSld>
+    <p:spTree>
+      <p:nvGrpSpPr>
+        <p:cNvPr id="1" name="">
+          <a:extLst>
+            <a:ext uri="{FF2B5EF4-FFF2-40B4-BE49-F238E27FC236}">
+              <a16:creationId xmlns:a16="http://schemas.microsoft.com/office/drawing/2014/main" id="{4D6FEDC3-A0DF-5984-79AF-C7CF9F9A989D}"/>
+            </a:ext>
+          </a:extLst>
+        </p:cNvPr>
+        <p:cNvGrpSpPr/>
+        <p:nvPr/>
+      </p:nvGrpSpPr>
+      <p:grpSpPr>
+        <a:xfrm>
+          <a:off x="0" y="0"/>
+          <a:ext cx="0" cy="0"/>
+          <a:chOff x="0" y="0"/>
+          <a:chExt cx="0" cy="0"/>
+        </a:xfrm>
+      </p:grpSpPr>
+      <p:sp>
+        <p:nvSpPr>
+          <p:cNvPr id="2" name="Title 1">
+            <a:extLst>
+              <a:ext uri="{FF2B5EF4-FFF2-40B4-BE49-F238E27FC236}">
+                <a16:creationId xmlns:a16="http://schemas.microsoft.com/office/drawing/2014/main" id="{C1874A69-8943-FC37-79F6-454AEA700C6E}"/>
+              </a:ext>
+            </a:extLst>
+          </p:cNvPr>
+          <p:cNvSpPr>
+            <a:spLocks noGrp="1"/>
+          </p:cNvSpPr>
+          <p:nvPr>
+            <p:ph type="title"/>
+          </p:nvPr>
+        </p:nvSpPr>
+        <p:spPr/>
+        <p:txBody>
+          <a:bodyPr/>
+          <a:lstStyle/>
+          <a:p>
+            <a:r>
+              <a:rPr lang="en-US" dirty="0"/>
+              <a:t>Job Market </a:t>
+            </a:r>
+            <a:r>
+              <a:rPr lang="en-US" sz="3200" dirty="0"/>
+              <a:t>- API</a:t>
+            </a:r>
+            <a:r>
+              <a:rPr lang="en-US" sz="2400" b="1" dirty="0"/>
+              <a:t>S</a:t>
+            </a:r>
+            <a:r>
+              <a:rPr lang="en-US" sz="3200" dirty="0"/>
+              <a:t> </a:t>
+            </a:r>
+          </a:p>
+        </p:txBody>
+      </p:sp>
+      <p:sp>
+        <p:nvSpPr>
+          <p:cNvPr id="4" name="Slide Number Placeholder 3">
+            <a:extLst>
+              <a:ext uri="{FF2B5EF4-FFF2-40B4-BE49-F238E27FC236}">
+                <a16:creationId xmlns:a16="http://schemas.microsoft.com/office/drawing/2014/main" id="{2E5824AF-D113-4FE5-6FE9-1297CC689322}"/>
+              </a:ext>
+            </a:extLst>
+          </p:cNvPr>
+          <p:cNvSpPr>
+            <a:spLocks noGrp="1"/>
+          </p:cNvSpPr>
+          <p:nvPr>
+            <p:ph type="sldNum" sz="quarter" idx="4"/>
+          </p:nvPr>
+        </p:nvSpPr>
+        <p:spPr/>
+        <p:txBody>
+          <a:bodyPr/>
+          <a:lstStyle/>
+          <a:p>
+            <a:fld id="{B5CEABB6-07DC-46E8-9B57-56EC44A396E5}" type="slidenum">
+              <a:rPr lang="en-US" smtClean="0"/>
+              <a:pPr/>
+              <a:t>15</a:t>
+            </a:fld>
+            <a:endParaRPr lang="en-US" dirty="0"/>
+          </a:p>
+        </p:txBody>
+      </p:sp>
+      <p:sp>
+        <p:nvSpPr>
+          <p:cNvPr id="6" name="Content Placeholder 5">
+            <a:extLst>
+              <a:ext uri="{FF2B5EF4-FFF2-40B4-BE49-F238E27FC236}">
+                <a16:creationId xmlns:a16="http://schemas.microsoft.com/office/drawing/2014/main" id="{B745F884-FFAF-28B3-CD5E-F5668980E575}"/>
+              </a:ext>
+            </a:extLst>
+          </p:cNvPr>
+          <p:cNvSpPr>
+            <a:spLocks noGrp="1"/>
+          </p:cNvSpPr>
+          <p:nvPr>
+            <p:ph sz="quarter" idx="10"/>
+          </p:nvPr>
+        </p:nvSpPr>
+        <p:spPr/>
+        <p:txBody>
+          <a:bodyPr>
+            <a:noAutofit/>
+          </a:bodyPr>
+          <a:lstStyle/>
+          <a:p>
+            <a:r>
+              <a:rPr lang="en-US" sz="1800" b="1" dirty="0"/>
+              <a:t>Available APIs (from https://bund.dev/apis)</a:t>
+            </a:r>
+          </a:p>
+          <a:p>
+            <a:r>
+              <a:rPr lang="en-US" sz="1800" dirty="0"/>
+              <a:t>Training search (</a:t>
+            </a:r>
+            <a:r>
+              <a:rPr lang="en-US" sz="1800" dirty="0" err="1"/>
+              <a:t>Ausbildungssuche</a:t>
+            </a:r>
+            <a:r>
+              <a:rPr lang="en-US" sz="1800" dirty="0"/>
+              <a:t>) API</a:t>
+            </a:r>
+          </a:p>
+          <a:p>
+            <a:r>
+              <a:rPr lang="en-US" sz="1800" dirty="0"/>
+              <a:t>Candidate search (</a:t>
+            </a:r>
+            <a:r>
+              <a:rPr lang="en-US" sz="1800" dirty="0" err="1"/>
+              <a:t>Bewerberbörse</a:t>
+            </a:r>
+            <a:r>
+              <a:rPr lang="en-US" sz="1800" dirty="0"/>
+              <a:t>) API</a:t>
+            </a:r>
+          </a:p>
+          <a:p>
+            <a:r>
+              <a:rPr lang="en-US" sz="1800" dirty="0"/>
+              <a:t>Job postings (</a:t>
+            </a:r>
+            <a:r>
+              <a:rPr lang="en-US" sz="1800" dirty="0" err="1"/>
+              <a:t>Jobsuche</a:t>
+            </a:r>
+            <a:r>
+              <a:rPr lang="en-US" sz="1800" dirty="0"/>
+              <a:t>) API</a:t>
+            </a:r>
+          </a:p>
+          <a:p>
+            <a:r>
+              <a:rPr lang="en-US" sz="1800" dirty="0"/>
+              <a:t>Remuneration Atlas (</a:t>
+            </a:r>
+            <a:r>
+              <a:rPr lang="en-US" sz="1800" dirty="0" err="1"/>
+              <a:t>Entgeltatlas</a:t>
+            </a:r>
+            <a:r>
+              <a:rPr lang="en-US" sz="1800" dirty="0"/>
+              <a:t>) API</a:t>
+            </a:r>
+          </a:p>
+        </p:txBody>
+      </p:sp>
+    </p:spTree>
+    <p:extLst>
+      <p:ext uri="{BB962C8B-B14F-4D97-AF65-F5344CB8AC3E}">
+        <p14:creationId xmlns:p14="http://schemas.microsoft.com/office/powerpoint/2010/main" val="1601689439"/>
+      </p:ext>
+    </p:extLst>
+  </p:cSld>
+  <p:clrMapOvr>
+    <a:masterClrMapping/>
+  </p:clrMapOvr>
+</p:sld>
+</file>
+
+<file path=ppt/slides/slide16.xml><?xml version="1.0" encoding="utf-8"?>
+<p:sld xmlns:a="http://schemas.openxmlformats.org/drawingml/2006/main" xmlns:r="http://schemas.openxmlformats.org/officeDocument/2006/relationships" xmlns:p="http://schemas.openxmlformats.org/presentationml/2006/main">
+  <p:cSld>
+    <p:spTree>
+      <p:nvGrpSpPr>
+        <p:cNvPr id="1" name="">
+          <a:extLst>
+            <a:ext uri="{FF2B5EF4-FFF2-40B4-BE49-F238E27FC236}">
+              <a16:creationId xmlns:a16="http://schemas.microsoft.com/office/drawing/2014/main" id="{3BC5D842-8BA3-80FF-DFD6-A88604A9EBC5}"/>
+            </a:ext>
+          </a:extLst>
+        </p:cNvPr>
+        <p:cNvGrpSpPr/>
+        <p:nvPr/>
+      </p:nvGrpSpPr>
+      <p:grpSpPr>
+        <a:xfrm>
+          <a:off x="0" y="0"/>
+          <a:ext cx="0" cy="0"/>
+          <a:chOff x="0" y="0"/>
+          <a:chExt cx="0" cy="0"/>
+        </a:xfrm>
+      </p:grpSpPr>
+      <p:sp>
+        <p:nvSpPr>
+          <p:cNvPr id="2" name="Title 1">
+            <a:extLst>
+              <a:ext uri="{FF2B5EF4-FFF2-40B4-BE49-F238E27FC236}">
+                <a16:creationId xmlns:a16="http://schemas.microsoft.com/office/drawing/2014/main" id="{E72B1503-C314-99F5-332E-7BB046517893}"/>
+              </a:ext>
+            </a:extLst>
+          </p:cNvPr>
+          <p:cNvSpPr>
+            <a:spLocks noGrp="1"/>
+          </p:cNvSpPr>
+          <p:nvPr>
+            <p:ph type="title"/>
+          </p:nvPr>
+        </p:nvSpPr>
+        <p:spPr>
+          <a:xfrm>
+            <a:off x="914399" y="365125"/>
+            <a:ext cx="7273637" cy="1646555"/>
+          </a:xfrm>
+        </p:spPr>
+        <p:txBody>
+          <a:bodyPr anchor="ctr">
+            <a:normAutofit/>
+          </a:bodyPr>
+          <a:lstStyle/>
+          <a:p>
+            <a:r>
+              <a:rPr lang="en-US" dirty="0"/>
+              <a:t>Job Market - Measurement criteria </a:t>
+            </a:r>
+          </a:p>
+        </p:txBody>
+      </p:sp>
+      <p:sp>
+        <p:nvSpPr>
+          <p:cNvPr id="9" name="Content Placeholder 8">
+            <a:extLst>
+              <a:ext uri="{FF2B5EF4-FFF2-40B4-BE49-F238E27FC236}">
+                <a16:creationId xmlns:a16="http://schemas.microsoft.com/office/drawing/2014/main" id="{D1156CB0-40F7-81F4-5C6F-239A082C17D3}"/>
+              </a:ext>
+            </a:extLst>
+          </p:cNvPr>
+          <p:cNvSpPr>
+            <a:spLocks noGrp="1"/>
+          </p:cNvSpPr>
+          <p:nvPr>
+            <p:ph sz="quarter" idx="10"/>
+          </p:nvPr>
+        </p:nvSpPr>
+        <p:spPr>
+          <a:xfrm>
+            <a:off x="914399" y="2011363"/>
+            <a:ext cx="7273638" cy="4155757"/>
+          </a:xfrm>
+        </p:spPr>
+        <p:txBody>
+          <a:bodyPr>
+            <a:normAutofit/>
+          </a:bodyPr>
+          <a:lstStyle/>
+          <a:p>
+            <a:pPr lvl="0"/>
+            <a:r>
+              <a:rPr lang="en-US" sz="1600" dirty="0"/>
+              <a:t>Data on jobs </a:t>
+            </a:r>
+          </a:p>
+          <a:p>
+            <a:pPr lvl="0"/>
+            <a:r>
+              <a:rPr lang="en-US" sz="1600" dirty="0"/>
+              <a:t>Candidates </a:t>
+            </a:r>
+          </a:p>
+          <a:p>
+            <a:pPr lvl="0"/>
+            <a:r>
+              <a:rPr lang="en-US" sz="1600" dirty="0"/>
+              <a:t>Pay </a:t>
+            </a:r>
+          </a:p>
+          <a:p>
+            <a:pPr lvl="0"/>
+            <a:r>
+              <a:rPr lang="de-DE" sz="1600" dirty="0"/>
+              <a:t>Release </a:t>
+            </a:r>
+            <a:r>
+              <a:rPr lang="de-DE" sz="1600" dirty="0" err="1"/>
+              <a:t>timing</a:t>
+            </a:r>
+            <a:endParaRPr lang="en-DE" sz="1600" dirty="0"/>
+          </a:p>
+        </p:txBody>
+      </p:sp>
+      <p:sp>
+        <p:nvSpPr>
+          <p:cNvPr id="5" name="Slide Number Placeholder 4">
+            <a:extLst>
+              <a:ext uri="{FF2B5EF4-FFF2-40B4-BE49-F238E27FC236}">
+                <a16:creationId xmlns:a16="http://schemas.microsoft.com/office/drawing/2014/main" id="{6068540C-6294-2309-DD85-3A930AA589CA}"/>
+              </a:ext>
+            </a:extLst>
+          </p:cNvPr>
+          <p:cNvSpPr>
+            <a:spLocks noGrp="1"/>
+          </p:cNvSpPr>
+          <p:nvPr>
+            <p:ph type="sldNum" sz="quarter" idx="4"/>
+          </p:nvPr>
+        </p:nvSpPr>
+        <p:spPr>
+          <a:xfrm>
+            <a:off x="914400" y="6246254"/>
+            <a:ext cx="631065" cy="296214"/>
+          </a:xfrm>
+        </p:spPr>
+        <p:txBody>
+          <a:bodyPr anchor="ctr">
+            <a:normAutofit/>
+          </a:bodyPr>
+          <a:lstStyle/>
+          <a:p>
+            <a:pPr>
+              <a:spcAft>
+                <a:spcPts val="600"/>
+              </a:spcAft>
+            </a:pPr>
+            <a:fld id="{B5CEABB6-07DC-46E8-9B57-56EC44A396E5}" type="slidenum">
+              <a:rPr lang="en-US" smtClean="0"/>
+              <a:pPr>
+                <a:spcAft>
+                  <a:spcPts val="600"/>
+                </a:spcAft>
+              </a:pPr>
+              <a:t>16</a:t>
+            </a:fld>
+            <a:endParaRPr lang="en-US"/>
+          </a:p>
+        </p:txBody>
+      </p:sp>
+      <p:pic>
+        <p:nvPicPr>
+          <p:cNvPr id="3" name="Grafik 2">
+            <a:extLst>
+              <a:ext uri="{FF2B5EF4-FFF2-40B4-BE49-F238E27FC236}">
+                <a16:creationId xmlns:a16="http://schemas.microsoft.com/office/drawing/2014/main" id="{B6BEEA36-10CF-6B59-4F24-2968DE863115}"/>
+              </a:ext>
+            </a:extLst>
+          </p:cNvPr>
+          <p:cNvPicPr>
+            <a:picLocks noChangeAspect="1"/>
+          </p:cNvPicPr>
+          <p:nvPr/>
+        </p:nvPicPr>
+        <p:blipFill>
+          <a:blip r:embed="rId3"/>
+          <a:stretch>
+            <a:fillRect/>
+          </a:stretch>
+        </p:blipFill>
+        <p:spPr>
+          <a:xfrm>
+            <a:off x="5376165" y="2144918"/>
+            <a:ext cx="4000847" cy="2568163"/>
+          </a:xfrm>
+          <a:prstGeom prst="rect">
+            <a:avLst/>
+          </a:prstGeom>
+        </p:spPr>
+      </p:pic>
+    </p:spTree>
+    <p:extLst>
+      <p:ext uri="{BB962C8B-B14F-4D97-AF65-F5344CB8AC3E}">
+        <p14:creationId xmlns:p14="http://schemas.microsoft.com/office/powerpoint/2010/main" val="3147575101"/>
+      </p:ext>
+    </p:extLst>
+  </p:cSld>
+  <p:clrMapOvr>
+    <a:masterClrMapping/>
+  </p:clrMapOvr>
+</p:sld>
+</file>
+
+<file path=ppt/slides/slide17.xml><?xml version="1.0" encoding="utf-8"?>
 <p:sld xmlns:a="http://schemas.openxmlformats.org/drawingml/2006/main" xmlns:r="http://schemas.openxmlformats.org/officeDocument/2006/relationships" xmlns:p="http://schemas.openxmlformats.org/presentationml/2006/main">
   <p:cSld>
     <p:bg>
@@ -7951,146 +10732,68 @@
         </p:spPr>
         <p:txBody>
           <a:bodyPr>
-            <a:normAutofit fontScale="55000" lnSpcReduction="20000"/>
+            <a:noAutofit/>
           </a:bodyPr>
           <a:lstStyle/>
           <a:p>
             <a:pPr marL="0" indent="0">
+              <a:lnSpc>
+                <a:spcPct val="100000"/>
+              </a:lnSpc>
               <a:buNone/>
             </a:pPr>
             <a:r>
-              <a:rPr lang="en-GB" b="1" u="sng" dirty="0">
-                <a:highlight>
-                  <a:srgbClr val="FFFF00"/>
-                </a:highlight>
-              </a:rPr>
-              <a:t>1. Long-term Development of Air Pollution</a:t>
+              <a:rPr lang="en-GB" sz="1600" b="1" dirty="0"/>
+              <a:t>1. How have the annual mean concentrations of PM10, PM2, and NO₂ in Germany developed over the period 2000–2025? </a:t>
             </a:r>
           </a:p>
           <a:p>
             <a:pPr marL="0" indent="0">
+              <a:lnSpc>
+                <a:spcPct val="100000"/>
+              </a:lnSpc>
               <a:buNone/>
             </a:pPr>
             <a:r>
-              <a:rPr lang="en-GB" dirty="0"/>
-              <a:t>How have the annual mean concentrations of PM10, PM2, and NO₂ in Germany developed over the period 2000–2025? (This could also be broken down to a monthly level.)</a:t>
+              <a:rPr lang="en-GB" sz="1600" b="1" dirty="0"/>
+              <a:t>2. Were there significant changes in NO₂ and PM10 concentrations during the COVID-19-related mobility restrictions compared to the same periods in previous years?</a:t>
             </a:r>
           </a:p>
           <a:p>
             <a:pPr marL="0" indent="0">
+              <a:lnSpc>
+                <a:spcPct val="100000"/>
+              </a:lnSpc>
               <a:buNone/>
             </a:pPr>
             <a:r>
-              <a:rPr lang="en-GB" b="1" u="sng" dirty="0">
-                <a:highlight>
-                  <a:srgbClr val="FFFF00"/>
-                </a:highlight>
-              </a:rPr>
-              <a:t>1.1 Impact of the COVID-19 Pandemic</a:t>
+              <a:rPr lang="en-GB" sz="1600" b="1" dirty="0"/>
+              <a:t>3. Do the daily mean values of PM10 and PM2 on New Years differ significantly between the years 2000–2025?</a:t>
             </a:r>
           </a:p>
           <a:p>
             <a:pPr marL="0" indent="0">
+              <a:lnSpc>
+                <a:spcPct val="100000"/>
+              </a:lnSpc>
               <a:buNone/>
             </a:pPr>
             <a:r>
-              <a:rPr lang="en-GB" dirty="0"/>
-              <a:t>Were there significant changes in NO₂ and PM10 concentrations during the COVID-19-related mobility restrictions (March–May 2020) compared to the same periods in previous years (2017–2019)?</a:t>
-            </a:r>
-            <a:br>
-              <a:rPr lang="en-GB" dirty="0"/>
-            </a:br>
-            <a:r>
-              <a:rPr lang="en-GB" dirty="0"/>
-              <a:t>(Possibly also include two years before and after for comparison.)</a:t>
+              <a:rPr lang="en-GB" sz="1600" dirty="0"/>
+              <a:t>4. Are there significant differences in the annual mean PM2 concentrations between the German federal states over the past 25 years?</a:t>
             </a:r>
           </a:p>
           <a:p>
             <a:pPr marL="0" indent="0">
+              <a:lnSpc>
+                <a:spcPct val="100000"/>
+              </a:lnSpc>
               <a:buNone/>
             </a:pPr>
             <a:r>
-              <a:rPr lang="en-GB" b="1" u="sng" dirty="0">
-                <a:highlight>
-                  <a:srgbClr val="FFFF00"/>
-                </a:highlight>
-              </a:rPr>
-              <a:t>1.2 New Year’s Effect (Fireworks)</a:t>
-            </a:r>
-          </a:p>
-          <a:p>
-            <a:pPr marL="0" indent="0">
-              <a:buNone/>
-            </a:pPr>
-            <a:r>
-              <a:rPr lang="en-GB" dirty="0"/>
-              <a:t>Do the daily mean values of PM10 and PM2 on January 1 differ significantly between the years 2000–2025?</a:t>
-            </a:r>
-            <a:br>
-              <a:rPr lang="en-GB" dirty="0"/>
-            </a:br>
-            <a:endParaRPr lang="en-GB" u="sng" dirty="0"/>
-          </a:p>
-          <a:p>
-            <a:pPr marL="0" indent="0">
-              <a:buNone/>
-            </a:pPr>
-            <a:r>
-              <a:rPr lang="en-GB" b="1" u="sng" dirty="0"/>
-              <a:t>2. Proximity to Major Roads</a:t>
-            </a:r>
-          </a:p>
-          <a:p>
-            <a:pPr marL="0" indent="0">
-              <a:buNone/>
-            </a:pPr>
-            <a:r>
-              <a:rPr lang="en-GB" dirty="0"/>
-              <a:t>Do the mean NO₂ concentrations differ significantly between traffic monitoring stations and background stations in urban areas?</a:t>
-            </a:r>
-            <a:br>
-              <a:rPr lang="en-GB" dirty="0"/>
-            </a:br>
-            <a:endParaRPr lang="en-GB" u="sng" dirty="0"/>
-          </a:p>
-          <a:p>
-            <a:pPr marL="0" indent="0">
-              <a:buNone/>
-            </a:pPr>
-            <a:r>
-              <a:rPr lang="en-GB" b="1" u="sng" dirty="0"/>
-              <a:t>3. Federal State Comparison</a:t>
-            </a:r>
-          </a:p>
-          <a:p>
-            <a:pPr marL="0" indent="0">
-              <a:buNone/>
-            </a:pPr>
-            <a:r>
-              <a:rPr lang="en-GB" dirty="0"/>
-              <a:t>Are there significant differences in the annual mean PM2 concentrations between the German federal states over the period 2000–2025?</a:t>
-            </a:r>
-          </a:p>
-          <a:p>
-            <a:pPr marL="0" indent="0">
-              <a:buNone/>
-            </a:pPr>
-            <a:r>
-              <a:rPr lang="en-GB" b="1" u="sng" dirty="0"/>
-              <a:t>3.1 Urban vs. Rural</a:t>
-            </a:r>
-          </a:p>
-          <a:p>
-            <a:pPr marL="0" indent="0">
-              <a:buNone/>
-            </a:pPr>
-            <a:r>
-              <a:rPr lang="en-GB" dirty="0"/>
-              <a:t>Do PM10 concentrations differ significantly between urban, suburban, and rural monitoring stations?</a:t>
-            </a:r>
-          </a:p>
-          <a:p>
-            <a:endParaRPr lang="en-DE" dirty="0"/>
+              <a:rPr lang="en-GB" sz="1600" dirty="0"/>
+              <a:t>5. Do PM10 concentrations differ significantly between urban, suburban, and rural monitoring stations?</a:t>
+            </a:r>
           </a:p>
         </p:txBody>
       </p:sp>
@@ -8215,7 +10918,7 @@
         <p:spPr/>
         <p:txBody>
           <a:bodyPr>
-            <a:normAutofit fontScale="55000" lnSpcReduction="20000"/>
+            <a:noAutofit/>
           </a:bodyPr>
           <a:lstStyle/>
           <a:p>
@@ -8223,12 +10926,8 @@
               <a:buNone/>
             </a:pPr>
             <a:r>
-              <a:rPr lang="en-GB" b="1" u="sng" dirty="0">
-                <a:highlight>
-                  <a:srgbClr val="FFFF00"/>
-                </a:highlight>
-              </a:rPr>
-              <a:t>4. Germany vs. Other Countries</a:t>
+              <a:rPr lang="en-GB" sz="1600" dirty="0"/>
+              <a:t>6. How do the annual mean PM2 concentrations in Germany compare to those in comparable EU countries over the period 2000–2025?</a:t>
             </a:r>
           </a:p>
           <a:p>
@@ -8236,25 +10935,18 @@
               <a:buNone/>
             </a:pPr>
             <a:r>
-              <a:rPr lang="en-GB" dirty="0"/>
-              <a:t>How do the annual mean PM2 concentrations in Germany compare to those in comparable EU countries over the </a:t>
-            </a:r>
-            <a:r>
-              <a:rPr lang="en-GB"/>
-              <a:t>period 2000–2025?</a:t>
-            </a:r>
-            <a:br>
-              <a:rPr lang="en-GB" dirty="0"/>
-            </a:br>
-            <a:endParaRPr lang="en-GB" dirty="0"/>
+              <a:rPr lang="en-GB" sz="1600" dirty="0"/>
+              <a:t>7. How strongly do PM10 concentrations vary between the seasons?</a:t>
+            </a:r>
+            <a:endParaRPr lang="en-GB" sz="1600" b="1" dirty="0"/>
           </a:p>
           <a:p>
             <a:pPr marL="0" indent="0">
               <a:buNone/>
             </a:pPr>
             <a:r>
-              <a:rPr lang="en-GB" b="1" u="sng" dirty="0"/>
-              <a:t>5. Seasonal Effects</a:t>
+              <a:rPr lang="en-GB" sz="1600" b="1" dirty="0"/>
+              <a:t>8. Is there a significant positive correlation between O₃ concentrations and daily maximum temperatures in the German federal states?</a:t>
             </a:r>
           </a:p>
           <a:p>
@@ -8262,92 +10954,8 @@
               <a:buNone/>
             </a:pPr>
             <a:r>
-              <a:rPr lang="en-GB" dirty="0"/>
-              <a:t>How strongly do PM10 concentrations vary between winter and summer months (and is this effect more pronounced in urban areas)?</a:t>
-            </a:r>
-          </a:p>
-          <a:p>
-            <a:pPr marL="0" indent="0">
-              <a:buNone/>
-            </a:pPr>
-            <a:r>
-              <a:rPr lang="en-GB" b="1" u="sng" dirty="0">
-                <a:highlight>
-                  <a:srgbClr val="FFFF00"/>
-                </a:highlight>
-              </a:rPr>
-              <a:t>6. Ozone and Temperature</a:t>
-            </a:r>
-          </a:p>
-          <a:p>
-            <a:pPr marL="0" indent="0">
-              <a:buNone/>
-            </a:pPr>
-            <a:r>
-              <a:rPr lang="en-GB" dirty="0"/>
-              <a:t>Is there a significant positive correlation between O₃ concentrations and daily maximum temperatures in the German federal states?</a:t>
-            </a:r>
-            <a:br>
-              <a:rPr lang="en-GB" dirty="0"/>
-            </a:br>
-            <a:endParaRPr lang="en-GB" dirty="0"/>
-          </a:p>
-          <a:p>
-            <a:pPr marL="0" indent="0">
-              <a:buNone/>
-            </a:pPr>
-            <a:r>
-              <a:rPr lang="en-GB" b="1" u="sng" dirty="0"/>
-              <a:t>7. Long-term Improvement/Deterioration</a:t>
-            </a:r>
-          </a:p>
-          <a:p>
-            <a:pPr marL="0" indent="0">
-              <a:buNone/>
-            </a:pPr>
-            <a:r>
-              <a:rPr lang="en-GB" dirty="0"/>
-              <a:t>Which air pollutants show the strongest significant trends (positive or negative) over the period 2000–2025?</a:t>
-            </a:r>
-            <a:br>
-              <a:rPr lang="en-GB" dirty="0"/>
-            </a:br>
-            <a:endParaRPr lang="en-GB" dirty="0"/>
-          </a:p>
-          <a:p>
-            <a:pPr marL="0" indent="0">
-              <a:buNone/>
-            </a:pPr>
-            <a:r>
-              <a:rPr lang="en-GB" b="1" u="sng" dirty="0"/>
-              <a:t>8. Regional Clusters</a:t>
-            </a:r>
-          </a:p>
-          <a:p>
-            <a:pPr marL="0" indent="0">
-              <a:buNone/>
-            </a:pPr>
-            <a:r>
-              <a:rPr lang="en-GB" dirty="0"/>
-              <a:t>Can spatial clusters of high NO₂ or PM10 pollution be identified, and do these correlate with industrial or traffic locations?</a:t>
-            </a:r>
-          </a:p>
-          <a:p>
-            <a:pPr marL="0" indent="0">
-              <a:buNone/>
-            </a:pPr>
-            <a:r>
-              <a:rPr lang="en-GB" b="1" u="sng" dirty="0"/>
-              <a:t>9. Tourism &amp; Air Pollution</a:t>
-            </a:r>
-          </a:p>
-          <a:p>
-            <a:pPr marL="0" indent="0">
-              <a:buNone/>
-            </a:pPr>
-            <a:r>
-              <a:rPr lang="en-GB" dirty="0"/>
-              <a:t>Is there a relationship between seasonal tourism intensity and short-term changes in NO₂ or PM10 concentrations in tourist regions?</a:t>
+              <a:rPr lang="en-GB" sz="1600" dirty="0"/>
+              <a:t>9. Is there a relationship between seasonal tourism intensity and short-term changes in NO₂ or PM10 concentrations in tourist regions?</a:t>
             </a:r>
           </a:p>
         </p:txBody>
@@ -8420,7 +11028,7 @@
             </a:r>
             <a:r>
               <a:rPr lang="en-US" sz="3200" dirty="0"/>
-              <a:t> – Measurement criteria </a:t>
+              <a:t> – Measurement criteria</a:t>
             </a:r>
           </a:p>
         </p:txBody>
@@ -8474,108 +11082,60 @@
         <p:spPr/>
         <p:txBody>
           <a:bodyPr>
-            <a:normAutofit fontScale="77500" lnSpcReduction="20000"/>
+            <a:normAutofit lnSpcReduction="10000"/>
           </a:bodyPr>
           <a:lstStyle/>
           <a:p>
-            <a:pPr marL="0" indent="0">
-              <a:buNone/>
-            </a:pPr>
-            <a:r>
-              <a:rPr lang="de-DE" dirty="0"/>
-              <a:t>1) - gemessene Arten der Luftverschmutzung: Feinstaub - Partikel &lt;= 10 </a:t>
-            </a:r>
-            <a:r>
-              <a:rPr lang="de-DE" b="1" dirty="0"/>
-              <a:t>µm </a:t>
-            </a:r>
-            <a:r>
-              <a:rPr lang="de-DE" dirty="0"/>
-              <a:t>(PM10), Kohlenmonoxid (CO), Ozon (O3), Schwefeldioxid (SO2), Stickstoffdioxid (NO2), Blei im Feinstaub (PM10PB), Benzo(a)pyren im Feinstaub (PM10BAP), Benzol (CHB), Feinstaub - Partikel &lt;= 2 </a:t>
-            </a:r>
-            <a:r>
-              <a:rPr lang="de-DE" b="1" dirty="0"/>
-              <a:t>µm </a:t>
-            </a:r>
-            <a:r>
-              <a:rPr lang="de-DE" dirty="0"/>
-              <a:t>(PM2), Arsen im Feinstaub (PM10AS), Cadmium im Feinstaub (PM10CD), Nickel im Feinstaub (PM10NI)</a:t>
-            </a:r>
-            <a:endParaRPr lang="en-DE" dirty="0"/>
-          </a:p>
-          <a:p>
-            <a:pPr marL="0" indent="0">
-              <a:buNone/>
-            </a:pPr>
-            <a:r>
-              <a:rPr lang="de-DE" dirty="0"/>
-              <a:t>2) - Bereiche in denen gemessen wird: alles Bundesländer + UBA</a:t>
-            </a:r>
-            <a:endParaRPr lang="en-DE" dirty="0"/>
-          </a:p>
-          <a:p>
-            <a:pPr marL="0" indent="0">
-              <a:buNone/>
-            </a:pPr>
-            <a:r>
-              <a:rPr lang="de-DE" dirty="0"/>
-              <a:t>3) - Tagesmittel, Ein-Stunden-Mittelwert, Ein-Stunden-Tagesmaxima, Acht-Stunden-Mittelwert, Acht-Stunden-Tagesmaxima, Tagesmittel (stündlich gleitend)</a:t>
-            </a:r>
-            <a:endParaRPr lang="en-DE" dirty="0"/>
-          </a:p>
-          <a:p>
-            <a:pPr marL="0" indent="0">
-              <a:buNone/>
-            </a:pPr>
-            <a:r>
-              <a:rPr lang="de-DE" dirty="0"/>
-              <a:t>4) - Lage der Messstation: städtisches Gebiet, vorstädtisches Gebiet, ländliches Gebiet, ländlich abgelegen, ländliche regional, ländlich stadtnah</a:t>
-            </a:r>
-            <a:endParaRPr lang="en-DE" dirty="0"/>
-          </a:p>
-          <a:p>
-            <a:pPr marL="0" indent="0">
-              <a:buNone/>
-            </a:pPr>
-            <a:r>
-              <a:rPr lang="de-DE" dirty="0"/>
-              <a:t>5) - Stationstypen (was messen sie): Hintergrund, Industrie, Verkehr</a:t>
-            </a:r>
-            <a:endParaRPr lang="en-DE" dirty="0"/>
-          </a:p>
-          <a:p>
-            <a:pPr marL="0" indent="0">
-              <a:buNone/>
-            </a:pPr>
-            <a:r>
-              <a:rPr lang="de-DE" dirty="0"/>
-              <a:t>6) - Thresholds (Klassifizierungsstufen für die Luftverschmutzung): von 0 bis 4</a:t>
-            </a:r>
-            <a:endParaRPr lang="en-DE" dirty="0"/>
-          </a:p>
-          <a:p>
-            <a:pPr marL="0" indent="0">
-              <a:buNone/>
-            </a:pPr>
-            <a:r>
-              <a:rPr lang="de-DE" dirty="0"/>
-              <a:t>7) - Ausgabe wann bestimmte Verschmutzungsgrenzen überschritten wurden</a:t>
-            </a:r>
-            <a:endParaRPr lang="en-DE" dirty="0"/>
-          </a:p>
-          <a:p>
-            <a:pPr marL="0" indent="0">
-              <a:buNone/>
-            </a:pPr>
-            <a:r>
-              <a:rPr lang="de-DE" dirty="0"/>
-              <a:t>8) - viele der oben genannten Kriterien vereint unter einer Suchanfrage mit zeitlicher Abgrenzungsmöglichkeit</a:t>
-            </a:r>
-            <a:endParaRPr lang="en-DE" dirty="0"/>
+            <a:r>
+              <a:rPr lang="en-US" sz="1600" dirty="0"/>
+              <a:t>Pollution concentration of different particles</a:t>
+            </a:r>
+          </a:p>
+          <a:p>
+            <a:r>
+              <a:rPr lang="en-US" sz="1600" dirty="0"/>
+              <a:t>Measurement coverage: all federal states plus the German Environment Agency (UBA)</a:t>
+            </a:r>
+          </a:p>
+          <a:p>
+            <a:r>
+              <a:rPr lang="en-US" sz="1600" dirty="0"/>
+              <a:t>Available aggregation windows: daily mean, 1-hour mean, 1-hour daily maxima, 8-hour mean, 8-hour daily maxima, rolling hourly daily mean</a:t>
+            </a:r>
+          </a:p>
+          <a:p>
+            <a:r>
+              <a:rPr lang="en-US" sz="1600" dirty="0"/>
+              <a:t>Station location context: urban area, suburban area, rural area, remote rural, regional rural, peri-urban rural</a:t>
+            </a:r>
+          </a:p>
+          <a:p>
+            <a:r>
+              <a:rPr lang="en-US" sz="1600" dirty="0"/>
+              <a:t>Station types (what they measure/are sited for): background, industrial, traffic</a:t>
+            </a:r>
+          </a:p>
+          <a:p>
+            <a:r>
+              <a:rPr lang="en-US" sz="1600" dirty="0"/>
+              <a:t>Thresholds (classification levels for air pollution): from 0 to 4</a:t>
+            </a:r>
+          </a:p>
+          <a:p>
+            <a:r>
+              <a:rPr lang="en-US" sz="1600" dirty="0"/>
+              <a:t>Output indicating when specific pollution thresholds were exceeded</a:t>
+            </a:r>
+          </a:p>
+          <a:p>
+            <a:r>
+              <a:rPr lang="en-US" sz="1600" dirty="0"/>
+              <a:t>Unified search/filter that combines many of the above criteria with the ability to specify time ranges</a:t>
+            </a:r>
           </a:p>
           <a:p>
             <a:pPr lvl="0"/>
-            <a:endParaRPr lang="en-DE" dirty="0"/>
+            <a:endParaRPr lang="en-DE" sz="1600" dirty="0"/>
           </a:p>
         </p:txBody>
       </p:sp>
@@ -8704,145 +11264,82 @@
         <p:spPr/>
         <p:txBody>
           <a:bodyPr>
-            <a:normAutofit fontScale="70000" lnSpcReduction="20000"/>
+            <a:noAutofit/>
           </a:bodyPr>
           <a:lstStyle/>
           <a:p>
-            <a:pPr marL="0" indent="0">
-              <a:buNone/>
-            </a:pPr>
-            <a:r>
-              <a:rPr lang="de-DE" dirty="0"/>
-              <a:t>- Air Pollution API</a:t>
-            </a:r>
-          </a:p>
-          <a:p>
-            <a:pPr marL="0" indent="0">
-              <a:buNone/>
-            </a:pPr>
-            <a:r>
-              <a:rPr lang="de-DE" u="sng" dirty="0">
-                <a:hlinkClick r:id="rId3"/>
-              </a:rPr>
-              <a:t>https://luftqualitaet.api.bund.dev/</a:t>
-            </a:r>
-            <a:endParaRPr lang="de-DE" u="sng" dirty="0"/>
-          </a:p>
-          <a:p>
-            <a:pPr marL="0" indent="0">
-              <a:buNone/>
-            </a:pPr>
-            <a:endParaRPr lang="en-DE" dirty="0"/>
-          </a:p>
-          <a:p>
-            <a:pPr marL="0" indent="0">
-              <a:buNone/>
-            </a:pPr>
-            <a:r>
-              <a:rPr lang="de-DE" dirty="0"/>
-              <a:t>- APIs from different countries necessary for comparison for question 4</a:t>
-            </a:r>
-            <a:endParaRPr lang="en-DE" dirty="0"/>
-          </a:p>
-          <a:p>
-            <a:pPr marL="0" indent="0">
-              <a:buNone/>
-            </a:pPr>
-            <a:r>
-              <a:rPr lang="de-DE" u="sng" dirty="0">
-                <a:hlinkClick r:id="rId4"/>
-              </a:rPr>
-              <a:t>https://freeapis.io/iqair</a:t>
-            </a:r>
-            <a:endParaRPr lang="en-DE" dirty="0"/>
-          </a:p>
-          <a:p>
-            <a:pPr marL="0" indent="0">
-              <a:buNone/>
-            </a:pPr>
-            <a:r>
-              <a:rPr lang="de-DE" dirty="0"/>
-              <a:t> </a:t>
-            </a:r>
-            <a:endParaRPr lang="en-DE" dirty="0"/>
-          </a:p>
-          <a:p>
-            <a:pPr marL="0" indent="0">
-              <a:buNone/>
-            </a:pPr>
-            <a:r>
-              <a:rPr lang="de-DE" dirty="0"/>
-              <a:t>- Weather-API necessary for question 6</a:t>
-            </a:r>
-            <a:endParaRPr lang="en-DE" dirty="0"/>
-          </a:p>
-          <a:p>
-            <a:pPr marL="0" indent="0">
-              <a:buNone/>
-            </a:pPr>
-            <a:r>
-              <a:rPr lang="de-DE" u="sng" dirty="0">
-                <a:hlinkClick r:id="rId5"/>
-              </a:rPr>
-              <a:t>https://open-meteo.com/en/docs</a:t>
-            </a:r>
-            <a:endParaRPr lang="en-DE" dirty="0"/>
-          </a:p>
-          <a:p>
-            <a:pPr marL="0" indent="0">
-              <a:buNone/>
-            </a:pPr>
-            <a:r>
-              <a:rPr lang="de-DE" dirty="0"/>
-              <a:t> </a:t>
-            </a:r>
-            <a:endParaRPr lang="en-DE" dirty="0"/>
-          </a:p>
-          <a:p>
-            <a:pPr marL="0" indent="0">
-              <a:buNone/>
-            </a:pPr>
-            <a:r>
-              <a:rPr lang="de-DE" dirty="0"/>
-              <a:t>- API necessary for question 9, for tourism figures</a:t>
-            </a:r>
-            <a:endParaRPr lang="en-DE" dirty="0"/>
-          </a:p>
-          <a:p>
-            <a:pPr marL="0" indent="0">
-              <a:buNone/>
-            </a:pPr>
-            <a:r>
-              <a:rPr lang="de-DE" u="sng" dirty="0">
-                <a:hlinkClick r:id="rId6"/>
-              </a:rPr>
-              <a:t>https://data.europa.eu/en/publications/datastories/high-value-datasets-tourism-eu</a:t>
-            </a:r>
-            <a:endParaRPr lang="en-DE" dirty="0"/>
-          </a:p>
-          <a:p>
-            <a:pPr marL="0" indent="0">
-              <a:buNone/>
-            </a:pPr>
-            <a:r>
-              <a:rPr lang="de-DE" u="sng" dirty="0">
-                <a:hlinkClick r:id="rId7"/>
-              </a:rPr>
-              <a:t>https://www.untourism.int/tourism-statistics/tourism-statistics-database</a:t>
-            </a:r>
-            <a:endParaRPr lang="en-DE" dirty="0"/>
-          </a:p>
-          <a:p>
-            <a:pPr marL="0" indent="0">
-              <a:buNone/>
-            </a:pPr>
-            <a:r>
-              <a:rPr lang="de-DE" u="sng" dirty="0">
-                <a:hlinkClick r:id="rId8"/>
-              </a:rPr>
-              <a:t>https://www.destination.one/unsere-loesung-oneproduct/open-data</a:t>
-            </a:r>
-            <a:endParaRPr lang="en-DE" dirty="0"/>
+            <a:r>
+              <a:rPr lang="de-DE" sz="1800" dirty="0" err="1"/>
+              <a:t>Bund.DEV</a:t>
+            </a:r>
+            <a:r>
+              <a:rPr lang="de-DE" sz="1800" dirty="0"/>
+              <a:t> </a:t>
+            </a:r>
+            <a:r>
+              <a:rPr lang="de-DE" sz="1800" dirty="0" err="1"/>
+              <a:t>air</a:t>
+            </a:r>
+            <a:r>
+              <a:rPr lang="de-DE" sz="1800" dirty="0"/>
+              <a:t> </a:t>
+            </a:r>
+            <a:r>
+              <a:rPr lang="de-DE" sz="1800" dirty="0" err="1"/>
+              <a:t>quality</a:t>
+            </a:r>
+            <a:r>
+              <a:rPr lang="de-DE" sz="1800" dirty="0"/>
+              <a:t> API </a:t>
+            </a:r>
+          </a:p>
+          <a:p>
+            <a:r>
+              <a:rPr lang="de-DE" sz="1800" dirty="0"/>
+              <a:t>Umweltbundesamt </a:t>
+            </a:r>
+            <a:r>
+              <a:rPr lang="de-DE" sz="1800" dirty="0" err="1"/>
+              <a:t>air</a:t>
+            </a:r>
+            <a:r>
+              <a:rPr lang="de-DE" sz="1800" dirty="0"/>
+              <a:t> </a:t>
+            </a:r>
+            <a:r>
+              <a:rPr lang="de-DE" sz="1800" dirty="0" err="1"/>
+              <a:t>data</a:t>
+            </a:r>
+            <a:r>
+              <a:rPr lang="de-DE" sz="1800" dirty="0"/>
+              <a:t> API</a:t>
+            </a:r>
+          </a:p>
+          <a:p>
+            <a:r>
+              <a:rPr lang="de-DE" sz="1800" dirty="0"/>
+              <a:t>Open-Meteo </a:t>
+            </a:r>
+            <a:r>
+              <a:rPr lang="de-DE" sz="1800" dirty="0" err="1"/>
+              <a:t>weather</a:t>
+            </a:r>
+            <a:r>
+              <a:rPr lang="de-DE" sz="1800" dirty="0"/>
+              <a:t> API</a:t>
+            </a:r>
+            <a:endParaRPr lang="en-DE" sz="1800" dirty="0"/>
+          </a:p>
+          <a:p>
+            <a:r>
+              <a:rPr lang="de-DE" sz="1800" dirty="0" err="1"/>
+              <a:t>Tourism</a:t>
+            </a:r>
+            <a:r>
+              <a:rPr lang="de-DE" sz="1800" dirty="0"/>
+              <a:t> EU API</a:t>
+            </a:r>
+            <a:endParaRPr lang="en-DE" sz="1800" dirty="0"/>
           </a:p>
         </p:txBody>
       </p:sp>
@@ -9013,17 +11510,841 @@
         <p:spPr>
           <a:xfrm>
             <a:off x="914399" y="365125"/>
-            <a:ext cx="10363201" cy="1629601"/>
+            <a:ext cx="7273637" cy="1646555"/>
           </a:xfrm>
         </p:spPr>
         <p:txBody>
-          <a:bodyPr/>
+          <a:bodyPr anchor="ctr">
+            <a:normAutofit/>
+          </a:bodyPr>
           <a:lstStyle/>
           <a:p>
             <a:r>
               <a:rPr lang="en-US" dirty="0"/>
-              <a:t>Movies -questions</a:t>
-            </a:r>
+              <a:t>Movies - questions</a:t>
+            </a:r>
+          </a:p>
+        </p:txBody>
+      </p:sp>
+      <p:sp>
+        <p:nvSpPr>
+          <p:cNvPr id="9" name="Content Placeholder 8">
+            <a:extLst>
+              <a:ext uri="{FF2B5EF4-FFF2-40B4-BE49-F238E27FC236}">
+                <a16:creationId xmlns:a16="http://schemas.microsoft.com/office/drawing/2014/main" id="{24A2A866-32E8-7ECA-A581-4AA876CAF027}"/>
+              </a:ext>
+            </a:extLst>
+          </p:cNvPr>
+          <p:cNvSpPr>
+            <a:spLocks noGrp="1"/>
+          </p:cNvSpPr>
+          <p:nvPr>
+            <p:ph sz="quarter" idx="10"/>
+          </p:nvPr>
+        </p:nvSpPr>
+        <p:spPr>
+          <a:xfrm>
+            <a:off x="914399" y="2011363"/>
+            <a:ext cx="7273638" cy="4155757"/>
+          </a:xfrm>
+        </p:spPr>
+        <p:txBody>
+          <a:bodyPr>
+            <a:normAutofit/>
+          </a:bodyPr>
+          <a:lstStyle/>
+          <a:p>
+            <a:pPr marL="0" indent="0">
+              <a:buNone/>
+            </a:pPr>
+            <a:r>
+              <a:rPr lang="de-DE" sz="1600" b="1" dirty="0"/>
+              <a:t>1. </a:t>
+            </a:r>
+            <a:r>
+              <a:rPr lang="de-DE" sz="1600" b="1" dirty="0" err="1"/>
+              <a:t>Does</a:t>
+            </a:r>
+            <a:r>
+              <a:rPr lang="de-DE" sz="1600" b="1" dirty="0"/>
+              <a:t> </a:t>
+            </a:r>
+            <a:r>
+              <a:rPr lang="de-DE" sz="1600" b="1" dirty="0" err="1"/>
+              <a:t>the</a:t>
+            </a:r>
+            <a:r>
+              <a:rPr lang="de-DE" sz="1600" b="1" dirty="0"/>
+              <a:t> release </a:t>
+            </a:r>
+            <a:r>
+              <a:rPr lang="de-DE" sz="1600" b="1" dirty="0" err="1"/>
+              <a:t>of</a:t>
+            </a:r>
+            <a:r>
+              <a:rPr lang="de-DE" sz="1600" b="1" dirty="0"/>
+              <a:t> „</a:t>
+            </a:r>
+            <a:r>
+              <a:rPr lang="de-DE" sz="1600" b="1" dirty="0" err="1"/>
+              <a:t>big</a:t>
+            </a:r>
+            <a:r>
+              <a:rPr lang="de-DE" sz="1600" b="1" dirty="0"/>
+              <a:t>“ and </a:t>
+            </a:r>
+            <a:r>
+              <a:rPr lang="de-DE" sz="1600" b="1" dirty="0" err="1"/>
+              <a:t>successful</a:t>
+            </a:r>
+            <a:r>
+              <a:rPr lang="de-DE" sz="1600" b="1" dirty="0"/>
+              <a:t> </a:t>
+            </a:r>
+            <a:r>
+              <a:rPr lang="de-DE" sz="1600" b="1" dirty="0" err="1"/>
+              <a:t>movie</a:t>
+            </a:r>
+            <a:r>
+              <a:rPr lang="de-DE" sz="1600" b="1" dirty="0"/>
+              <a:t> </a:t>
+            </a:r>
+            <a:r>
+              <a:rPr lang="de-DE" sz="1600" b="1" dirty="0" err="1"/>
+              <a:t>releases</a:t>
+            </a:r>
+            <a:r>
+              <a:rPr lang="de-DE" sz="1600" b="1" dirty="0"/>
+              <a:t> </a:t>
+            </a:r>
+            <a:r>
+              <a:rPr lang="de-DE" sz="1600" b="1" dirty="0" err="1"/>
+              <a:t>influence</a:t>
+            </a:r>
+            <a:r>
+              <a:rPr lang="de-DE" sz="1600" b="1" dirty="0"/>
+              <a:t> </a:t>
+            </a:r>
+            <a:r>
+              <a:rPr lang="de-DE" sz="1600" b="1" dirty="0" err="1"/>
+              <a:t>the</a:t>
+            </a:r>
+            <a:r>
+              <a:rPr lang="de-DE" sz="1600" b="1" dirty="0"/>
+              <a:t> </a:t>
+            </a:r>
+            <a:r>
+              <a:rPr lang="de-DE" sz="1600" b="1" dirty="0" err="1"/>
+              <a:t>popularity</a:t>
+            </a:r>
+            <a:r>
+              <a:rPr lang="de-DE" sz="1600" b="1" dirty="0"/>
+              <a:t> </a:t>
+            </a:r>
+            <a:r>
+              <a:rPr lang="de-DE" sz="1600" b="1" dirty="0" err="1"/>
+              <a:t>of</a:t>
+            </a:r>
+            <a:r>
+              <a:rPr lang="de-DE" sz="1600" b="1" dirty="0"/>
+              <a:t> </a:t>
+            </a:r>
+            <a:r>
+              <a:rPr lang="de-DE" sz="1600" b="1" dirty="0" err="1"/>
+              <a:t>the</a:t>
+            </a:r>
+            <a:r>
+              <a:rPr lang="de-DE" sz="1600" b="1" dirty="0"/>
+              <a:t> </a:t>
+            </a:r>
+            <a:r>
+              <a:rPr lang="de-DE" sz="1600" b="1" dirty="0" err="1"/>
+              <a:t>genre</a:t>
+            </a:r>
+            <a:r>
+              <a:rPr lang="de-DE" sz="1600" b="1" dirty="0"/>
+              <a:t>?</a:t>
+            </a:r>
+            <a:endParaRPr lang="en-DE" sz="1600" b="1" dirty="0"/>
+          </a:p>
+          <a:p>
+            <a:pPr marL="0" indent="0">
+              <a:buNone/>
+            </a:pPr>
+            <a:r>
+              <a:rPr lang="de-DE" sz="1600" dirty="0"/>
+              <a:t>2. </a:t>
+            </a:r>
+            <a:r>
+              <a:rPr lang="de-DE" sz="1600" dirty="0" err="1"/>
+              <a:t>Does</a:t>
+            </a:r>
+            <a:r>
+              <a:rPr lang="de-DE" sz="1600" dirty="0"/>
+              <a:t> </a:t>
+            </a:r>
+            <a:r>
+              <a:rPr lang="de-DE" sz="1600" dirty="0" err="1"/>
+              <a:t>the</a:t>
+            </a:r>
+            <a:r>
+              <a:rPr lang="de-DE" sz="1600" dirty="0"/>
+              <a:t> </a:t>
+            </a:r>
+            <a:r>
+              <a:rPr lang="de-DE" sz="1600" dirty="0" err="1"/>
+              <a:t>budget</a:t>
+            </a:r>
+            <a:r>
+              <a:rPr lang="de-DE" sz="1600" dirty="0"/>
+              <a:t> </a:t>
+            </a:r>
+            <a:r>
+              <a:rPr lang="de-DE" sz="1600" dirty="0" err="1"/>
+              <a:t>of</a:t>
+            </a:r>
+            <a:r>
+              <a:rPr lang="de-DE" sz="1600" dirty="0"/>
+              <a:t> a </a:t>
+            </a:r>
+            <a:r>
+              <a:rPr lang="de-DE" sz="1600" dirty="0" err="1"/>
+              <a:t>movie</a:t>
+            </a:r>
+            <a:r>
+              <a:rPr lang="de-DE" sz="1600" dirty="0"/>
+              <a:t> </a:t>
+            </a:r>
+            <a:r>
+              <a:rPr lang="de-DE" sz="1600" dirty="0" err="1"/>
+              <a:t>or</a:t>
+            </a:r>
+            <a:r>
+              <a:rPr lang="de-DE" sz="1600" dirty="0"/>
+              <a:t> </a:t>
+            </a:r>
+            <a:r>
+              <a:rPr lang="de-DE" sz="1600" dirty="0" err="1"/>
+              <a:t>show</a:t>
+            </a:r>
+            <a:r>
+              <a:rPr lang="de-DE" sz="1600" dirty="0"/>
+              <a:t> </a:t>
+            </a:r>
+            <a:r>
+              <a:rPr lang="de-DE" sz="1600" dirty="0" err="1"/>
+              <a:t>influence</a:t>
+            </a:r>
+            <a:r>
+              <a:rPr lang="de-DE" sz="1600" dirty="0"/>
+              <a:t> </a:t>
+            </a:r>
+            <a:r>
+              <a:rPr lang="de-DE" sz="1600" dirty="0" err="1"/>
+              <a:t>its</a:t>
+            </a:r>
+            <a:r>
+              <a:rPr lang="de-DE" sz="1600" dirty="0"/>
+              <a:t> </a:t>
+            </a:r>
+            <a:r>
+              <a:rPr lang="de-DE" sz="1600" dirty="0" err="1"/>
+              <a:t>success</a:t>
+            </a:r>
+            <a:r>
+              <a:rPr lang="de-DE" sz="1600" dirty="0"/>
+              <a:t>?</a:t>
+            </a:r>
+            <a:endParaRPr lang="en-DE" sz="1600" dirty="0"/>
+          </a:p>
+          <a:p>
+            <a:pPr marL="0" indent="0">
+              <a:buNone/>
+            </a:pPr>
+            <a:r>
+              <a:rPr lang="de-DE" sz="1600" dirty="0"/>
+              <a:t>3. </a:t>
+            </a:r>
+            <a:r>
+              <a:rPr lang="de-DE" sz="1600" dirty="0" err="1"/>
+              <a:t>What</a:t>
+            </a:r>
+            <a:r>
+              <a:rPr lang="de-DE" sz="1600" dirty="0"/>
+              <a:t> </a:t>
+            </a:r>
+            <a:r>
+              <a:rPr lang="de-DE" sz="1600" dirty="0" err="1"/>
+              <a:t>characteristics</a:t>
+            </a:r>
+            <a:r>
+              <a:rPr lang="de-DE" sz="1600" dirty="0"/>
+              <a:t> do </a:t>
+            </a:r>
+            <a:r>
+              <a:rPr lang="de-DE" sz="1600" dirty="0" err="1"/>
+              <a:t>influence</a:t>
+            </a:r>
+            <a:r>
+              <a:rPr lang="de-DE" sz="1600" dirty="0"/>
+              <a:t> </a:t>
+            </a:r>
+            <a:r>
+              <a:rPr lang="de-DE" sz="1600" dirty="0" err="1"/>
+              <a:t>movies</a:t>
+            </a:r>
+            <a:r>
+              <a:rPr lang="de-DE" sz="1600" dirty="0"/>
+              <a:t> </a:t>
+            </a:r>
+            <a:r>
+              <a:rPr lang="de-DE" sz="1600" dirty="0" err="1"/>
+              <a:t>to</a:t>
+            </a:r>
+            <a:r>
+              <a:rPr lang="de-DE" sz="1600" dirty="0"/>
+              <a:t> </a:t>
+            </a:r>
+            <a:r>
+              <a:rPr lang="de-DE" sz="1600" dirty="0" err="1"/>
+              <a:t>be</a:t>
+            </a:r>
+            <a:r>
+              <a:rPr lang="de-DE" sz="1600" dirty="0"/>
+              <a:t> </a:t>
+            </a:r>
+            <a:r>
+              <a:rPr lang="de-DE" sz="1600" dirty="0" err="1"/>
+              <a:t>discussed</a:t>
+            </a:r>
+            <a:r>
+              <a:rPr lang="de-DE" sz="1600" dirty="0"/>
+              <a:t> </a:t>
+            </a:r>
+            <a:r>
+              <a:rPr lang="de-DE" sz="1600" dirty="0" err="1"/>
+              <a:t>more</a:t>
+            </a:r>
+            <a:r>
+              <a:rPr lang="de-DE" sz="1600" dirty="0"/>
+              <a:t> online?</a:t>
+            </a:r>
+            <a:endParaRPr lang="en-DE" sz="1600" dirty="0"/>
+          </a:p>
+          <a:p>
+            <a:pPr marL="0" indent="0">
+              <a:buNone/>
+            </a:pPr>
+            <a:r>
+              <a:rPr lang="de-DE" sz="1600" dirty="0"/>
+              <a:t>4</a:t>
+            </a:r>
+            <a:r>
+              <a:rPr lang="de-DE" sz="1600" b="1" dirty="0"/>
+              <a:t>. </a:t>
+            </a:r>
+            <a:r>
+              <a:rPr lang="de-DE" sz="1600" b="1" dirty="0" err="1"/>
+              <a:t>Does</a:t>
+            </a:r>
+            <a:r>
+              <a:rPr lang="de-DE" sz="1600" b="1" dirty="0"/>
+              <a:t> </a:t>
+            </a:r>
+            <a:r>
+              <a:rPr lang="de-DE" sz="1600" b="1" dirty="0" err="1"/>
+              <a:t>the</a:t>
+            </a:r>
+            <a:r>
+              <a:rPr lang="de-DE" sz="1600" b="1" dirty="0"/>
+              <a:t> release </a:t>
+            </a:r>
+            <a:r>
+              <a:rPr lang="de-DE" sz="1600" b="1" dirty="0" err="1"/>
+              <a:t>timing</a:t>
+            </a:r>
+            <a:r>
+              <a:rPr lang="de-DE" sz="1600" b="1" dirty="0"/>
+              <a:t> </a:t>
+            </a:r>
+            <a:r>
+              <a:rPr lang="de-DE" sz="1600" b="1" dirty="0" err="1"/>
+              <a:t>of</a:t>
+            </a:r>
+            <a:r>
+              <a:rPr lang="de-DE" sz="1600" b="1" dirty="0"/>
+              <a:t> a </a:t>
+            </a:r>
+            <a:r>
+              <a:rPr lang="de-DE" sz="1600" b="1" dirty="0" err="1"/>
+              <a:t>movie</a:t>
+            </a:r>
+            <a:r>
+              <a:rPr lang="de-DE" sz="1600" b="1" dirty="0"/>
+              <a:t> </a:t>
+            </a:r>
+            <a:r>
+              <a:rPr lang="de-DE" sz="1600" b="1" dirty="0" err="1"/>
+              <a:t>or</a:t>
+            </a:r>
+            <a:r>
+              <a:rPr lang="de-DE" sz="1600" b="1" dirty="0"/>
+              <a:t> </a:t>
+            </a:r>
+            <a:r>
+              <a:rPr lang="de-DE" sz="1600" b="1" dirty="0" err="1"/>
+              <a:t>show</a:t>
+            </a:r>
+            <a:r>
+              <a:rPr lang="de-DE" sz="1600" b="1" dirty="0"/>
+              <a:t> </a:t>
+            </a:r>
+            <a:r>
+              <a:rPr lang="de-DE" sz="1600" b="1" dirty="0" err="1"/>
+              <a:t>influence</a:t>
+            </a:r>
+            <a:r>
+              <a:rPr lang="de-DE" sz="1600" b="1" dirty="0"/>
+              <a:t> </a:t>
+            </a:r>
+            <a:r>
+              <a:rPr lang="de-DE" sz="1600" b="1" dirty="0" err="1"/>
+              <a:t>it's</a:t>
+            </a:r>
+            <a:r>
+              <a:rPr lang="de-DE" sz="1600" b="1" dirty="0"/>
+              <a:t> </a:t>
+            </a:r>
+            <a:r>
+              <a:rPr lang="de-DE" sz="1600" b="1" dirty="0" err="1"/>
+              <a:t>success</a:t>
+            </a:r>
+            <a:r>
+              <a:rPr lang="de-DE" sz="1600" b="1" dirty="0"/>
+              <a:t>?</a:t>
+            </a:r>
+            <a:endParaRPr lang="en-DE" sz="1600" b="1" dirty="0"/>
+          </a:p>
+          <a:p>
+            <a:pPr marL="0" indent="0">
+              <a:buNone/>
+            </a:pPr>
+            <a:r>
+              <a:rPr lang="de-DE" sz="1600" dirty="0"/>
+              <a:t>5. </a:t>
+            </a:r>
+            <a:r>
+              <a:rPr lang="de-DE" sz="1600" dirty="0" err="1"/>
+              <a:t>What</a:t>
+            </a:r>
+            <a:r>
+              <a:rPr lang="de-DE" sz="1600" dirty="0"/>
+              <a:t> film </a:t>
+            </a:r>
+            <a:r>
+              <a:rPr lang="de-DE" sz="1600" dirty="0" err="1"/>
+              <a:t>genres</a:t>
+            </a:r>
+            <a:r>
+              <a:rPr lang="de-DE" sz="1600" dirty="0"/>
+              <a:t> </a:t>
+            </a:r>
+            <a:r>
+              <a:rPr lang="de-DE" sz="1600" dirty="0" err="1"/>
+              <a:t>gained</a:t>
+            </a:r>
+            <a:r>
+              <a:rPr lang="de-DE" sz="1600" dirty="0"/>
+              <a:t> </a:t>
+            </a:r>
+            <a:r>
+              <a:rPr lang="de-DE" sz="1600" dirty="0" err="1"/>
+              <a:t>more</a:t>
+            </a:r>
+            <a:r>
+              <a:rPr lang="de-DE" sz="1600" dirty="0"/>
+              <a:t> </a:t>
+            </a:r>
+            <a:r>
+              <a:rPr lang="de-DE" sz="1600" dirty="0" err="1"/>
+              <a:t>popularity</a:t>
+            </a:r>
+            <a:r>
+              <a:rPr lang="de-DE" sz="1600" dirty="0"/>
+              <a:t> </a:t>
+            </a:r>
+            <a:r>
+              <a:rPr lang="de-DE" sz="1600" dirty="0" err="1"/>
+              <a:t>over</a:t>
+            </a:r>
+            <a:r>
+              <a:rPr lang="de-DE" sz="1600" dirty="0"/>
+              <a:t> time?</a:t>
+            </a:r>
+            <a:endParaRPr lang="en-DE" sz="1600" dirty="0"/>
+          </a:p>
+          <a:p>
+            <a:pPr marL="0" indent="0">
+              <a:buNone/>
+            </a:pPr>
+            <a:r>
+              <a:rPr lang="de-DE" sz="1600" dirty="0"/>
+              <a:t>6. Do </a:t>
+            </a:r>
+            <a:r>
+              <a:rPr lang="de-DE" sz="1600" dirty="0" err="1"/>
+              <a:t>critics</a:t>
+            </a:r>
+            <a:r>
+              <a:rPr lang="de-DE" sz="1600" dirty="0"/>
+              <a:t> </a:t>
+            </a:r>
+            <a:r>
+              <a:rPr lang="de-DE" sz="1600" dirty="0" err="1"/>
+              <a:t>reviews</a:t>
+            </a:r>
+            <a:r>
+              <a:rPr lang="de-DE" sz="1600" dirty="0"/>
+              <a:t> </a:t>
+            </a:r>
+            <a:r>
+              <a:rPr lang="de-DE" sz="1600" dirty="0" err="1"/>
+              <a:t>influence</a:t>
+            </a:r>
+            <a:r>
+              <a:rPr lang="de-DE" sz="1600" dirty="0"/>
+              <a:t> </a:t>
+            </a:r>
+            <a:r>
+              <a:rPr lang="de-DE" sz="1600" dirty="0" err="1"/>
+              <a:t>the</a:t>
+            </a:r>
+            <a:r>
+              <a:rPr lang="de-DE" sz="1600" dirty="0"/>
+              <a:t> </a:t>
+            </a:r>
+            <a:r>
+              <a:rPr lang="de-DE" sz="1600" dirty="0" err="1"/>
+              <a:t>opinion</a:t>
+            </a:r>
+            <a:r>
+              <a:rPr lang="de-DE" sz="1600" dirty="0"/>
+              <a:t> </a:t>
+            </a:r>
+            <a:r>
+              <a:rPr lang="de-DE" sz="1600" dirty="0" err="1"/>
+              <a:t>of</a:t>
+            </a:r>
+            <a:r>
+              <a:rPr lang="de-DE" sz="1600" dirty="0"/>
+              <a:t> </a:t>
+            </a:r>
+            <a:r>
+              <a:rPr lang="de-DE" sz="1600" dirty="0" err="1"/>
+              <a:t>users</a:t>
+            </a:r>
+            <a:r>
+              <a:rPr lang="de-DE" sz="1600" dirty="0"/>
+              <a:t>?</a:t>
+            </a:r>
+            <a:endParaRPr lang="en-DE" sz="1600" dirty="0"/>
+          </a:p>
+          <a:p>
+            <a:pPr marL="0" indent="0">
+              <a:buNone/>
+            </a:pPr>
+            <a:r>
+              <a:rPr lang="de-DE" sz="1600" dirty="0"/>
+              <a:t>7. Do </a:t>
+            </a:r>
+            <a:r>
+              <a:rPr lang="de-DE" sz="1600" dirty="0" err="1"/>
+              <a:t>long</a:t>
+            </a:r>
+            <a:r>
+              <a:rPr lang="de-DE" sz="1600" dirty="0"/>
+              <a:t> </a:t>
+            </a:r>
+            <a:r>
+              <a:rPr lang="de-DE" sz="1600" dirty="0" err="1"/>
+              <a:t>releases</a:t>
+            </a:r>
+            <a:r>
+              <a:rPr lang="de-DE" sz="1600" dirty="0"/>
+              <a:t> </a:t>
+            </a:r>
+            <a:r>
+              <a:rPr lang="de-DE" sz="1600" dirty="0" err="1"/>
+              <a:t>between</a:t>
+            </a:r>
+            <a:r>
+              <a:rPr lang="de-DE" sz="1600" dirty="0"/>
+              <a:t> </a:t>
+            </a:r>
+            <a:r>
+              <a:rPr lang="de-DE" sz="1600" dirty="0" err="1"/>
+              <a:t>season</a:t>
+            </a:r>
+            <a:r>
+              <a:rPr lang="de-DE" sz="1600" dirty="0"/>
+              <a:t> </a:t>
+            </a:r>
+            <a:r>
+              <a:rPr lang="de-DE" sz="1600" dirty="0" err="1"/>
+              <a:t>of</a:t>
+            </a:r>
+            <a:r>
+              <a:rPr lang="de-DE" sz="1600" dirty="0"/>
+              <a:t> a </a:t>
+            </a:r>
+            <a:r>
+              <a:rPr lang="de-DE" sz="1600" dirty="0" err="1"/>
+              <a:t>show</a:t>
+            </a:r>
+            <a:r>
+              <a:rPr lang="de-DE" sz="1600" dirty="0"/>
+              <a:t> </a:t>
+            </a:r>
+            <a:r>
+              <a:rPr lang="de-DE" sz="1600" dirty="0" err="1"/>
+              <a:t>cause</a:t>
+            </a:r>
+            <a:r>
+              <a:rPr lang="de-DE" sz="1600" dirty="0"/>
+              <a:t> </a:t>
+            </a:r>
+            <a:r>
+              <a:rPr lang="de-DE" sz="1600" dirty="0" err="1"/>
+              <a:t>users</a:t>
+            </a:r>
+            <a:r>
+              <a:rPr lang="de-DE" sz="1600" dirty="0"/>
+              <a:t> </a:t>
+            </a:r>
+            <a:r>
+              <a:rPr lang="de-DE" sz="1600" dirty="0" err="1"/>
+              <a:t>to</a:t>
+            </a:r>
+            <a:r>
+              <a:rPr lang="de-DE" sz="1600" dirty="0"/>
+              <a:t> </a:t>
+            </a:r>
+            <a:r>
+              <a:rPr lang="de-DE" sz="1600" dirty="0" err="1"/>
+              <a:t>drop</a:t>
+            </a:r>
+            <a:r>
+              <a:rPr lang="de-DE" sz="1600" dirty="0"/>
+              <a:t> </a:t>
+            </a:r>
+            <a:r>
+              <a:rPr lang="de-DE" sz="1600" dirty="0" err="1"/>
+              <a:t>interest</a:t>
+            </a:r>
+            <a:r>
+              <a:rPr lang="de-DE" sz="1600" dirty="0"/>
+              <a:t> in </a:t>
+            </a:r>
+            <a:r>
+              <a:rPr lang="de-DE" sz="1600" dirty="0" err="1"/>
+              <a:t>them</a:t>
+            </a:r>
+            <a:r>
+              <a:rPr lang="de-DE" sz="1600" dirty="0"/>
+              <a:t>?</a:t>
+            </a:r>
+            <a:endParaRPr lang="en-DE" sz="1600" dirty="0"/>
+          </a:p>
+          <a:p>
+            <a:pPr marL="0" lvl="0" indent="0">
+              <a:buNone/>
+            </a:pPr>
+            <a:r>
+              <a:rPr lang="de-DE" sz="1600" b="1" dirty="0"/>
+              <a:t>8. </a:t>
+            </a:r>
+            <a:r>
+              <a:rPr lang="de-DE" sz="1600" b="1" dirty="0" err="1"/>
+              <a:t>Does</a:t>
+            </a:r>
+            <a:r>
+              <a:rPr lang="de-DE" sz="1600" b="1" dirty="0"/>
+              <a:t> </a:t>
+            </a:r>
+            <a:r>
+              <a:rPr lang="de-DE" sz="1600" b="1" dirty="0" err="1"/>
+              <a:t>excitement</a:t>
+            </a:r>
+            <a:r>
+              <a:rPr lang="de-DE" sz="1600" b="1" dirty="0"/>
+              <a:t> online </a:t>
+            </a:r>
+            <a:r>
+              <a:rPr lang="de-DE" sz="1600" b="1" dirty="0" err="1"/>
+              <a:t>before</a:t>
+            </a:r>
+            <a:r>
+              <a:rPr lang="de-DE" sz="1600" b="1" dirty="0"/>
+              <a:t> a release </a:t>
+            </a:r>
+            <a:r>
+              <a:rPr lang="de-DE" sz="1600" b="1" dirty="0" err="1"/>
+              <a:t>influence</a:t>
+            </a:r>
+            <a:r>
+              <a:rPr lang="de-DE" sz="1600" b="1" dirty="0"/>
+              <a:t> </a:t>
+            </a:r>
+            <a:r>
+              <a:rPr lang="de-DE" sz="1600" b="1" dirty="0" err="1"/>
+              <a:t>the</a:t>
+            </a:r>
+            <a:r>
+              <a:rPr lang="de-DE" sz="1600" b="1" dirty="0"/>
+              <a:t> </a:t>
+            </a:r>
+            <a:r>
+              <a:rPr lang="de-DE" sz="1600" b="1" dirty="0" err="1"/>
+              <a:t>success</a:t>
+            </a:r>
+            <a:r>
+              <a:rPr lang="de-DE" sz="1600" b="1" dirty="0"/>
+              <a:t> </a:t>
+            </a:r>
+            <a:r>
+              <a:rPr lang="de-DE" sz="1600" b="1" dirty="0" err="1"/>
+              <a:t>of</a:t>
+            </a:r>
+            <a:r>
+              <a:rPr lang="de-DE" sz="1600" b="1" dirty="0"/>
+              <a:t> a </a:t>
+            </a:r>
+            <a:r>
+              <a:rPr lang="de-DE" sz="1600" b="1" dirty="0" err="1"/>
+              <a:t>show</a:t>
+            </a:r>
+            <a:r>
+              <a:rPr lang="de-DE" sz="1600" b="1" dirty="0"/>
+              <a:t>?</a:t>
+            </a:r>
+            <a:endParaRPr lang="en-DE" sz="1600" b="1" dirty="0"/>
+          </a:p>
+          <a:p>
+            <a:pPr marL="0" lvl="0" indent="0">
+              <a:buNone/>
+            </a:pPr>
+            <a:r>
+              <a:rPr lang="de-DE" sz="1600" dirty="0"/>
+              <a:t>9. </a:t>
+            </a:r>
+            <a:r>
+              <a:rPr lang="de-DE" sz="1600" dirty="0" err="1"/>
+              <a:t>Does</a:t>
+            </a:r>
+            <a:r>
+              <a:rPr lang="de-DE" sz="1600" dirty="0"/>
+              <a:t> </a:t>
+            </a:r>
+            <a:r>
+              <a:rPr lang="de-DE" sz="1600" dirty="0" err="1"/>
+              <a:t>the</a:t>
+            </a:r>
+            <a:r>
+              <a:rPr lang="de-DE" sz="1600" dirty="0"/>
+              <a:t> </a:t>
+            </a:r>
+            <a:r>
+              <a:rPr lang="de-DE" sz="1600" dirty="0" err="1"/>
+              <a:t>general</a:t>
+            </a:r>
+            <a:r>
+              <a:rPr lang="de-DE" sz="1600" dirty="0"/>
+              <a:t> </a:t>
+            </a:r>
+            <a:r>
+              <a:rPr lang="de-DE" sz="1600" dirty="0" err="1"/>
+              <a:t>opinion</a:t>
+            </a:r>
+            <a:r>
+              <a:rPr lang="de-DE" sz="1600" dirty="0"/>
+              <a:t> </a:t>
+            </a:r>
+            <a:r>
+              <a:rPr lang="de-DE" sz="1600" dirty="0" err="1"/>
+              <a:t>you</a:t>
+            </a:r>
+            <a:r>
+              <a:rPr lang="de-DE" sz="1600" dirty="0"/>
+              <a:t> </a:t>
+            </a:r>
+            <a:r>
+              <a:rPr lang="de-DE" sz="1600" dirty="0" err="1"/>
+              <a:t>see</a:t>
+            </a:r>
+            <a:r>
+              <a:rPr lang="de-DE" sz="1600" dirty="0"/>
+              <a:t> on social </a:t>
+            </a:r>
+            <a:r>
+              <a:rPr lang="de-DE" sz="1600" dirty="0" err="1"/>
+              <a:t>media</a:t>
+            </a:r>
+            <a:r>
+              <a:rPr lang="de-DE" sz="1600" dirty="0"/>
+              <a:t> </a:t>
+            </a:r>
+            <a:r>
+              <a:rPr lang="de-DE" sz="1600" dirty="0" err="1"/>
+              <a:t>influence</a:t>
+            </a:r>
+            <a:r>
+              <a:rPr lang="de-DE" sz="1600" dirty="0"/>
+              <a:t> </a:t>
+            </a:r>
+            <a:r>
+              <a:rPr lang="de-DE" sz="1600" dirty="0" err="1"/>
+              <a:t>the</a:t>
+            </a:r>
+            <a:r>
+              <a:rPr lang="de-DE" sz="1600" dirty="0"/>
+              <a:t> </a:t>
+            </a:r>
+            <a:r>
+              <a:rPr lang="de-DE" sz="1600" dirty="0" err="1"/>
+              <a:t>success</a:t>
+            </a:r>
+            <a:r>
+              <a:rPr lang="de-DE" sz="1600" dirty="0"/>
+              <a:t>? (</a:t>
+            </a:r>
+            <a:r>
+              <a:rPr lang="de-DE" sz="1600" dirty="0" err="1"/>
+              <a:t>is</a:t>
+            </a:r>
+            <a:r>
+              <a:rPr lang="de-DE" sz="1600" dirty="0"/>
+              <a:t> social </a:t>
+            </a:r>
+            <a:r>
+              <a:rPr lang="de-DE" sz="1600" dirty="0" err="1"/>
+              <a:t>media</a:t>
+            </a:r>
+            <a:r>
+              <a:rPr lang="de-DE" sz="1600" dirty="0"/>
+              <a:t> a </a:t>
+            </a:r>
+            <a:r>
+              <a:rPr lang="de-DE" sz="1600" dirty="0" err="1"/>
+              <a:t>bubble</a:t>
+            </a:r>
+            <a:r>
+              <a:rPr lang="de-DE" sz="1600" dirty="0"/>
+              <a:t>)</a:t>
+            </a:r>
+            <a:endParaRPr lang="en-DE" sz="1600" dirty="0"/>
+          </a:p>
+          <a:p>
+            <a:endParaRPr lang="en-DE" sz="1600" dirty="0"/>
           </a:p>
         </p:txBody>
       </p:sp>
@@ -9050,137 +12371,26 @@
           </a:xfrm>
         </p:spPr>
         <p:txBody>
-          <a:bodyPr/>
+          <a:bodyPr anchor="ctr">
+            <a:normAutofit/>
+          </a:bodyPr>
           <a:lstStyle/>
           <a:p>
+            <a:pPr>
+              <a:spcAft>
+                <a:spcPts val="600"/>
+              </a:spcAft>
+            </a:pPr>
             <a:fld id="{B5CEABB6-07DC-46E8-9B57-56EC44A396E5}" type="slidenum">
               <a:rPr lang="en-US" smtClean="0"/>
-              <a:pPr/>
+              <a:pPr>
+                <a:spcAft>
+                  <a:spcPts val="600"/>
+                </a:spcAft>
+              </a:pPr>
               <a:t>9</a:t>
             </a:fld>
-            <a:endParaRPr lang="en-US" dirty="0"/>
-          </a:p>
-        </p:txBody>
-      </p:sp>
-      <p:sp>
-        <p:nvSpPr>
-          <p:cNvPr id="9" name="Content Placeholder 8">
-            <a:extLst>
-              <a:ext uri="{FF2B5EF4-FFF2-40B4-BE49-F238E27FC236}">
-                <a16:creationId xmlns:a16="http://schemas.microsoft.com/office/drawing/2014/main" id="{24A2A866-32E8-7ECA-A581-4AA876CAF027}"/>
-              </a:ext>
-            </a:extLst>
-          </p:cNvPr>
-          <p:cNvSpPr>
-            <a:spLocks noGrp="1"/>
-          </p:cNvSpPr>
-          <p:nvPr>
-            <p:ph sz="quarter" idx="11"/>
-          </p:nvPr>
-        </p:nvSpPr>
-        <p:spPr>
-          <a:xfrm>
-            <a:off x="914399" y="2022250"/>
-            <a:ext cx="10363201" cy="3747180"/>
-          </a:xfrm>
-        </p:spPr>
-        <p:txBody>
-          <a:bodyPr>
-            <a:normAutofit fontScale="92500" lnSpcReduction="20000"/>
-          </a:bodyPr>
-          <a:lstStyle/>
-          <a:p>
-            <a:pPr marL="0" indent="0">
-              <a:buNone/>
-            </a:pPr>
-            <a:r>
-              <a:rPr lang="de-DE" dirty="0"/>
-              <a:t>1. Does the release of „big“ and successful movie releases influence the popularity of the genre?</a:t>
-            </a:r>
-            <a:endParaRPr lang="en-DE" dirty="0"/>
-          </a:p>
-          <a:p>
-            <a:pPr marL="0" indent="0">
-              <a:buNone/>
-            </a:pPr>
-            <a:r>
-              <a:rPr lang="de-DE" dirty="0"/>
-              <a:t>2. Does the budget of a movie or show influence the movies success?</a:t>
-            </a:r>
-            <a:endParaRPr lang="en-DE" dirty="0"/>
-          </a:p>
-          <a:p>
-            <a:pPr marL="0" indent="0">
-              <a:buNone/>
-            </a:pPr>
-            <a:r>
-              <a:rPr lang="de-DE" dirty="0"/>
-              <a:t>3. What characteristics do influence movies to be discussed more online?</a:t>
-            </a:r>
-            <a:endParaRPr lang="en-DE" dirty="0"/>
-          </a:p>
-          <a:p>
-            <a:pPr marL="0" indent="0">
-              <a:buNone/>
-            </a:pPr>
-            <a:r>
-              <a:rPr lang="de-DE" dirty="0"/>
-              <a:t>4. Does the release timing of a movie or show influence it's success?</a:t>
-            </a:r>
-            <a:endParaRPr lang="en-DE" dirty="0"/>
-          </a:p>
-          <a:p>
-            <a:pPr marL="0" indent="0">
-              <a:buNone/>
-            </a:pPr>
-            <a:r>
-              <a:rPr lang="de-DE" dirty="0"/>
-              <a:t>5. What film genres gained more popularity over time?</a:t>
-            </a:r>
-            <a:endParaRPr lang="en-DE" dirty="0"/>
-          </a:p>
-          <a:p>
-            <a:pPr marL="0" indent="0">
-              <a:buNone/>
-            </a:pPr>
-            <a:r>
-              <a:rPr lang="de-DE" dirty="0"/>
-              <a:t>6. Do critics reviews influence the opinion of users?</a:t>
-            </a:r>
-            <a:endParaRPr lang="en-DE" dirty="0"/>
-          </a:p>
-          <a:p>
-            <a:pPr marL="0" indent="0">
-              <a:buNone/>
-            </a:pPr>
-            <a:r>
-              <a:rPr lang="de-DE" dirty="0"/>
-              <a:t>7. Do long releases between season of a show cause users to drop interest in them?</a:t>
-            </a:r>
-            <a:endParaRPr lang="en-DE" dirty="0"/>
-          </a:p>
-          <a:p>
-            <a:pPr marL="0" lvl="0" indent="0">
-              <a:buNone/>
-            </a:pPr>
-            <a:r>
-              <a:rPr lang="de-DE" dirty="0"/>
-              <a:t>8. Does excitement online before a release influence the success of a show?</a:t>
-            </a:r>
-            <a:endParaRPr lang="en-DE" dirty="0"/>
-          </a:p>
-          <a:p>
-            <a:pPr marL="0" lvl="0" indent="0">
-              <a:buNone/>
-            </a:pPr>
-            <a:r>
-              <a:rPr lang="de-DE" dirty="0"/>
-              <a:t>9. Does the general opinion you see on social media influence the success? (is social media a bubble)</a:t>
-            </a:r>
-            <a:endParaRPr lang="en-DE" dirty="0"/>
-          </a:p>
-          <a:p>
-            <a:endParaRPr lang="en-DE" dirty="0"/>
+            <a:endParaRPr lang="en-US"/>
           </a:p>
         </p:txBody>
       </p:sp>
@@ -9989,35 +13199,6 @@
 </file>
 
 <file path=customXml/item1.xml><?xml version="1.0" encoding="utf-8"?>
-<p:properties xmlns:p="http://schemas.microsoft.com/office/2006/metadata/properties" xmlns:xsi="http://www.w3.org/2001/XMLSchema-instance" xmlns:pc="http://schemas.microsoft.com/office/infopath/2007/PartnerControls">
-  <documentManagement>
-    <_ip_UnifiedCompliancePolicyUIAction xmlns="http://schemas.microsoft.com/sharepoint/v3" xsi:nil="true"/>
-    <Image xmlns="71af3243-3dd4-4a8d-8c0d-dd76da1f02a5">
-      <Url xsi:nil="true"/>
-      <Description xsi:nil="true"/>
-    </Image>
-    <Status xmlns="71af3243-3dd4-4a8d-8c0d-dd76da1f02a5">Not started</Status>
-    <Background xmlns="71af3243-3dd4-4a8d-8c0d-dd76da1f02a5">false</Background>
-    <_ip_UnifiedCompliancePolicyProperties xmlns="http://schemas.microsoft.com/sharepoint/v3" xsi:nil="true"/>
-    <ImageTagsTaxHTField xmlns="71af3243-3dd4-4a8d-8c0d-dd76da1f02a5">
-      <Terms xmlns="http://schemas.microsoft.com/office/infopath/2007/PartnerControls"/>
-    </ImageTagsTaxHTField>
-    <TaxCatchAll xmlns="230e9df3-be65-4c73-a93b-d1236ebd677e" xsi:nil="true"/>
-    <MediaServiceKeyPoints xmlns="71af3243-3dd4-4a8d-8c0d-dd76da1f02a5" xsi:nil="true"/>
-  </documentManagement>
-</p:properties>
-</file>
-
-<file path=customXml/item2.xml><?xml version="1.0" encoding="utf-8"?>
-<?mso-contentType ?>
-<FormTemplates xmlns="http://schemas.microsoft.com/sharepoint/v3/contenttype/forms">
-  <Display>DocumentLibraryForm</Display>
-  <Edit>DocumentLibraryForm</Edit>
-  <New>DocumentLibraryForm</New>
-</FormTemplates>
-</file>
-
-<file path=customXml/item3.xml><?xml version="1.0" encoding="utf-8"?>
 <ct:contentTypeSchema xmlns:ct="http://schemas.microsoft.com/office/2006/metadata/contentType" xmlns:ma="http://schemas.microsoft.com/office/2006/metadata/properties/metaAttributes" ct:_="" ma:_="" ma:contentTypeName="Document" ma:contentTypeID="0x01010079F111ED35F8CC479449609E8A0923A6" ma:contentTypeVersion="28" ma:contentTypeDescription="Create a new document." ma:contentTypeScope="" ma:versionID="60f5a4f2d2b0abadcf532d48ebf9cb71">
   <xsd:schema xmlns:xsd="http://www.w3.org/2001/XMLSchema" xmlns:xs="http://www.w3.org/2001/XMLSchema" xmlns:p="http://schemas.microsoft.com/office/2006/metadata/properties" xmlns:ns1="http://schemas.microsoft.com/sharepoint/v3" xmlns:ns2="71af3243-3dd4-4a8d-8c0d-dd76da1f02a5" xmlns:ns3="16c05727-aa75-4e4a-9b5f-8a80a1165891" xmlns:ns4="230e9df3-be65-4c73-a93b-d1236ebd677e" targetNamespace="http://schemas.microsoft.com/office/2006/metadata/properties" ma:root="true" ma:fieldsID="7dd78129e6a1811f84807ad11c651531" ns1:_="" ns2:_="" ns3:_="" ns4:_="">
     <xsd:import namespace="http://schemas.microsoft.com/sharepoint/v3"/>
@@ -10329,27 +13510,36 @@
 </ct:contentTypeSchema>
 </file>
 
-<file path=customXml/itemProps1.xml><?xml version="1.0" encoding="utf-8"?>
-<ds:datastoreItem xmlns:ds="http://schemas.openxmlformats.org/officeDocument/2006/customXml" ds:itemID="{AB045227-5724-4DBF-9712-031B1BFB2C3C}">
-  <ds:schemaRefs>
-    <ds:schemaRef ds:uri="http://schemas.microsoft.com/office/2006/metadata/properties"/>
-    <ds:schemaRef ds:uri="http://schemas.microsoft.com/office/infopath/2007/PartnerControls"/>
-    <ds:schemaRef ds:uri="http://schemas.microsoft.com/sharepoint/v3"/>
-    <ds:schemaRef ds:uri="71af3243-3dd4-4a8d-8c0d-dd76da1f02a5"/>
-    <ds:schemaRef ds:uri="230e9df3-be65-4c73-a93b-d1236ebd677e"/>
-  </ds:schemaRefs>
-</ds:datastoreItem>
+<file path=customXml/item2.xml><?xml version="1.0" encoding="utf-8"?>
+<?mso-contentType ?>
+<FormTemplates xmlns="http://schemas.microsoft.com/sharepoint/v3/contenttype/forms">
+  <Display>DocumentLibraryForm</Display>
+  <Edit>DocumentLibraryForm</Edit>
+  <New>DocumentLibraryForm</New>
+</FormTemplates>
 </file>
 
-<file path=customXml/itemProps2.xml><?xml version="1.0" encoding="utf-8"?>
-<ds:datastoreItem xmlns:ds="http://schemas.openxmlformats.org/officeDocument/2006/customXml" ds:itemID="{B7B39BD0-040C-43BE-B0E4-512B09E8003F}">
-  <ds:schemaRefs>
-    <ds:schemaRef ds:uri="http://schemas.microsoft.com/sharepoint/v3/contenttype/forms"/>
-  </ds:schemaRefs>
-</ds:datastoreItem>
+<file path=customXml/item3.xml><?xml version="1.0" encoding="utf-8"?>
+<p:properties xmlns:p="http://schemas.microsoft.com/office/2006/metadata/properties" xmlns:xsi="http://www.w3.org/2001/XMLSchema-instance" xmlns:pc="http://schemas.microsoft.com/office/infopath/2007/PartnerControls">
+  <documentManagement>
+    <_ip_UnifiedCompliancePolicyUIAction xmlns="http://schemas.microsoft.com/sharepoint/v3" xsi:nil="true"/>
+    <Image xmlns="71af3243-3dd4-4a8d-8c0d-dd76da1f02a5">
+      <Url xsi:nil="true"/>
+      <Description xsi:nil="true"/>
+    </Image>
+    <Status xmlns="71af3243-3dd4-4a8d-8c0d-dd76da1f02a5">Not started</Status>
+    <Background xmlns="71af3243-3dd4-4a8d-8c0d-dd76da1f02a5">false</Background>
+    <_ip_UnifiedCompliancePolicyProperties xmlns="http://schemas.microsoft.com/sharepoint/v3" xsi:nil="true"/>
+    <ImageTagsTaxHTField xmlns="71af3243-3dd4-4a8d-8c0d-dd76da1f02a5">
+      <Terms xmlns="http://schemas.microsoft.com/office/infopath/2007/PartnerControls"/>
+    </ImageTagsTaxHTField>
+    <TaxCatchAll xmlns="230e9df3-be65-4c73-a93b-d1236ebd677e" xsi:nil="true"/>
+    <MediaServiceKeyPoints xmlns="71af3243-3dd4-4a8d-8c0d-dd76da1f02a5" xsi:nil="true"/>
+  </documentManagement>
+</p:properties>
 </file>
 
-<file path=customXml/itemProps3.xml><?xml version="1.0" encoding="utf-8"?>
+<file path=customXml/itemProps1.xml><?xml version="1.0" encoding="utf-8"?>
 <ds:datastoreItem xmlns:ds="http://schemas.openxmlformats.org/officeDocument/2006/customXml" ds:itemID="{622457D9-12AC-4794-A05E-F1B90FCD8DA7}">
   <ds:schemaRefs>
     <ds:schemaRef ds:uri="http://schemas.microsoft.com/office/2006/metadata/contentType"/>
@@ -10370,6 +13560,26 @@
 </ds:datastoreItem>
 </file>
 
+<file path=customXml/itemProps2.xml><?xml version="1.0" encoding="utf-8"?>
+<ds:datastoreItem xmlns:ds="http://schemas.openxmlformats.org/officeDocument/2006/customXml" ds:itemID="{B7B39BD0-040C-43BE-B0E4-512B09E8003F}">
+  <ds:schemaRefs>
+    <ds:schemaRef ds:uri="http://schemas.microsoft.com/sharepoint/v3/contenttype/forms"/>
+  </ds:schemaRefs>
+</ds:datastoreItem>
+</file>
+
+<file path=customXml/itemProps3.xml><?xml version="1.0" encoding="utf-8"?>
+<ds:datastoreItem xmlns:ds="http://schemas.openxmlformats.org/officeDocument/2006/customXml" ds:itemID="{AB045227-5724-4DBF-9712-031B1BFB2C3C}">
+  <ds:schemaRefs>
+    <ds:schemaRef ds:uri="http://schemas.microsoft.com/office/2006/metadata/properties"/>
+    <ds:schemaRef ds:uri="http://schemas.microsoft.com/office/infopath/2007/PartnerControls"/>
+    <ds:schemaRef ds:uri="http://schemas.microsoft.com/sharepoint/v3"/>
+    <ds:schemaRef ds:uri="71af3243-3dd4-4a8d-8c0d-dd76da1f02a5"/>
+    <ds:schemaRef ds:uri="230e9df3-be65-4c73-a93b-d1236ebd677e"/>
+  </ds:schemaRefs>
+</ds:datastoreItem>
+</file>
+
 <file path=docMetadata/LabelInfo.xml><?xml version="1.0" encoding="utf-8"?>
 <clbl:labelList xmlns:clbl="http://schemas.microsoft.com/office/2020/mipLabelMetadata"/>
 </file>
--- a/Data-Science-Project.pptx
+++ b/Data-Science-Project.pptx
@@ -1167,6 +1167,295 @@
         <p:txBody>
           <a:bodyPr/>
           <a:lstStyle/>
+          <a:p>
+            <a:pPr marL="0" marR="0" lvl="0" indent="0" algn="l" defTabSz="914400" rtl="0" eaLnBrk="1" fontAlgn="auto" latinLnBrk="0" hangingPunct="1">
+              <a:lnSpc>
+                <a:spcPct val="100000"/>
+              </a:lnSpc>
+              <a:spcBef>
+                <a:spcPts val="0"/>
+              </a:spcBef>
+              <a:spcAft>
+                <a:spcPts val="0"/>
+              </a:spcAft>
+              <a:buClrTx/>
+              <a:buSzTx/>
+              <a:buFontTx/>
+              <a:buNone/>
+              <a:tabLst/>
+              <a:defRPr/>
+            </a:pPr>
+            <a:r>
+              <a:rPr lang="en-US" dirty="0"/>
+              <a:t>Extra </a:t>
+            </a:r>
+            <a:r>
+              <a:rPr lang="en-US" dirty="0" err="1"/>
+              <a:t>Fragen</a:t>
+            </a:r>
+            <a:br>
+              <a:rPr lang="en-US" dirty="0"/>
+            </a:br>
+            <a:r>
+              <a:rPr lang="de-DE" altLang="de-DE" sz="1200" dirty="0"/>
+              <a:t> </a:t>
+            </a:r>
+            <a:r>
+              <a:rPr lang="de-DE" altLang="de-DE" sz="1200" dirty="0" err="1"/>
+              <a:t>Which</a:t>
+            </a:r>
+            <a:r>
+              <a:rPr lang="de-DE" altLang="de-DE" sz="1200" dirty="0"/>
+              <a:t> </a:t>
+            </a:r>
+            <a:r>
+              <a:rPr lang="de-DE" altLang="de-DE" sz="1200" dirty="0" err="1"/>
+              <a:t>training</a:t>
+            </a:r>
+            <a:r>
+              <a:rPr lang="de-DE" altLang="de-DE" sz="1200" dirty="0"/>
+              <a:t> </a:t>
+            </a:r>
+            <a:r>
+              <a:rPr lang="de-DE" altLang="de-DE" sz="1200" dirty="0" err="1"/>
+              <a:t>providers</a:t>
+            </a:r>
+            <a:r>
+              <a:rPr lang="de-DE" altLang="de-DE" sz="1200" dirty="0"/>
+              <a:t> </a:t>
+            </a:r>
+            <a:r>
+              <a:rPr lang="de-DE" altLang="de-DE" sz="1200" dirty="0" err="1"/>
+              <a:t>act</a:t>
+            </a:r>
+            <a:r>
+              <a:rPr lang="de-DE" altLang="de-DE" sz="1200" dirty="0"/>
+              <a:t> </a:t>
+            </a:r>
+            <a:r>
+              <a:rPr lang="de-DE" altLang="de-DE" sz="1200" dirty="0" err="1"/>
+              <a:t>as</a:t>
+            </a:r>
+            <a:r>
+              <a:rPr lang="de-DE" altLang="de-DE" sz="1200" dirty="0"/>
+              <a:t> “</a:t>
+            </a:r>
+            <a:r>
+              <a:rPr lang="de-DE" altLang="de-DE" sz="1200" dirty="0" err="1"/>
+              <a:t>suppliers</a:t>
+            </a:r>
+            <a:r>
+              <a:rPr lang="de-DE" altLang="de-DE" sz="1200" dirty="0"/>
+              <a:t>” </a:t>
+            </a:r>
+            <a:r>
+              <a:rPr lang="de-DE" altLang="de-DE" sz="1200" dirty="0" err="1"/>
+              <a:t>to</a:t>
+            </a:r>
+            <a:r>
+              <a:rPr lang="de-DE" altLang="de-DE" sz="1200" dirty="0"/>
+              <a:t> </a:t>
+            </a:r>
+            <a:r>
+              <a:rPr lang="de-DE" altLang="de-DE" sz="1200" dirty="0" err="1"/>
+              <a:t>which</a:t>
+            </a:r>
+            <a:r>
+              <a:rPr lang="de-DE" altLang="de-DE" sz="1200" dirty="0"/>
+              <a:t> </a:t>
+            </a:r>
+            <a:r>
+              <a:rPr lang="de-DE" altLang="de-DE" sz="1200" dirty="0" err="1"/>
+              <a:t>employer</a:t>
+            </a:r>
+            <a:r>
+              <a:rPr lang="de-DE" altLang="de-DE" sz="1200" dirty="0"/>
+              <a:t> </a:t>
+            </a:r>
+            <a:r>
+              <a:rPr lang="de-DE" altLang="de-DE" sz="1200" dirty="0" err="1"/>
+              <a:t>clusters</a:t>
+            </a:r>
+            <a:r>
+              <a:rPr lang="de-DE" altLang="de-DE" sz="1200" dirty="0"/>
+              <a:t>, and do </a:t>
+            </a:r>
+            <a:r>
+              <a:rPr lang="de-DE" altLang="de-DE" sz="1200" dirty="0" err="1"/>
+              <a:t>candidate</a:t>
+            </a:r>
+            <a:r>
+              <a:rPr lang="de-DE" altLang="de-DE" sz="1200" dirty="0"/>
+              <a:t> </a:t>
+            </a:r>
+            <a:r>
+              <a:rPr lang="de-DE" altLang="de-DE" sz="1200" dirty="0" err="1"/>
+              <a:t>profiles</a:t>
+            </a:r>
+            <a:r>
+              <a:rPr lang="de-DE" altLang="de-DE" sz="1200" dirty="0"/>
+              <a:t> fit </a:t>
+            </a:r>
+            <a:r>
+              <a:rPr lang="de-DE" altLang="de-DE" sz="1200" dirty="0" err="1"/>
+              <a:t>those</a:t>
+            </a:r>
+            <a:r>
+              <a:rPr lang="de-DE" altLang="de-DE" sz="1200" dirty="0"/>
+              <a:t> </a:t>
+            </a:r>
+            <a:r>
+              <a:rPr lang="de-DE" altLang="de-DE" sz="1200" dirty="0" err="1"/>
+              <a:t>clusters</a:t>
+            </a:r>
+            <a:r>
+              <a:rPr lang="de-DE" altLang="de-DE" sz="1200" dirty="0"/>
+              <a:t>?</a:t>
+            </a:r>
+          </a:p>
+          <a:p>
+            <a:pPr marL="0" marR="0" lvl="0" indent="0" algn="l" defTabSz="914400" rtl="0" eaLnBrk="1" fontAlgn="auto" latinLnBrk="0" hangingPunct="1">
+              <a:lnSpc>
+                <a:spcPct val="100000"/>
+              </a:lnSpc>
+              <a:spcBef>
+                <a:spcPts val="0"/>
+              </a:spcBef>
+              <a:spcAft>
+                <a:spcPts val="0"/>
+              </a:spcAft>
+              <a:buClrTx/>
+              <a:buSzTx/>
+              <a:buFontTx/>
+              <a:buNone/>
+              <a:tabLst/>
+              <a:defRPr/>
+            </a:pPr>
+            <a:r>
+              <a:rPr lang="de-DE" altLang="de-DE" sz="1200" dirty="0"/>
+              <a:t> Do </a:t>
+            </a:r>
+            <a:r>
+              <a:rPr lang="de-DE" altLang="de-DE" sz="1200" dirty="0" err="1"/>
+              <a:t>the</a:t>
+            </a:r>
+            <a:r>
+              <a:rPr lang="de-DE" altLang="de-DE" sz="1200" dirty="0"/>
+              <a:t> </a:t>
+            </a:r>
+            <a:r>
+              <a:rPr lang="de-DE" altLang="de-DE" sz="1200" dirty="0" err="1"/>
+              <a:t>skills</a:t>
+            </a:r>
+            <a:r>
+              <a:rPr lang="de-DE" altLang="de-DE" sz="1200" dirty="0"/>
+              <a:t> in </a:t>
+            </a:r>
+            <a:r>
+              <a:rPr lang="de-DE" altLang="de-DE" sz="1200" dirty="0" err="1"/>
+              <a:t>job</a:t>
+            </a:r>
+            <a:r>
+              <a:rPr lang="de-DE" altLang="de-DE" sz="1200" dirty="0"/>
+              <a:t> </a:t>
+            </a:r>
+            <a:r>
+              <a:rPr lang="de-DE" altLang="de-DE" sz="1200" dirty="0" err="1"/>
+              <a:t>postings</a:t>
+            </a:r>
+            <a:r>
+              <a:rPr lang="de-DE" altLang="de-DE" sz="1200" dirty="0"/>
+              <a:t> </a:t>
+            </a:r>
+            <a:r>
+              <a:rPr lang="de-DE" altLang="de-DE" sz="1200" dirty="0" err="1"/>
+              <a:t>align</a:t>
+            </a:r>
+            <a:r>
+              <a:rPr lang="de-DE" altLang="de-DE" sz="1200" dirty="0"/>
+              <a:t> </a:t>
+            </a:r>
+            <a:r>
+              <a:rPr lang="de-DE" altLang="de-DE" sz="1200" dirty="0" err="1"/>
+              <a:t>with</a:t>
+            </a:r>
+            <a:r>
+              <a:rPr lang="de-DE" altLang="de-DE" sz="1200" dirty="0"/>
+              <a:t> </a:t>
+            </a:r>
+            <a:r>
+              <a:rPr lang="de-DE" altLang="de-DE" sz="1200" dirty="0" err="1"/>
+              <a:t>the</a:t>
+            </a:r>
+            <a:r>
+              <a:rPr lang="de-DE" altLang="de-DE" sz="1200" dirty="0"/>
+              <a:t> </a:t>
+            </a:r>
+            <a:r>
+              <a:rPr lang="de-DE" altLang="de-DE" sz="1200" dirty="0" err="1"/>
+              <a:t>content</a:t>
+            </a:r>
+            <a:r>
+              <a:rPr lang="de-DE" altLang="de-DE" sz="1200" dirty="0"/>
+              <a:t>/</a:t>
+            </a:r>
+            <a:r>
+              <a:rPr lang="de-DE" altLang="de-DE" sz="1200" dirty="0" err="1"/>
+              <a:t>profiles</a:t>
+            </a:r>
+            <a:r>
+              <a:rPr lang="de-DE" altLang="de-DE" sz="1200" dirty="0"/>
+              <a:t> in </a:t>
+            </a:r>
+            <a:r>
+              <a:rPr lang="de-DE" altLang="de-DE" sz="1200" dirty="0" err="1"/>
+              <a:t>training</a:t>
+            </a:r>
+            <a:r>
+              <a:rPr lang="de-DE" altLang="de-DE" sz="1200" dirty="0"/>
+              <a:t> </a:t>
+            </a:r>
+            <a:r>
+              <a:rPr lang="de-DE" altLang="de-DE" sz="1200" dirty="0" err="1"/>
+              <a:t>programs</a:t>
+            </a:r>
+            <a:r>
+              <a:rPr lang="de-DE" altLang="de-DE" sz="1200" dirty="0"/>
+              <a:t> (</a:t>
+            </a:r>
+            <a:r>
+              <a:rPr lang="de-DE" altLang="de-DE" sz="1200" dirty="0" err="1"/>
+              <a:t>offer</a:t>
+            </a:r>
+            <a:r>
+              <a:rPr lang="de-DE" altLang="de-DE" sz="1200" dirty="0"/>
+              <a:t> </a:t>
+            </a:r>
+            <a:r>
+              <a:rPr lang="de-DE" altLang="de-DE" sz="1200" dirty="0" err="1"/>
+              <a:t>descriptions</a:t>
+            </a:r>
+            <a:r>
+              <a:rPr lang="de-DE" altLang="de-DE" sz="1200" dirty="0"/>
+              <a:t>) and </a:t>
+            </a:r>
+            <a:r>
+              <a:rPr lang="de-DE" altLang="de-DE" sz="1200" dirty="0" err="1"/>
+              <a:t>candidate</a:t>
+            </a:r>
+            <a:r>
+              <a:rPr lang="de-DE" altLang="de-DE" sz="1200" dirty="0"/>
+              <a:t> </a:t>
+            </a:r>
+            <a:r>
+              <a:rPr lang="de-DE" altLang="de-DE" sz="1200" dirty="0" err="1"/>
+              <a:t>profiles</a:t>
+            </a:r>
+            <a:r>
+              <a:rPr lang="de-DE" altLang="de-DE" sz="1200" dirty="0"/>
+              <a:t>?</a:t>
+            </a:r>
+          </a:p>
           <a:p>
             <a:endParaRPr lang="en-US" dirty="0"/>
           </a:p>
@@ -7971,7 +8260,7 @@
           </a:bodyPr>
           <a:lstStyle/>
           <a:p>
-            <a:pPr marL="0" lvl="0" indent="0" eaLnBrk="0" fontAlgn="base" hangingPunct="0">
+            <a:pPr marL="342900" lvl="0" indent="-342900" eaLnBrk="0" fontAlgn="base" hangingPunct="0">
               <a:lnSpc>
                 <a:spcPct val="110000"/>
               </a:lnSpc>
@@ -7981,14 +8270,10 @@
               <a:spcAft>
                 <a:spcPts val="600"/>
               </a:spcAft>
-              <a:buFontTx/>
+              <a:buFont typeface="+mj-lt"/>
               <a:buAutoNum type="arabicPeriod"/>
             </a:pPr>
             <a:r>
-              <a:rPr lang="de-DE" altLang="de-DE" sz="1600" dirty="0"/>
-              <a:t> </a:t>
-            </a:r>
-            <a:r>
               <a:rPr lang="de-DE" altLang="de-DE" sz="1600" dirty="0" err="1"/>
               <a:t>What</a:t>
             </a:r>
@@ -8046,7 +8331,7 @@
             </a:r>
           </a:p>
           <a:p>
-            <a:pPr marL="0" lvl="0" indent="0" eaLnBrk="0" fontAlgn="base" hangingPunct="0">
+            <a:pPr marL="342900" lvl="0" indent="-342900" eaLnBrk="0" fontAlgn="base" hangingPunct="0">
               <a:lnSpc>
                 <a:spcPct val="110000"/>
               </a:lnSpc>
@@ -8056,136 +8341,136 @@
               <a:spcAft>
                 <a:spcPts val="600"/>
               </a:spcAft>
-              <a:buFontTx/>
-              <a:buAutoNum type="arabicPeriod" startAt="2"/>
+              <a:buFont typeface="+mj-lt"/>
+              <a:buAutoNum type="arabicPeriod"/>
             </a:pPr>
             <a:r>
-              <a:rPr lang="de-DE" altLang="de-DE" sz="1600" dirty="0"/>
-              <a:t> How </a:t>
-            </a:r>
-            <a:r>
-              <a:rPr lang="de-DE" altLang="de-DE" sz="1600" dirty="0" err="1"/>
+              <a:rPr lang="de-DE" altLang="de-DE" sz="1600" b="1" dirty="0"/>
+              <a:t>How </a:t>
+            </a:r>
+            <a:r>
+              <a:rPr lang="de-DE" altLang="de-DE" sz="1600" b="1" dirty="0" err="1"/>
               <a:t>does</a:t>
             </a:r>
             <a:r>
-              <a:rPr lang="de-DE" altLang="de-DE" sz="1600" dirty="0"/>
-              <a:t> </a:t>
-            </a:r>
-            <a:r>
-              <a:rPr lang="de-DE" altLang="de-DE" sz="1600" dirty="0" err="1"/>
+              <a:rPr lang="de-DE" altLang="de-DE" sz="1600" b="1" dirty="0"/>
+              <a:t> </a:t>
+            </a:r>
+            <a:r>
+              <a:rPr lang="de-DE" altLang="de-DE" sz="1600" b="1" dirty="0" err="1"/>
               <a:t>increasing</a:t>
             </a:r>
             <a:r>
-              <a:rPr lang="de-DE" altLang="de-DE" sz="1600" dirty="0"/>
-              <a:t> </a:t>
-            </a:r>
-            <a:r>
-              <a:rPr lang="de-DE" altLang="de-DE" sz="1600" dirty="0" err="1"/>
+              <a:rPr lang="de-DE" altLang="de-DE" sz="1600" b="1" dirty="0"/>
+              <a:t> </a:t>
+            </a:r>
+            <a:r>
+              <a:rPr lang="de-DE" altLang="de-DE" sz="1600" b="1" dirty="0" err="1"/>
               <a:t>the</a:t>
             </a:r>
             <a:r>
-              <a:rPr lang="de-DE" altLang="de-DE" sz="1600" dirty="0"/>
-              <a:t> </a:t>
-            </a:r>
-            <a:r>
-              <a:rPr lang="de-DE" altLang="de-DE" sz="1600" dirty="0" err="1"/>
+              <a:rPr lang="de-DE" altLang="de-DE" sz="1600" b="1" dirty="0"/>
+              <a:t> </a:t>
+            </a:r>
+            <a:r>
+              <a:rPr lang="de-DE" altLang="de-DE" sz="1600" b="1" dirty="0" err="1"/>
               <a:t>search</a:t>
             </a:r>
             <a:r>
-              <a:rPr lang="de-DE" altLang="de-DE" sz="1600" dirty="0"/>
-              <a:t> </a:t>
-            </a:r>
-            <a:r>
-              <a:rPr lang="de-DE" altLang="de-DE" sz="1600" dirty="0" err="1"/>
+              <a:rPr lang="de-DE" altLang="de-DE" sz="1600" b="1" dirty="0"/>
+              <a:t> </a:t>
+            </a:r>
+            <a:r>
+              <a:rPr lang="de-DE" altLang="de-DE" sz="1600" b="1" dirty="0" err="1"/>
               <a:t>radius</a:t>
             </a:r>
             <a:r>
-              <a:rPr lang="de-DE" altLang="de-DE" sz="1600" dirty="0"/>
-              <a:t> </a:t>
-            </a:r>
-            <a:r>
-              <a:rPr lang="de-DE" altLang="de-DE" sz="1600" dirty="0" err="1"/>
+              <a:rPr lang="de-DE" altLang="de-DE" sz="1600" b="1" dirty="0"/>
+              <a:t> </a:t>
+            </a:r>
+            <a:r>
+              <a:rPr lang="de-DE" altLang="de-DE" sz="1600" b="1" dirty="0" err="1"/>
               <a:t>change</a:t>
             </a:r>
             <a:r>
-              <a:rPr lang="de-DE" altLang="de-DE" sz="1600" dirty="0"/>
-              <a:t> </a:t>
-            </a:r>
-            <a:r>
-              <a:rPr lang="de-DE" altLang="de-DE" sz="1600" dirty="0" err="1"/>
+              <a:rPr lang="de-DE" altLang="de-DE" sz="1600" b="1" dirty="0"/>
+              <a:t> </a:t>
+            </a:r>
+            <a:r>
+              <a:rPr lang="de-DE" altLang="de-DE" sz="1600" b="1" dirty="0" err="1"/>
               <a:t>the</a:t>
             </a:r>
             <a:r>
-              <a:rPr lang="de-DE" altLang="de-DE" sz="1600" dirty="0"/>
-              <a:t> </a:t>
-            </a:r>
-            <a:r>
-              <a:rPr lang="de-DE" altLang="de-DE" sz="1600" dirty="0" err="1"/>
+              <a:rPr lang="de-DE" altLang="de-DE" sz="1600" b="1" dirty="0"/>
+              <a:t> </a:t>
+            </a:r>
+            <a:r>
+              <a:rPr lang="de-DE" altLang="de-DE" sz="1600" b="1" dirty="0" err="1"/>
               <a:t>number</a:t>
             </a:r>
             <a:r>
-              <a:rPr lang="de-DE" altLang="de-DE" sz="1600" dirty="0"/>
-              <a:t> </a:t>
-            </a:r>
-            <a:r>
-              <a:rPr lang="de-DE" altLang="de-DE" sz="1600" dirty="0" err="1"/>
+              <a:rPr lang="de-DE" altLang="de-DE" sz="1600" b="1" dirty="0"/>
+              <a:t> </a:t>
+            </a:r>
+            <a:r>
+              <a:rPr lang="de-DE" altLang="de-DE" sz="1600" b="1" dirty="0" err="1"/>
               <a:t>of</a:t>
             </a:r>
             <a:r>
-              <a:rPr lang="de-DE" altLang="de-DE" sz="1600" dirty="0"/>
+              <a:rPr lang="de-DE" altLang="de-DE" sz="1600" b="1" dirty="0"/>
               <a:t> “</a:t>
             </a:r>
             <a:r>
-              <a:rPr lang="de-DE" altLang="de-DE" sz="1600" dirty="0" err="1"/>
+              <a:rPr lang="de-DE" altLang="de-DE" sz="1600" b="1" dirty="0" err="1"/>
               <a:t>reachable</a:t>
             </a:r>
             <a:r>
-              <a:rPr lang="de-DE" altLang="de-DE" sz="1600" dirty="0"/>
+              <a:rPr lang="de-DE" altLang="de-DE" sz="1600" b="1" dirty="0"/>
               <a:t>” </a:t>
             </a:r>
             <a:r>
-              <a:rPr lang="de-DE" altLang="de-DE" sz="1600" dirty="0" err="1"/>
+              <a:rPr lang="de-DE" altLang="de-DE" sz="1600" b="1" dirty="0" err="1"/>
               <a:t>jobs</a:t>
             </a:r>
             <a:r>
-              <a:rPr lang="de-DE" altLang="de-DE" sz="1600" dirty="0"/>
-              <a:t> </a:t>
-            </a:r>
-            <a:r>
-              <a:rPr lang="de-DE" altLang="de-DE" sz="1600" dirty="0" err="1"/>
+              <a:rPr lang="de-DE" altLang="de-DE" sz="1600" b="1" dirty="0"/>
+              <a:t> </a:t>
+            </a:r>
+            <a:r>
+              <a:rPr lang="de-DE" altLang="de-DE" sz="1600" b="1" dirty="0" err="1"/>
               <a:t>vs</a:t>
             </a:r>
             <a:r>
-              <a:rPr lang="de-DE" altLang="de-DE" sz="1600" dirty="0"/>
+              <a:rPr lang="de-DE" altLang="de-DE" sz="1600" b="1" dirty="0"/>
               <a:t> . </a:t>
             </a:r>
             <a:r>
-              <a:rPr lang="de-DE" altLang="de-DE" sz="1600" dirty="0" err="1"/>
+              <a:rPr lang="de-DE" altLang="de-DE" sz="1600" b="1" dirty="0" err="1"/>
               <a:t>candidates</a:t>
             </a:r>
             <a:r>
-              <a:rPr lang="de-DE" altLang="de-DE" sz="1600" dirty="0"/>
+              <a:rPr lang="de-DE" altLang="de-DE" sz="1600" b="1" dirty="0"/>
               <a:t> vs. </a:t>
             </a:r>
             <a:r>
-              <a:rPr lang="de-DE" altLang="de-DE" sz="1600" dirty="0" err="1"/>
+              <a:rPr lang="de-DE" altLang="de-DE" sz="1600" b="1" dirty="0" err="1"/>
               <a:t>training</a:t>
             </a:r>
             <a:r>
-              <a:rPr lang="de-DE" altLang="de-DE" sz="1600" dirty="0"/>
-              <a:t> </a:t>
-            </a:r>
-            <a:r>
-              <a:rPr lang="de-DE" altLang="de-DE" sz="1600" dirty="0" err="1"/>
+              <a:rPr lang="de-DE" altLang="de-DE" sz="1600" b="1" dirty="0"/>
+              <a:t> </a:t>
+            </a:r>
+            <a:r>
+              <a:rPr lang="de-DE" altLang="de-DE" sz="1600" b="1" dirty="0" err="1"/>
               <a:t>places</a:t>
             </a:r>
             <a:r>
-              <a:rPr lang="de-DE" altLang="de-DE" sz="1600" dirty="0"/>
+              <a:rPr lang="de-DE" altLang="de-DE" sz="1600" b="1" dirty="0"/>
               <a:t>?</a:t>
             </a:r>
           </a:p>
           <a:p>
-            <a:pPr marL="0" lvl="0" indent="0" eaLnBrk="0" fontAlgn="base" hangingPunct="0">
+            <a:pPr marL="342900" lvl="0" indent="-342900" eaLnBrk="0" fontAlgn="base" hangingPunct="0">
               <a:lnSpc>
                 <a:spcPct val="110000"/>
               </a:lnSpc>
@@ -8195,16 +8480,16 @@
               <a:spcAft>
                 <a:spcPts val="600"/>
               </a:spcAft>
-              <a:buFontTx/>
-              <a:buAutoNum type="arabicPeriod" startAt="3"/>
+              <a:buFont typeface="+mj-lt"/>
+              <a:buAutoNum type="arabicPeriod"/>
             </a:pPr>
             <a:r>
               <a:rPr lang="de-DE" altLang="de-DE" sz="1600" dirty="0"/>
-              <a:t> Do </a:t>
+              <a:t>Do </a:t>
             </a:r>
             <a:r>
               <a:rPr lang="de-DE" altLang="de-DE" sz="1600" dirty="0" err="1"/>
-              <a:t>the</a:t>
+              <a:t>training</a:t>
             </a:r>
             <a:r>
               <a:rPr lang="de-DE" altLang="de-DE" sz="1600" dirty="0"/>
@@ -8212,11 +8497,43 @@
             </a:r>
             <a:r>
               <a:rPr lang="de-DE" altLang="de-DE" sz="1600" dirty="0" err="1"/>
-              <a:t>skills</a:t>
+              <a:t>offerings</a:t>
             </a:r>
             <a:r>
               <a:rPr lang="de-DE" altLang="de-DE" sz="1600" dirty="0"/>
-              <a:t> in </a:t>
+              <a:t> in a </a:t>
+            </a:r>
+            <a:r>
+              <a:rPr lang="de-DE" altLang="de-DE" sz="1600" dirty="0" err="1"/>
+              <a:t>region</a:t>
+            </a:r>
+            <a:r>
+              <a:rPr lang="de-DE" altLang="de-DE" sz="1600" dirty="0"/>
+              <a:t> </a:t>
+            </a:r>
+            <a:r>
+              <a:rPr lang="de-DE" altLang="de-DE" sz="1600" dirty="0" err="1"/>
+              <a:t>cover</a:t>
+            </a:r>
+            <a:r>
+              <a:rPr lang="de-DE" altLang="de-DE" sz="1600" dirty="0"/>
+              <a:t> medium- </a:t>
+            </a:r>
+            <a:r>
+              <a:rPr lang="de-DE" altLang="de-DE" sz="1600" dirty="0" err="1"/>
+              <a:t>to</a:t>
+            </a:r>
+            <a:r>
+              <a:rPr lang="de-DE" altLang="de-DE" sz="1600" dirty="0"/>
+              <a:t> </a:t>
+            </a:r>
+            <a:r>
+              <a:rPr lang="de-DE" altLang="de-DE" sz="1600" dirty="0" err="1"/>
+              <a:t>long</a:t>
+            </a:r>
+            <a:r>
+              <a:rPr lang="de-DE" altLang="de-DE" sz="1600" dirty="0"/>
+              <a:t>-term </a:t>
             </a:r>
             <a:r>
               <a:rPr lang="de-DE" altLang="de-DE" sz="1600" dirty="0" err="1"/>
@@ -8228,15 +8545,15 @@
             </a:r>
             <a:r>
               <a:rPr lang="de-DE" altLang="de-DE" sz="1600" dirty="0" err="1"/>
-              <a:t>postings</a:t>
+              <a:t>demand</a:t>
             </a:r>
             <a:r>
               <a:rPr lang="de-DE" altLang="de-DE" sz="1600" dirty="0"/>
-              <a:t> </a:t>
+              <a:t>, and </a:t>
             </a:r>
             <a:r>
               <a:rPr lang="de-DE" altLang="de-DE" sz="1600" dirty="0" err="1"/>
-              <a:t>align</a:t>
+              <a:t>is</a:t>
             </a:r>
             <a:r>
               <a:rPr lang="de-DE" altLang="de-DE" sz="1600" dirty="0"/>
@@ -8244,67 +8561,19 @@
             </a:r>
             <a:r>
               <a:rPr lang="de-DE" altLang="de-DE" sz="1600" dirty="0" err="1"/>
-              <a:t>with</a:t>
+              <a:t>there</a:t>
             </a:r>
             <a:r>
               <a:rPr lang="de-DE" altLang="de-DE" sz="1600" dirty="0"/>
-              <a:t> </a:t>
+              <a:t> a </a:t>
             </a:r>
             <a:r>
               <a:rPr lang="de-DE" altLang="de-DE" sz="1600" dirty="0" err="1"/>
-              <a:t>the</a:t>
+              <a:t>sufficient</a:t>
             </a:r>
             <a:r>
               <a:rPr lang="de-DE" altLang="de-DE" sz="1600" dirty="0"/>
               <a:t> </a:t>
-            </a:r>
-            <a:r>
-              <a:rPr lang="de-DE" altLang="de-DE" sz="1600" dirty="0" err="1"/>
-              <a:t>content</a:t>
-            </a:r>
-            <a:r>
-              <a:rPr lang="de-DE" altLang="de-DE" sz="1600" dirty="0"/>
-              <a:t>/</a:t>
-            </a:r>
-            <a:r>
-              <a:rPr lang="de-DE" altLang="de-DE" sz="1600" dirty="0" err="1"/>
-              <a:t>profiles</a:t>
-            </a:r>
-            <a:r>
-              <a:rPr lang="de-DE" altLang="de-DE" sz="1600" dirty="0"/>
-              <a:t> in </a:t>
-            </a:r>
-            <a:r>
-              <a:rPr lang="de-DE" altLang="de-DE" sz="1600" dirty="0" err="1"/>
-              <a:t>training</a:t>
-            </a:r>
-            <a:r>
-              <a:rPr lang="de-DE" altLang="de-DE" sz="1600" dirty="0"/>
-              <a:t> </a:t>
-            </a:r>
-            <a:r>
-              <a:rPr lang="de-DE" altLang="de-DE" sz="1600" dirty="0" err="1"/>
-              <a:t>programs</a:t>
-            </a:r>
-            <a:r>
-              <a:rPr lang="de-DE" altLang="de-DE" sz="1600" dirty="0"/>
-              <a:t> (</a:t>
-            </a:r>
-            <a:r>
-              <a:rPr lang="de-DE" altLang="de-DE" sz="1600" dirty="0" err="1"/>
-              <a:t>offer</a:t>
-            </a:r>
-            <a:r>
-              <a:rPr lang="de-DE" altLang="de-DE" sz="1600" dirty="0"/>
-              <a:t> </a:t>
-            </a:r>
-            <a:r>
-              <a:rPr lang="de-DE" altLang="de-DE" sz="1600" dirty="0" err="1"/>
-              <a:t>descriptions</a:t>
-            </a:r>
-            <a:r>
-              <a:rPr lang="de-DE" altLang="de-DE" sz="1600" dirty="0"/>
-              <a:t>) and </a:t>
             </a:r>
             <a:r>
               <a:rPr lang="de-DE" altLang="de-DE" sz="1600" dirty="0" err="1"/>
@@ -8312,19 +8581,11 @@
             </a:r>
             <a:r>
               <a:rPr lang="de-DE" altLang="de-DE" sz="1600" dirty="0"/>
-              <a:t> </a:t>
-            </a:r>
-            <a:r>
-              <a:rPr lang="de-DE" altLang="de-DE" sz="1600" dirty="0" err="1"/>
-              <a:t>profiles</a:t>
-            </a:r>
-            <a:r>
-              <a:rPr lang="de-DE" altLang="de-DE" sz="1600" dirty="0"/>
-              <a:t>?</a:t>
-            </a:r>
-          </a:p>
-          <a:p>
-            <a:pPr marL="0" lvl="0" indent="0" eaLnBrk="0" fontAlgn="base" hangingPunct="0">
+              <a:t> pool?</a:t>
+            </a:r>
+          </a:p>
+          <a:p>
+            <a:pPr marL="342900" lvl="0" indent="-342900" eaLnBrk="0" fontAlgn="base" hangingPunct="0">
               <a:lnSpc>
                 <a:spcPct val="110000"/>
               </a:lnSpc>
@@ -8334,258 +8595,12 @@
               <a:spcAft>
                 <a:spcPts val="600"/>
               </a:spcAft>
-              <a:buFontTx/>
-              <a:buAutoNum type="arabicPeriod" startAt="4"/>
+              <a:buFont typeface="+mj-lt"/>
+              <a:buAutoNum type="arabicPeriod"/>
             </a:pPr>
             <a:r>
               <a:rPr lang="de-DE" altLang="de-DE" sz="1600" dirty="0"/>
-              <a:t> Do </a:t>
-            </a:r>
-            <a:r>
-              <a:rPr lang="de-DE" altLang="de-DE" sz="1600" dirty="0" err="1"/>
-              <a:t>training</a:t>
-            </a:r>
-            <a:r>
-              <a:rPr lang="de-DE" altLang="de-DE" sz="1600" dirty="0"/>
-              <a:t> </a:t>
-            </a:r>
-            <a:r>
-              <a:rPr lang="de-DE" altLang="de-DE" sz="1600" dirty="0" err="1"/>
-              <a:t>offerings</a:t>
-            </a:r>
-            <a:r>
-              <a:rPr lang="de-DE" altLang="de-DE" sz="1600" dirty="0"/>
-              <a:t> in a </a:t>
-            </a:r>
-            <a:r>
-              <a:rPr lang="de-DE" altLang="de-DE" sz="1600" dirty="0" err="1"/>
-              <a:t>region</a:t>
-            </a:r>
-            <a:r>
-              <a:rPr lang="de-DE" altLang="de-DE" sz="1600" dirty="0"/>
-              <a:t> </a:t>
-            </a:r>
-            <a:r>
-              <a:rPr lang="de-DE" altLang="de-DE" sz="1600" dirty="0" err="1"/>
-              <a:t>cover</a:t>
-            </a:r>
-            <a:r>
-              <a:rPr lang="de-DE" altLang="de-DE" sz="1600" dirty="0"/>
-              <a:t> medium- </a:t>
-            </a:r>
-            <a:r>
-              <a:rPr lang="de-DE" altLang="de-DE" sz="1600" dirty="0" err="1"/>
-              <a:t>to</a:t>
-            </a:r>
-            <a:r>
-              <a:rPr lang="de-DE" altLang="de-DE" sz="1600" dirty="0"/>
-              <a:t> </a:t>
-            </a:r>
-            <a:r>
-              <a:rPr lang="de-DE" altLang="de-DE" sz="1600" dirty="0" err="1"/>
-              <a:t>long</a:t>
-            </a:r>
-            <a:r>
-              <a:rPr lang="de-DE" altLang="de-DE" sz="1600" dirty="0"/>
-              <a:t>-term </a:t>
-            </a:r>
-            <a:r>
-              <a:rPr lang="de-DE" altLang="de-DE" sz="1600" dirty="0" err="1"/>
-              <a:t>job</a:t>
-            </a:r>
-            <a:r>
-              <a:rPr lang="de-DE" altLang="de-DE" sz="1600" dirty="0"/>
-              <a:t> </a:t>
-            </a:r>
-            <a:r>
-              <a:rPr lang="de-DE" altLang="de-DE" sz="1600" dirty="0" err="1"/>
-              <a:t>demand</a:t>
-            </a:r>
-            <a:r>
-              <a:rPr lang="de-DE" altLang="de-DE" sz="1600" dirty="0"/>
-              <a:t>, and </a:t>
-            </a:r>
-            <a:r>
-              <a:rPr lang="de-DE" altLang="de-DE" sz="1600" dirty="0" err="1"/>
-              <a:t>is</a:t>
-            </a:r>
-            <a:r>
-              <a:rPr lang="de-DE" altLang="de-DE" sz="1600" dirty="0"/>
-              <a:t> </a:t>
-            </a:r>
-            <a:r>
-              <a:rPr lang="de-DE" altLang="de-DE" sz="1600" dirty="0" err="1"/>
-              <a:t>there</a:t>
-            </a:r>
-            <a:r>
-              <a:rPr lang="de-DE" altLang="de-DE" sz="1600" dirty="0"/>
-              <a:t> a </a:t>
-            </a:r>
-            <a:r>
-              <a:rPr lang="de-DE" altLang="de-DE" sz="1600" dirty="0" err="1"/>
-              <a:t>sufficient</a:t>
-            </a:r>
-            <a:r>
-              <a:rPr lang="de-DE" altLang="de-DE" sz="1600" dirty="0"/>
-              <a:t> </a:t>
-            </a:r>
-            <a:r>
-              <a:rPr lang="de-DE" altLang="de-DE" sz="1600" dirty="0" err="1"/>
-              <a:t>candidate</a:t>
-            </a:r>
-            <a:r>
-              <a:rPr lang="de-DE" altLang="de-DE" sz="1600" dirty="0"/>
-              <a:t> pool?</a:t>
-            </a:r>
-          </a:p>
-          <a:p>
-            <a:pPr marL="0" lvl="0" indent="0" eaLnBrk="0" fontAlgn="base" hangingPunct="0">
-              <a:lnSpc>
-                <a:spcPct val="110000"/>
-              </a:lnSpc>
-              <a:spcBef>
-                <a:spcPct val="0"/>
-              </a:spcBef>
-              <a:spcAft>
-                <a:spcPts val="600"/>
-              </a:spcAft>
-              <a:buFontTx/>
-              <a:buAutoNum type="arabicPeriod" startAt="5"/>
-            </a:pPr>
-            <a:r>
-              <a:rPr lang="de-DE" altLang="de-DE" sz="1600" dirty="0"/>
-              <a:t> </a:t>
-            </a:r>
-            <a:r>
-              <a:rPr lang="de-DE" altLang="de-DE" sz="1600" dirty="0" err="1"/>
-              <a:t>Which</a:t>
-            </a:r>
-            <a:r>
-              <a:rPr lang="de-DE" altLang="de-DE" sz="1600" dirty="0"/>
-              <a:t> </a:t>
-            </a:r>
-            <a:r>
-              <a:rPr lang="de-DE" altLang="de-DE" sz="1600" dirty="0" err="1"/>
-              <a:t>training</a:t>
-            </a:r>
-            <a:r>
-              <a:rPr lang="de-DE" altLang="de-DE" sz="1600" dirty="0"/>
-              <a:t> </a:t>
-            </a:r>
-            <a:r>
-              <a:rPr lang="de-DE" altLang="de-DE" sz="1600" dirty="0" err="1"/>
-              <a:t>providers</a:t>
-            </a:r>
-            <a:r>
-              <a:rPr lang="de-DE" altLang="de-DE" sz="1600" dirty="0"/>
-              <a:t> </a:t>
-            </a:r>
-            <a:r>
-              <a:rPr lang="de-DE" altLang="de-DE" sz="1600" dirty="0" err="1"/>
-              <a:t>act</a:t>
-            </a:r>
-            <a:r>
-              <a:rPr lang="de-DE" altLang="de-DE" sz="1600" dirty="0"/>
-              <a:t> </a:t>
-            </a:r>
-            <a:r>
-              <a:rPr lang="de-DE" altLang="de-DE" sz="1600" dirty="0" err="1"/>
-              <a:t>as</a:t>
-            </a:r>
-            <a:r>
-              <a:rPr lang="de-DE" altLang="de-DE" sz="1600" dirty="0"/>
-              <a:t> “</a:t>
-            </a:r>
-            <a:r>
-              <a:rPr lang="de-DE" altLang="de-DE" sz="1600" dirty="0" err="1"/>
-              <a:t>suppliers</a:t>
-            </a:r>
-            <a:r>
-              <a:rPr lang="de-DE" altLang="de-DE" sz="1600" dirty="0"/>
-              <a:t>” </a:t>
-            </a:r>
-            <a:r>
-              <a:rPr lang="de-DE" altLang="de-DE" sz="1600" dirty="0" err="1"/>
-              <a:t>to</a:t>
-            </a:r>
-            <a:r>
-              <a:rPr lang="de-DE" altLang="de-DE" sz="1600" dirty="0"/>
-              <a:t> </a:t>
-            </a:r>
-            <a:r>
-              <a:rPr lang="de-DE" altLang="de-DE" sz="1600" dirty="0" err="1"/>
-              <a:t>which</a:t>
-            </a:r>
-            <a:r>
-              <a:rPr lang="de-DE" altLang="de-DE" sz="1600" dirty="0"/>
-              <a:t> </a:t>
-            </a:r>
-            <a:r>
-              <a:rPr lang="de-DE" altLang="de-DE" sz="1600" dirty="0" err="1"/>
-              <a:t>employer</a:t>
-            </a:r>
-            <a:r>
-              <a:rPr lang="de-DE" altLang="de-DE" sz="1600" dirty="0"/>
-              <a:t> </a:t>
-            </a:r>
-            <a:r>
-              <a:rPr lang="de-DE" altLang="de-DE" sz="1600" dirty="0" err="1"/>
-              <a:t>clusters</a:t>
-            </a:r>
-            <a:r>
-              <a:rPr lang="de-DE" altLang="de-DE" sz="1600" dirty="0"/>
-              <a:t>, and do </a:t>
-            </a:r>
-            <a:r>
-              <a:rPr lang="de-DE" altLang="de-DE" sz="1600" dirty="0" err="1"/>
-              <a:t>candidate</a:t>
-            </a:r>
-            <a:r>
-              <a:rPr lang="de-DE" altLang="de-DE" sz="1600" dirty="0"/>
-              <a:t> </a:t>
-            </a:r>
-            <a:r>
-              <a:rPr lang="de-DE" altLang="de-DE" sz="1600" dirty="0" err="1"/>
-              <a:t>profiles</a:t>
-            </a:r>
-            <a:r>
-              <a:rPr lang="de-DE" altLang="de-DE" sz="1600" dirty="0"/>
-              <a:t> fit </a:t>
-            </a:r>
-            <a:r>
-              <a:rPr lang="de-DE" altLang="de-DE" sz="1600" dirty="0" err="1"/>
-              <a:t>those</a:t>
-            </a:r>
-            <a:r>
-              <a:rPr lang="de-DE" altLang="de-DE" sz="1600" dirty="0"/>
-              <a:t> </a:t>
-            </a:r>
-            <a:r>
-              <a:rPr lang="de-DE" altLang="de-DE" sz="1600" dirty="0" err="1"/>
-              <a:t>clusters</a:t>
-            </a:r>
-            <a:r>
-              <a:rPr lang="de-DE" altLang="de-DE" sz="1600" dirty="0"/>
-              <a:t>?</a:t>
-            </a:r>
-          </a:p>
-          <a:p>
-            <a:pPr marL="0" lvl="0" indent="0" eaLnBrk="0" fontAlgn="base" hangingPunct="0">
-              <a:lnSpc>
-                <a:spcPct val="110000"/>
-              </a:lnSpc>
-              <a:spcBef>
-                <a:spcPct val="0"/>
-              </a:spcBef>
-              <a:spcAft>
-                <a:spcPts val="600"/>
-              </a:spcAft>
-              <a:buFontTx/>
-              <a:buAutoNum type="arabicPeriod" startAt="6"/>
-            </a:pPr>
-            <a:r>
-              <a:rPr lang="de-DE" altLang="de-DE" sz="1600" dirty="0"/>
-              <a:t> Are </a:t>
+              <a:t>Are </a:t>
             </a:r>
             <a:r>
               <a:rPr lang="de-DE" altLang="de-DE" sz="1600" dirty="0" err="1"/>
@@ -8862,315 +8877,287 @@
         </p:spPr>
         <p:txBody>
           <a:bodyPr>
-            <a:normAutofit lnSpcReduction="10000"/>
+            <a:normAutofit/>
           </a:bodyPr>
           <a:lstStyle/>
           <a:p>
-            <a:pPr lvl="0" eaLnBrk="0" fontAlgn="base" hangingPunct="0">
+            <a:pPr marL="342900" lvl="0" indent="-342900" eaLnBrk="0" fontAlgn="base" hangingPunct="0">
               <a:spcBef>
                 <a:spcPct val="0"/>
               </a:spcBef>
               <a:spcAft>
                 <a:spcPts val="600"/>
               </a:spcAft>
-              <a:buFontTx/>
-              <a:buAutoNum type="arabicPeriod" startAt="7"/>
+              <a:buFont typeface="+mj-lt"/>
+              <a:buAutoNum type="arabicPeriod" startAt="5"/>
             </a:pPr>
             <a:r>
-              <a:rPr lang="de-DE" altLang="de-DE" sz="1600" dirty="0"/>
-              <a:t> </a:t>
-            </a:r>
-            <a:r>
-              <a:rPr lang="de-DE" altLang="de-DE" sz="1600" dirty="0" err="1"/>
+              <a:rPr lang="de-DE" altLang="de-DE" sz="1600" b="1" dirty="0" err="1"/>
               <a:t>What</a:t>
             </a:r>
             <a:r>
-              <a:rPr lang="de-DE" altLang="de-DE" sz="1600" dirty="0"/>
-              <a:t> </a:t>
-            </a:r>
-            <a:r>
-              <a:rPr lang="de-DE" altLang="de-DE" sz="1600" dirty="0" err="1"/>
+              <a:rPr lang="de-DE" altLang="de-DE" sz="1600" b="1" dirty="0"/>
+              <a:t> </a:t>
+            </a:r>
+            <a:r>
+              <a:rPr lang="de-DE" altLang="de-DE" sz="1600" b="1" dirty="0" err="1"/>
               <a:t>is</a:t>
             </a:r>
             <a:r>
-              <a:rPr lang="de-DE" altLang="de-DE" sz="1600" dirty="0"/>
-              <a:t> </a:t>
-            </a:r>
-            <a:r>
-              <a:rPr lang="de-DE" altLang="de-DE" sz="1600" dirty="0" err="1"/>
+              <a:rPr lang="de-DE" altLang="de-DE" sz="1600" b="1" dirty="0"/>
+              <a:t> </a:t>
+            </a:r>
+            <a:r>
+              <a:rPr lang="de-DE" altLang="de-DE" sz="1600" b="1" dirty="0" err="1"/>
               <a:t>the</a:t>
             </a:r>
             <a:r>
-              <a:rPr lang="de-DE" altLang="de-DE" sz="1600" dirty="0"/>
-              <a:t> </a:t>
-            </a:r>
-            <a:r>
-              <a:rPr lang="de-DE" altLang="de-DE" sz="1600" dirty="0" err="1"/>
+              <a:rPr lang="de-DE" altLang="de-DE" sz="1600" b="1" dirty="0"/>
+              <a:t> </a:t>
+            </a:r>
+            <a:r>
+              <a:rPr lang="de-DE" altLang="de-DE" sz="1600" b="1" dirty="0" err="1"/>
               <a:t>distribution</a:t>
             </a:r>
             <a:r>
-              <a:rPr lang="de-DE" altLang="de-DE" sz="1600" dirty="0"/>
-              <a:t> </a:t>
-            </a:r>
-            <a:r>
-              <a:rPr lang="de-DE" altLang="de-DE" sz="1600" dirty="0" err="1"/>
+              <a:rPr lang="de-DE" altLang="de-DE" sz="1600" b="1" dirty="0"/>
+              <a:t> </a:t>
+            </a:r>
+            <a:r>
+              <a:rPr lang="de-DE" altLang="de-DE" sz="1600" b="1" dirty="0" err="1"/>
               <a:t>of</a:t>
             </a:r>
             <a:r>
-              <a:rPr lang="de-DE" altLang="de-DE" sz="1600" dirty="0"/>
-              <a:t> </a:t>
-            </a:r>
-            <a:r>
-              <a:rPr lang="de-DE" altLang="de-DE" sz="1600" dirty="0" err="1"/>
+              <a:rPr lang="de-DE" altLang="de-DE" sz="1600" b="1" dirty="0"/>
+              <a:t> </a:t>
+            </a:r>
+            <a:r>
+              <a:rPr lang="de-DE" altLang="de-DE" sz="1600" b="1" dirty="0" err="1"/>
               <a:t>qualifications</a:t>
             </a:r>
             <a:r>
-              <a:rPr lang="de-DE" altLang="de-DE" sz="1600" dirty="0"/>
+              <a:rPr lang="de-DE" altLang="de-DE" sz="1600" b="1" dirty="0"/>
               <a:t>/</a:t>
             </a:r>
             <a:r>
-              <a:rPr lang="de-DE" altLang="de-DE" sz="1600" dirty="0" err="1"/>
+              <a:rPr lang="de-DE" altLang="de-DE" sz="1600" b="1" dirty="0" err="1"/>
               <a:t>educational</a:t>
             </a:r>
             <a:r>
-              <a:rPr lang="de-DE" altLang="de-DE" sz="1600" dirty="0"/>
-              <a:t> </a:t>
-            </a:r>
-            <a:r>
-              <a:rPr lang="de-DE" altLang="de-DE" sz="1600" dirty="0" err="1"/>
+              <a:rPr lang="de-DE" altLang="de-DE" sz="1600" b="1" dirty="0"/>
+              <a:t> </a:t>
+            </a:r>
+            <a:r>
+              <a:rPr lang="de-DE" altLang="de-DE" sz="1600" b="1" dirty="0" err="1"/>
               <a:t>degrees</a:t>
             </a:r>
             <a:r>
-              <a:rPr lang="de-DE" altLang="de-DE" sz="1600" dirty="0"/>
+              <a:rPr lang="de-DE" altLang="de-DE" sz="1600" b="1" dirty="0"/>
               <a:t>/</a:t>
             </a:r>
             <a:r>
-              <a:rPr lang="de-DE" altLang="de-DE" sz="1600" dirty="0" err="1"/>
+              <a:rPr lang="de-DE" altLang="de-DE" sz="1600" b="1" dirty="0" err="1"/>
               <a:t>skills</a:t>
             </a:r>
             <a:r>
-              <a:rPr lang="de-DE" altLang="de-DE" sz="1600" dirty="0"/>
-              <a:t> </a:t>
-            </a:r>
-            <a:r>
-              <a:rPr lang="de-DE" altLang="de-DE" sz="1600" dirty="0" err="1"/>
+              <a:rPr lang="de-DE" altLang="de-DE" sz="1600" b="1" dirty="0"/>
+              <a:t> </a:t>
+            </a:r>
+            <a:r>
+              <a:rPr lang="de-DE" altLang="de-DE" sz="1600" b="1" dirty="0" err="1"/>
               <a:t>by</a:t>
             </a:r>
             <a:r>
-              <a:rPr lang="de-DE" altLang="de-DE" sz="1600" dirty="0"/>
-              <a:t> </a:t>
-            </a:r>
-            <a:r>
-              <a:rPr lang="de-DE" altLang="de-DE" sz="1600" dirty="0" err="1"/>
+              <a:rPr lang="de-DE" altLang="de-DE" sz="1600" b="1" dirty="0"/>
+              <a:t> </a:t>
+            </a:r>
+            <a:r>
+              <a:rPr lang="de-DE" altLang="de-DE" sz="1600" b="1" dirty="0" err="1"/>
               <a:t>region</a:t>
             </a:r>
             <a:r>
-              <a:rPr lang="de-DE" altLang="de-DE" sz="1600" dirty="0"/>
-              <a:t> (</a:t>
-            </a:r>
-            <a:r>
-              <a:rPr lang="de-DE" altLang="de-DE" sz="1600" dirty="0" err="1"/>
-              <a:t>where</a:t>
-            </a:r>
-            <a:r>
-              <a:rPr lang="de-DE" altLang="de-DE" sz="1600" dirty="0"/>
-              <a:t>/</a:t>
-            </a:r>
-            <a:r>
-              <a:rPr lang="de-DE" altLang="de-DE" sz="1600" dirty="0" err="1"/>
-              <a:t>re</a:t>
-            </a:r>
-            <a:r>
-              <a:rPr lang="de-DE" altLang="de-DE" sz="1600" dirty="0"/>
-              <a:t>/</a:t>
-            </a:r>
-            <a:r>
-              <a:rPr lang="de-DE" altLang="de-DE" sz="1600" dirty="0" err="1"/>
-              <a:t>zip</a:t>
-            </a:r>
-            <a:r>
-              <a:rPr lang="de-DE" altLang="de-DE" sz="1600" dirty="0"/>
-              <a:t>) and </a:t>
-            </a:r>
-            <a:r>
-              <a:rPr lang="de-DE" altLang="de-DE" sz="1600" dirty="0" err="1"/>
+              <a:rPr lang="de-DE" altLang="de-DE" sz="1600" b="1" dirty="0"/>
+              <a:t> and </a:t>
+            </a:r>
+            <a:r>
+              <a:rPr lang="de-DE" altLang="de-DE" sz="1600" b="1" dirty="0" err="1"/>
               <a:t>occupational</a:t>
             </a:r>
             <a:r>
-              <a:rPr lang="de-DE" altLang="de-DE" sz="1600" dirty="0"/>
-              <a:t> </a:t>
-            </a:r>
-            <a:r>
-              <a:rPr lang="de-DE" altLang="de-DE" sz="1600" dirty="0" err="1"/>
+              <a:rPr lang="de-DE" altLang="de-DE" sz="1600" b="1" dirty="0"/>
+              <a:t> </a:t>
+            </a:r>
+            <a:r>
+              <a:rPr lang="de-DE" altLang="de-DE" sz="1600" b="1" dirty="0" err="1"/>
               <a:t>field</a:t>
             </a:r>
             <a:r>
-              <a:rPr lang="de-DE" altLang="de-DE" sz="1600" dirty="0"/>
+              <a:rPr lang="de-DE" altLang="de-DE" sz="1600" b="1" dirty="0"/>
               <a:t>?</a:t>
             </a:r>
           </a:p>
           <a:p>
-            <a:pPr lvl="0" eaLnBrk="0" fontAlgn="base" hangingPunct="0">
+            <a:pPr marL="342900" lvl="0" indent="-342900" eaLnBrk="0" fontAlgn="base" hangingPunct="0">
               <a:spcBef>
                 <a:spcPct val="0"/>
               </a:spcBef>
               <a:spcAft>
                 <a:spcPts val="600"/>
               </a:spcAft>
-              <a:buFontTx/>
-              <a:buAutoNum type="arabicPeriod" startAt="8"/>
+              <a:buFont typeface="+mj-lt"/>
+              <a:buAutoNum type="arabicPeriod" startAt="5"/>
             </a:pPr>
             <a:r>
-              <a:rPr lang="de-DE" altLang="de-DE" sz="1600" dirty="0"/>
-              <a:t> How </a:t>
-            </a:r>
-            <a:r>
-              <a:rPr lang="de-DE" altLang="de-DE" sz="1600" dirty="0" err="1"/>
+              <a:rPr lang="de-DE" altLang="de-DE" sz="1600" b="1" dirty="0"/>
+              <a:t>How </a:t>
+            </a:r>
+            <a:r>
+              <a:rPr lang="de-DE" altLang="de-DE" sz="1600" b="1" dirty="0" err="1"/>
               <a:t>many</a:t>
             </a:r>
             <a:r>
-              <a:rPr lang="de-DE" altLang="de-DE" sz="1600" dirty="0"/>
-              <a:t> </a:t>
-            </a:r>
-            <a:r>
-              <a:rPr lang="de-DE" altLang="de-DE" sz="1600" dirty="0" err="1"/>
+              <a:rPr lang="de-DE" altLang="de-DE" sz="1600" b="1" dirty="0"/>
+              <a:t> </a:t>
+            </a:r>
+            <a:r>
+              <a:rPr lang="de-DE" altLang="de-DE" sz="1600" b="1" dirty="0" err="1"/>
               <a:t>entry</a:t>
             </a:r>
             <a:r>
-              <a:rPr lang="de-DE" altLang="de-DE" sz="1600" dirty="0"/>
+              <a:rPr lang="de-DE" altLang="de-DE" sz="1600" b="1" dirty="0"/>
               <a:t>-level vs. </a:t>
             </a:r>
             <a:r>
-              <a:rPr lang="de-DE" altLang="de-DE" sz="1600" dirty="0" err="1"/>
+              <a:rPr lang="de-DE" altLang="de-DE" sz="1600" b="1" dirty="0" err="1"/>
               <a:t>senior</a:t>
             </a:r>
             <a:r>
-              <a:rPr lang="de-DE" altLang="de-DE" sz="1600" dirty="0"/>
-              <a:t> </a:t>
-            </a:r>
-            <a:r>
-              <a:rPr lang="de-DE" altLang="de-DE" sz="1600" dirty="0" err="1"/>
+              <a:rPr lang="de-DE" altLang="de-DE" sz="1600" b="1" dirty="0"/>
+              <a:t> </a:t>
+            </a:r>
+            <a:r>
+              <a:rPr lang="de-DE" altLang="de-DE" sz="1600" b="1" dirty="0" err="1"/>
               <a:t>roles</a:t>
             </a:r>
             <a:r>
-              <a:rPr lang="de-DE" altLang="de-DE" sz="1600" dirty="0"/>
-              <a:t> </a:t>
-            </a:r>
-            <a:r>
-              <a:rPr lang="de-DE" altLang="de-DE" sz="1600" dirty="0" err="1"/>
+              <a:rPr lang="de-DE" altLang="de-DE" sz="1600" b="1" dirty="0"/>
+              <a:t> </a:t>
+            </a:r>
+            <a:r>
+              <a:rPr lang="de-DE" altLang="de-DE" sz="1600" b="1" dirty="0" err="1"/>
               <a:t>are</a:t>
             </a:r>
             <a:r>
-              <a:rPr lang="de-DE" altLang="de-DE" sz="1600" dirty="0"/>
-              <a:t> </a:t>
-            </a:r>
-            <a:r>
-              <a:rPr lang="de-DE" altLang="de-DE" sz="1600" dirty="0" err="1"/>
+              <a:rPr lang="de-DE" altLang="de-DE" sz="1600" b="1" dirty="0"/>
+              <a:t> </a:t>
+            </a:r>
+            <a:r>
+              <a:rPr lang="de-DE" altLang="de-DE" sz="1600" b="1" dirty="0" err="1"/>
               <a:t>advertised</a:t>
             </a:r>
             <a:r>
-              <a:rPr lang="de-DE" altLang="de-DE" sz="1600" dirty="0"/>
-              <a:t> </a:t>
-            </a:r>
-            <a:r>
-              <a:rPr lang="de-DE" altLang="de-DE" sz="1600" dirty="0" err="1"/>
+              <a:rPr lang="de-DE" altLang="de-DE" sz="1600" b="1" dirty="0"/>
+              <a:t> </a:t>
+            </a:r>
+            <a:r>
+              <a:rPr lang="de-DE" altLang="de-DE" sz="1600" b="1" dirty="0" err="1"/>
               <a:t>within</a:t>
             </a:r>
             <a:r>
-              <a:rPr lang="de-DE" altLang="de-DE" sz="1600" dirty="0"/>
-              <a:t> </a:t>
-            </a:r>
-            <a:r>
-              <a:rPr lang="de-DE" altLang="de-DE" sz="1600" dirty="0" err="1"/>
+              <a:rPr lang="de-DE" altLang="de-DE" sz="1600" b="1" dirty="0"/>
+              <a:t> </a:t>
+            </a:r>
+            <a:r>
+              <a:rPr lang="de-DE" altLang="de-DE" sz="1600" b="1" dirty="0" err="1"/>
               <a:t>occupational</a:t>
             </a:r>
             <a:r>
-              <a:rPr lang="de-DE" altLang="de-DE" sz="1600" dirty="0"/>
-              <a:t> </a:t>
-            </a:r>
-            <a:r>
-              <a:rPr lang="de-DE" altLang="de-DE" sz="1600" dirty="0" err="1"/>
+              <a:rPr lang="de-DE" altLang="de-DE" sz="1600" b="1" dirty="0"/>
+              <a:t> </a:t>
+            </a:r>
+            <a:r>
+              <a:rPr lang="de-DE" altLang="de-DE" sz="1600" b="1" dirty="0" err="1"/>
               <a:t>field</a:t>
             </a:r>
             <a:r>
-              <a:rPr lang="de-DE" altLang="de-DE" sz="1600" dirty="0"/>
+              <a:rPr lang="de-DE" altLang="de-DE" sz="1600" b="1" dirty="0"/>
               <a:t> Y, and </a:t>
             </a:r>
             <a:r>
-              <a:rPr lang="de-DE" altLang="de-DE" sz="1600" dirty="0" err="1"/>
+              <a:rPr lang="de-DE" altLang="de-DE" sz="1600" b="1" dirty="0" err="1"/>
               <a:t>which</a:t>
             </a:r>
             <a:r>
-              <a:rPr lang="de-DE" altLang="de-DE" sz="1600" dirty="0"/>
-              <a:t> </a:t>
-            </a:r>
-            <a:r>
-              <a:rPr lang="de-DE" altLang="de-DE" sz="1600" dirty="0" err="1"/>
+              <a:rPr lang="de-DE" altLang="de-DE" sz="1600" b="1" dirty="0"/>
+              <a:t> </a:t>
+            </a:r>
+            <a:r>
+              <a:rPr lang="de-DE" altLang="de-DE" sz="1600" b="1" dirty="0" err="1"/>
               <a:t>regions</a:t>
             </a:r>
             <a:r>
-              <a:rPr lang="de-DE" altLang="de-DE" sz="1600" dirty="0"/>
-              <a:t> </a:t>
-            </a:r>
-            <a:r>
-              <a:rPr lang="de-DE" altLang="de-DE" sz="1600" dirty="0" err="1"/>
+              <a:rPr lang="de-DE" altLang="de-DE" sz="1600" b="1" dirty="0"/>
+              <a:t> </a:t>
+            </a:r>
+            <a:r>
+              <a:rPr lang="de-DE" altLang="de-DE" sz="1600" b="1" dirty="0" err="1"/>
               <a:t>offer</a:t>
             </a:r>
             <a:r>
-              <a:rPr lang="de-DE" altLang="de-DE" sz="1600" dirty="0"/>
+              <a:rPr lang="de-DE" altLang="de-DE" sz="1600" b="1" dirty="0"/>
               <a:t> an </a:t>
             </a:r>
             <a:r>
-              <a:rPr lang="de-DE" altLang="de-DE" sz="1600" dirty="0" err="1"/>
+              <a:rPr lang="de-DE" altLang="de-DE" sz="1600" b="1" dirty="0" err="1"/>
               <a:t>above-average</a:t>
             </a:r>
             <a:r>
-              <a:rPr lang="de-DE" altLang="de-DE" sz="1600" dirty="0"/>
-              <a:t> </a:t>
-            </a:r>
-            <a:r>
-              <a:rPr lang="de-DE" altLang="de-DE" sz="1600" dirty="0" err="1"/>
+              <a:rPr lang="de-DE" altLang="de-DE" sz="1600" b="1" dirty="0"/>
+              <a:t> </a:t>
+            </a:r>
+            <a:r>
+              <a:rPr lang="de-DE" altLang="de-DE" sz="1600" b="1" dirty="0" err="1"/>
               <a:t>number</a:t>
             </a:r>
             <a:r>
-              <a:rPr lang="de-DE" altLang="de-DE" sz="1600" dirty="0"/>
-              <a:t> </a:t>
-            </a:r>
-            <a:r>
-              <a:rPr lang="de-DE" altLang="de-DE" sz="1600" dirty="0" err="1"/>
+              <a:rPr lang="de-DE" altLang="de-DE" sz="1600" b="1" dirty="0"/>
+              <a:t> </a:t>
+            </a:r>
+            <a:r>
+              <a:rPr lang="de-DE" altLang="de-DE" sz="1600" b="1" dirty="0" err="1"/>
               <a:t>of</a:t>
             </a:r>
             <a:r>
-              <a:rPr lang="de-DE" altLang="de-DE" sz="1600" dirty="0"/>
-              <a:t> </a:t>
-            </a:r>
-            <a:r>
-              <a:rPr lang="de-DE" altLang="de-DE" sz="1600" dirty="0" err="1"/>
+              <a:rPr lang="de-DE" altLang="de-DE" sz="1600" b="1" dirty="0"/>
+              <a:t> </a:t>
+            </a:r>
+            <a:r>
+              <a:rPr lang="de-DE" altLang="de-DE" sz="1600" b="1" dirty="0" err="1"/>
               <a:t>entry</a:t>
             </a:r>
             <a:r>
-              <a:rPr lang="de-DE" altLang="de-DE" sz="1600" dirty="0"/>
-              <a:t> </a:t>
-            </a:r>
-            <a:r>
-              <a:rPr lang="de-DE" altLang="de-DE" sz="1600" dirty="0" err="1"/>
+              <a:rPr lang="de-DE" altLang="de-DE" sz="1600" b="1" dirty="0"/>
+              <a:t> </a:t>
+            </a:r>
+            <a:r>
+              <a:rPr lang="de-DE" altLang="de-DE" sz="1600" b="1" dirty="0" err="1"/>
               <a:t>opportunities</a:t>
             </a:r>
             <a:r>
-              <a:rPr lang="de-DE" altLang="de-DE" sz="1600" dirty="0"/>
+              <a:rPr lang="de-DE" altLang="de-DE" sz="1600" b="1" dirty="0"/>
               <a:t>?</a:t>
             </a:r>
           </a:p>
           <a:p>
-            <a:pPr lvl="0" eaLnBrk="0" fontAlgn="base" hangingPunct="0">
+            <a:pPr marL="342900" lvl="0" indent="-342900" eaLnBrk="0" fontAlgn="base" hangingPunct="0">
               <a:spcBef>
                 <a:spcPct val="0"/>
               </a:spcBef>
               <a:spcAft>
                 <a:spcPts val="600"/>
               </a:spcAft>
-              <a:buFontTx/>
-              <a:buAutoNum type="arabicPeriod" startAt="9"/>
+              <a:buFont typeface="+mj-lt"/>
+              <a:buAutoNum type="arabicPeriod" startAt="5"/>
             </a:pPr>
             <a:r>
               <a:rPr lang="de-DE" altLang="de-DE" sz="1600" dirty="0"/>
@@ -9322,39 +9309,35 @@
             </a:r>
           </a:p>
           <a:p>
-            <a:pPr lvl="0" eaLnBrk="0" fontAlgn="base" hangingPunct="0">
+            <a:pPr marL="342900" lvl="0" indent="-342900" eaLnBrk="0" fontAlgn="base" hangingPunct="0">
               <a:spcBef>
                 <a:spcPct val="0"/>
               </a:spcBef>
               <a:spcAft>
                 <a:spcPts val="600"/>
               </a:spcAft>
-              <a:buFontTx/>
-              <a:buAutoNum type="arabicPeriod" startAt="10"/>
+              <a:buFont typeface="+mj-lt"/>
+              <a:buAutoNum type="arabicPeriod" startAt="5"/>
             </a:pPr>
-            <a:r>
-              <a:rPr lang="de-DE" altLang="de-DE" sz="1600" dirty="0"/>
-              <a:t> </a:t>
-            </a:r>
             <a:r>
               <a:rPr lang="de-DE" altLang="de-DE" sz="1600" dirty="0" err="1"/>
               <a:t>Which</a:t>
             </a:r>
             <a:r>
               <a:rPr lang="de-DE" altLang="de-DE" sz="1600" dirty="0"/>
-              <a:t> formal </a:t>
+              <a:t> soft </a:t>
             </a:r>
             <a:r>
               <a:rPr lang="de-DE" altLang="de-DE" sz="1600" dirty="0" err="1"/>
-              <a:t>qualifications</a:t>
+              <a:t>skills</a:t>
             </a:r>
             <a:r>
               <a:rPr lang="de-DE" altLang="de-DE" sz="1600" dirty="0"/>
-              <a:t> (school-</a:t>
+              <a:t> vs. </a:t>
             </a:r>
             <a:r>
               <a:rPr lang="de-DE" altLang="de-DE" sz="1600" dirty="0" err="1"/>
-              <a:t>leaving</a:t>
+              <a:t>hard</a:t>
             </a:r>
             <a:r>
               <a:rPr lang="de-DE" altLang="de-DE" sz="1600" dirty="0"/>
@@ -9362,35 +9345,11 @@
             </a:r>
             <a:r>
               <a:rPr lang="de-DE" altLang="de-DE" sz="1600" dirty="0" err="1"/>
-              <a:t>certificate</a:t>
+              <a:t>skills</a:t>
             </a:r>
             <a:r>
               <a:rPr lang="de-DE" altLang="de-DE" sz="1600" dirty="0"/>
-              <a:t>, </a:t>
-            </a:r>
-            <a:r>
-              <a:rPr lang="de-DE" altLang="de-DE" sz="1600" dirty="0" err="1"/>
-              <a:t>vocational</a:t>
-            </a:r>
-            <a:r>
-              <a:rPr lang="de-DE" altLang="de-DE" sz="1600" dirty="0"/>
-              <a:t> </a:t>
-            </a:r>
-            <a:r>
-              <a:rPr lang="de-DE" altLang="de-DE" sz="1600" dirty="0" err="1"/>
-              <a:t>qualification</a:t>
-            </a:r>
-            <a:r>
-              <a:rPr lang="de-DE" altLang="de-DE" sz="1600" dirty="0"/>
-              <a:t>, additional </a:t>
-            </a:r>
-            <a:r>
-              <a:rPr lang="de-DE" altLang="de-DE" sz="1600" dirty="0" err="1"/>
-              <a:t>certifications</a:t>
-            </a:r>
-            <a:r>
-              <a:rPr lang="de-DE" altLang="de-DE" sz="1600" dirty="0"/>
-              <a:t>) </a:t>
+              <a:t> </a:t>
             </a:r>
             <a:r>
               <a:rPr lang="de-DE" altLang="de-DE" sz="1600" dirty="0" err="1"/>
@@ -9410,23 +9369,23 @@
             </a:r>
             <a:r>
               <a:rPr lang="de-DE" altLang="de-DE" sz="1600" dirty="0" err="1"/>
-              <a:t>frequently</a:t>
+              <a:t>emphasized</a:t>
             </a:r>
             <a:r>
               <a:rPr lang="de-DE" altLang="de-DE" sz="1600" dirty="0"/>
-              <a:t> </a:t>
+              <a:t> in </a:t>
             </a:r>
             <a:r>
               <a:rPr lang="de-DE" altLang="de-DE" sz="1600" dirty="0" err="1"/>
-              <a:t>required</a:t>
+              <a:t>jobs</a:t>
             </a:r>
             <a:r>
               <a:rPr lang="de-DE" altLang="de-DE" sz="1600" dirty="0"/>
-              <a:t> in a </a:t>
+              <a:t>, and </a:t>
             </a:r>
             <a:r>
               <a:rPr lang="de-DE" altLang="de-DE" sz="1600" dirty="0" err="1"/>
-              <a:t>region’s</a:t>
+              <a:t>to</a:t>
             </a:r>
             <a:r>
               <a:rPr lang="de-DE" altLang="de-DE" sz="1600" dirty="0"/>
@@ -9434,7 +9393,7 @@
             </a:r>
             <a:r>
               <a:rPr lang="de-DE" altLang="de-DE" sz="1600" dirty="0" err="1"/>
-              <a:t>job</a:t>
+              <a:t>what</a:t>
             </a:r>
             <a:r>
               <a:rPr lang="de-DE" altLang="de-DE" sz="1600" dirty="0"/>
@@ -9442,19 +9401,11 @@
             </a:r>
             <a:r>
               <a:rPr lang="de-DE" altLang="de-DE" sz="1600" dirty="0" err="1"/>
-              <a:t>ads</a:t>
+              <a:t>extent</a:t>
             </a:r>
             <a:r>
               <a:rPr lang="de-DE" altLang="de-DE" sz="1600" dirty="0"/>
-              <a:t> — and do </a:t>
-            </a:r>
-            <a:r>
-              <a:rPr lang="de-DE" altLang="de-DE" sz="1600" dirty="0" err="1"/>
-              <a:t>local</a:t>
-            </a:r>
-            <a:r>
-              <a:rPr lang="de-DE" altLang="de-DE" sz="1600" dirty="0"/>
-              <a:t> </a:t>
+              <a:t> do </a:t>
             </a:r>
             <a:r>
               <a:rPr lang="de-DE" altLang="de-DE" sz="1600" dirty="0" err="1"/>
@@ -9466,7 +9417,7 @@
             </a:r>
             <a:r>
               <a:rPr lang="de-DE" altLang="de-DE" sz="1600" dirty="0" err="1"/>
-              <a:t>programs</a:t>
+              <a:t>curricula</a:t>
             </a:r>
             <a:r>
               <a:rPr lang="de-DE" altLang="de-DE" sz="1600" dirty="0"/>
@@ -9474,7 +9425,7 @@
             </a:r>
             <a:r>
               <a:rPr lang="de-DE" altLang="de-DE" sz="1600" dirty="0" err="1"/>
-              <a:t>reflect</a:t>
+              <a:t>address</a:t>
             </a:r>
             <a:r>
               <a:rPr lang="de-DE" altLang="de-DE" sz="1600" dirty="0"/>
@@ -9486,11 +9437,11 @@
             </a:r>
             <a:r>
               <a:rPr lang="de-DE" altLang="de-DE" sz="1600" dirty="0"/>
-              <a:t> </a:t>
+              <a:t> soft-skill </a:t>
             </a:r>
             <a:r>
               <a:rPr lang="de-DE" altLang="de-DE" sz="1600" dirty="0" err="1"/>
-              <a:t>requirements</a:t>
+              <a:t>components</a:t>
             </a:r>
             <a:r>
               <a:rPr lang="de-DE" altLang="de-DE" sz="1600" dirty="0"/>
@@ -9498,175 +9449,15 @@
             </a:r>
           </a:p>
           <a:p>
-            <a:pPr lvl="0" eaLnBrk="0" fontAlgn="base" hangingPunct="0">
+            <a:pPr marL="342900" lvl="0" indent="-342900" eaLnBrk="0" fontAlgn="base" hangingPunct="0">
               <a:spcBef>
                 <a:spcPct val="0"/>
               </a:spcBef>
               <a:spcAft>
                 <a:spcPts val="600"/>
               </a:spcAft>
-              <a:buFontTx/>
-              <a:buAutoNum type="arabicPeriod" startAt="11"/>
-            </a:pPr>
-            <a:r>
-              <a:rPr lang="de-DE" altLang="de-DE" sz="1600" dirty="0"/>
-              <a:t> </a:t>
-            </a:r>
-            <a:r>
-              <a:rPr lang="de-DE" altLang="de-DE" sz="1600" dirty="0" err="1"/>
-              <a:t>Which</a:t>
-            </a:r>
-            <a:r>
-              <a:rPr lang="de-DE" altLang="de-DE" sz="1600" dirty="0"/>
-              <a:t> soft </a:t>
-            </a:r>
-            <a:r>
-              <a:rPr lang="de-DE" altLang="de-DE" sz="1600" dirty="0" err="1"/>
-              <a:t>skills</a:t>
-            </a:r>
-            <a:r>
-              <a:rPr lang="de-DE" altLang="de-DE" sz="1600" dirty="0"/>
-              <a:t> vs. </a:t>
-            </a:r>
-            <a:r>
-              <a:rPr lang="de-DE" altLang="de-DE" sz="1600" dirty="0" err="1"/>
-              <a:t>hard</a:t>
-            </a:r>
-            <a:r>
-              <a:rPr lang="de-DE" altLang="de-DE" sz="1600" dirty="0"/>
-              <a:t> </a:t>
-            </a:r>
-            <a:r>
-              <a:rPr lang="de-DE" altLang="de-DE" sz="1600" dirty="0" err="1"/>
-              <a:t>skills</a:t>
-            </a:r>
-            <a:r>
-              <a:rPr lang="de-DE" altLang="de-DE" sz="1600" dirty="0"/>
-              <a:t> </a:t>
-            </a:r>
-            <a:r>
-              <a:rPr lang="de-DE" altLang="de-DE" sz="1600" dirty="0" err="1"/>
-              <a:t>are</a:t>
-            </a:r>
-            <a:r>
-              <a:rPr lang="de-DE" altLang="de-DE" sz="1600" dirty="0"/>
-              <a:t> </a:t>
-            </a:r>
-            <a:r>
-              <a:rPr lang="de-DE" altLang="de-DE" sz="1600" dirty="0" err="1"/>
-              <a:t>most</a:t>
-            </a:r>
-            <a:r>
-              <a:rPr lang="de-DE" altLang="de-DE" sz="1600" dirty="0"/>
-              <a:t> </a:t>
-            </a:r>
-            <a:r>
-              <a:rPr lang="de-DE" altLang="de-DE" sz="1600" dirty="0" err="1"/>
-              <a:t>emphasized</a:t>
-            </a:r>
-            <a:r>
-              <a:rPr lang="de-DE" altLang="de-DE" sz="1600" dirty="0"/>
-              <a:t> in </a:t>
-            </a:r>
-            <a:r>
-              <a:rPr lang="de-DE" altLang="de-DE" sz="1600" dirty="0" err="1"/>
-              <a:t>jobs</a:t>
-            </a:r>
-            <a:r>
-              <a:rPr lang="de-DE" altLang="de-DE" sz="1600" dirty="0"/>
-              <a:t>, and </a:t>
-            </a:r>
-            <a:r>
-              <a:rPr lang="de-DE" altLang="de-DE" sz="1600" dirty="0" err="1"/>
-              <a:t>to</a:t>
-            </a:r>
-            <a:r>
-              <a:rPr lang="de-DE" altLang="de-DE" sz="1600" dirty="0"/>
-              <a:t> </a:t>
-            </a:r>
-            <a:r>
-              <a:rPr lang="de-DE" altLang="de-DE" sz="1600" dirty="0" err="1"/>
-              <a:t>what</a:t>
-            </a:r>
-            <a:r>
-              <a:rPr lang="de-DE" altLang="de-DE" sz="1600" dirty="0"/>
-              <a:t> </a:t>
-            </a:r>
-            <a:r>
-              <a:rPr lang="de-DE" altLang="de-DE" sz="1600" dirty="0" err="1"/>
-              <a:t>extent</a:t>
-            </a:r>
-            <a:r>
-              <a:rPr lang="de-DE" altLang="de-DE" sz="1600" dirty="0"/>
-              <a:t> do </a:t>
-            </a:r>
-            <a:r>
-              <a:rPr lang="de-DE" altLang="de-DE" sz="1600" dirty="0" err="1"/>
-              <a:t>training</a:t>
-            </a:r>
-            <a:r>
-              <a:rPr lang="de-DE" altLang="de-DE" sz="1600" dirty="0"/>
-              <a:t> </a:t>
-            </a:r>
-            <a:r>
-              <a:rPr lang="de-DE" altLang="de-DE" sz="1600" dirty="0" err="1"/>
-              <a:t>curricula</a:t>
-            </a:r>
-            <a:r>
-              <a:rPr lang="de-DE" altLang="de-DE" sz="1600" dirty="0"/>
-              <a:t> (</a:t>
-            </a:r>
-            <a:r>
-              <a:rPr lang="de-DE" altLang="de-DE" sz="1600" dirty="0" err="1"/>
-              <a:t>module</a:t>
-            </a:r>
-            <a:r>
-              <a:rPr lang="de-DE" altLang="de-DE" sz="1600" dirty="0"/>
-              <a:t>/TQ </a:t>
-            </a:r>
-            <a:r>
-              <a:rPr lang="de-DE" altLang="de-DE" sz="1600" dirty="0" err="1"/>
-              <a:t>descriptions</a:t>
-            </a:r>
-            <a:r>
-              <a:rPr lang="de-DE" altLang="de-DE" sz="1600" dirty="0"/>
-              <a:t>) </a:t>
-            </a:r>
-            <a:r>
-              <a:rPr lang="de-DE" altLang="de-DE" sz="1600" dirty="0" err="1"/>
-              <a:t>address</a:t>
-            </a:r>
-            <a:r>
-              <a:rPr lang="de-DE" altLang="de-DE" sz="1600" dirty="0"/>
-              <a:t> </a:t>
-            </a:r>
-            <a:r>
-              <a:rPr lang="de-DE" altLang="de-DE" sz="1600" dirty="0" err="1"/>
-              <a:t>these</a:t>
-            </a:r>
-            <a:r>
-              <a:rPr lang="de-DE" altLang="de-DE" sz="1600" dirty="0"/>
-              <a:t> soft-skill </a:t>
-            </a:r>
-            <a:r>
-              <a:rPr lang="de-DE" altLang="de-DE" sz="1600" dirty="0" err="1"/>
-              <a:t>components</a:t>
-            </a:r>
-            <a:r>
-              <a:rPr lang="de-DE" altLang="de-DE" sz="1600" dirty="0"/>
-              <a:t>?</a:t>
-            </a:r>
-          </a:p>
-          <a:p>
-            <a:pPr lvl="0" eaLnBrk="0" fontAlgn="base" hangingPunct="0">
-              <a:spcBef>
-                <a:spcPct val="0"/>
-              </a:spcBef>
-              <a:spcAft>
-                <a:spcPts val="600"/>
-              </a:spcAft>
-              <a:buFontTx/>
-              <a:buAutoNum type="arabicPeriod" startAt="12"/>
+              <a:buFont typeface="+mj-lt"/>
+              <a:buAutoNum type="arabicPeriod" startAt="5"/>
             </a:pPr>
             <a:r>
               <a:rPr lang="de-DE" altLang="de-DE" sz="1600" dirty="0"/>
